--- a/260418_add/ppt/SuppFig_S8_5scenario_ablation_native_editable.pptx
+++ b/260418_add/ppt/SuppFig_S8_5scenario_ablation_native_editable.pptx
@@ -3104,6 +3104,7 @@
             <a:avLst/>
           </a:prstGeom>
           <a:noFill/>
+          <a:effectLst/>
         </p:spPr>
         <p:txBody>
           <a:bodyPr wrap="square" lIns="0" rIns="0" tIns="0" bIns="0" anchor="ctr">
@@ -3143,6 +3144,7 @@
               <a:srgbClr val="333333"/>
             </a:solidFill>
           </a:ln>
+          <a:effectLst/>
         </p:spPr>
         <p:style>
           <a:lnRef idx="2">
@@ -3178,6 +3180,7 @@
               <a:srgbClr val="333333"/>
             </a:solidFill>
           </a:ln>
+          <a:effectLst/>
         </p:spPr>
         <p:style>
           <a:lnRef idx="2">
@@ -3213,6 +3216,7 @@
               <a:srgbClr val="333333"/>
             </a:solidFill>
           </a:ln>
+          <a:effectLst/>
         </p:spPr>
         <p:style>
           <a:lnRef idx="2">
@@ -3244,6 +3248,7 @@
             <a:avLst/>
           </a:prstGeom>
           <a:noFill/>
+          <a:effectLst/>
         </p:spPr>
         <p:txBody>
           <a:bodyPr wrap="square" lIns="0" rIns="0" tIns="0" bIns="0" anchor="ctr">
@@ -3283,6 +3288,7 @@
               <a:srgbClr val="333333"/>
             </a:solidFill>
           </a:ln>
+          <a:effectLst/>
         </p:spPr>
         <p:style>
           <a:lnRef idx="2">
@@ -3314,6 +3320,7 @@
             <a:avLst/>
           </a:prstGeom>
           <a:noFill/>
+          <a:effectLst/>
         </p:spPr>
         <p:txBody>
           <a:bodyPr wrap="square" lIns="0" rIns="0" tIns="0" bIns="0" anchor="ctr">
@@ -3353,6 +3360,7 @@
               <a:srgbClr val="333333"/>
             </a:solidFill>
           </a:ln>
+          <a:effectLst/>
         </p:spPr>
         <p:style>
           <a:lnRef idx="2">
@@ -3384,6 +3392,7 @@
             <a:avLst/>
           </a:prstGeom>
           <a:noFill/>
+          <a:effectLst/>
         </p:spPr>
         <p:txBody>
           <a:bodyPr wrap="square" lIns="0" rIns="0" tIns="0" bIns="0" anchor="ctr">
@@ -3423,6 +3432,7 @@
               <a:srgbClr val="333333"/>
             </a:solidFill>
           </a:ln>
+          <a:effectLst/>
         </p:spPr>
         <p:style>
           <a:lnRef idx="2">
@@ -3454,6 +3464,7 @@
             <a:avLst/>
           </a:prstGeom>
           <a:noFill/>
+          <a:effectLst/>
         </p:spPr>
         <p:txBody>
           <a:bodyPr wrap="square" lIns="0" rIns="0" tIns="0" bIns="0" anchor="ctr">
@@ -3493,6 +3504,7 @@
               <a:srgbClr val="333333"/>
             </a:solidFill>
           </a:ln>
+          <a:effectLst/>
         </p:spPr>
         <p:style>
           <a:lnRef idx="2">
@@ -3524,6 +3536,7 @@
             <a:avLst/>
           </a:prstGeom>
           <a:noFill/>
+          <a:effectLst/>
         </p:spPr>
         <p:txBody>
           <a:bodyPr wrap="square" lIns="0" rIns="0" tIns="0" bIns="0" anchor="ctr">
@@ -3559,6 +3572,7 @@
             <a:avLst/>
           </a:prstGeom>
           <a:noFill/>
+          <a:effectLst/>
         </p:spPr>
         <p:txBody>
           <a:bodyPr wrap="square" lIns="0" rIns="0" tIns="0" bIns="0" anchor="ctr">
@@ -3594,6 +3608,7 @@
             <a:avLst/>
           </a:prstGeom>
           <a:noFill/>
+          <a:effectLst/>
         </p:spPr>
         <p:txBody>
           <a:bodyPr wrap="square" lIns="0" rIns="0" tIns="0" bIns="0" anchor="ctr">
@@ -3633,6 +3648,7 @@
               <a:srgbClr val="BBBBBB"/>
             </a:solidFill>
           </a:ln>
+          <a:effectLst/>
         </p:spPr>
         <p:style>
           <a:lnRef idx="2">
@@ -3714,6 +3730,7 @@
               <a:srgbClr val="222222"/>
             </a:solidFill>
           </a:ln>
+          <a:effectLst/>
         </p:spPr>
         <p:style>
           <a:lnRef idx="2">
@@ -3749,6 +3766,7 @@
               <a:srgbClr val="222222"/>
             </a:solidFill>
           </a:ln>
+          <a:effectLst/>
         </p:spPr>
         <p:style>
           <a:lnRef idx="2">
@@ -3784,6 +3802,7 @@
               <a:srgbClr val="222222"/>
             </a:solidFill>
           </a:ln>
+          <a:effectLst/>
         </p:spPr>
         <p:style>
           <a:lnRef idx="2">
@@ -3815,6 +3834,7 @@
             <a:avLst/>
           </a:prstGeom>
           <a:noFill/>
+          <a:effectLst/>
         </p:spPr>
         <p:txBody>
           <a:bodyPr wrap="square" lIns="0" rIns="0" tIns="0" bIns="0" anchor="ctr">
@@ -3850,6 +3870,7 @@
             <a:avLst/>
           </a:prstGeom>
           <a:noFill/>
+          <a:effectLst/>
         </p:spPr>
         <p:txBody>
           <a:bodyPr wrap="square" lIns="0" rIns="0" tIns="0" bIns="0" anchor="ctr">
@@ -3886,7 +3907,7 @@
             <a:avLst/>
           </a:prstGeom>
           <a:solidFill>
-            <a:srgbClr val="2E86AB"/>
+            <a:srgbClr val="0A7D6E"/>
           </a:solidFill>
           <a:ln w="3810">
             <a:solidFill>
@@ -3936,6 +3957,7 @@
               <a:srgbClr val="222222"/>
             </a:solidFill>
           </a:ln>
+          <a:effectLst/>
         </p:spPr>
         <p:style>
           <a:lnRef idx="2">
@@ -3971,6 +3993,7 @@
               <a:srgbClr val="222222"/>
             </a:solidFill>
           </a:ln>
+          <a:effectLst/>
         </p:spPr>
         <p:style>
           <a:lnRef idx="2">
@@ -4006,6 +4029,7 @@
               <a:srgbClr val="222222"/>
             </a:solidFill>
           </a:ln>
+          <a:effectLst/>
         </p:spPr>
         <p:style>
           <a:lnRef idx="2">
@@ -4037,6 +4061,7 @@
             <a:avLst/>
           </a:prstGeom>
           <a:noFill/>
+          <a:effectLst/>
         </p:spPr>
         <p:txBody>
           <a:bodyPr wrap="square" lIns="0" rIns="0" tIns="0" bIns="0" anchor="ctr">
@@ -4072,6 +4097,7 @@
             <a:avLst/>
           </a:prstGeom>
           <a:noFill/>
+          <a:effectLst/>
         </p:spPr>
         <p:txBody>
           <a:bodyPr wrap="square" lIns="0" rIns="0" tIns="0" bIns="0" anchor="ctr">
@@ -4158,6 +4184,7 @@
               <a:srgbClr val="222222"/>
             </a:solidFill>
           </a:ln>
+          <a:effectLst/>
         </p:spPr>
         <p:style>
           <a:lnRef idx="2">
@@ -4193,6 +4220,7 @@
               <a:srgbClr val="222222"/>
             </a:solidFill>
           </a:ln>
+          <a:effectLst/>
         </p:spPr>
         <p:style>
           <a:lnRef idx="2">
@@ -4228,6 +4256,7 @@
               <a:srgbClr val="222222"/>
             </a:solidFill>
           </a:ln>
+          <a:effectLst/>
         </p:spPr>
         <p:style>
           <a:lnRef idx="2">
@@ -4259,6 +4288,7 @@
             <a:avLst/>
           </a:prstGeom>
           <a:noFill/>
+          <a:effectLst/>
         </p:spPr>
         <p:txBody>
           <a:bodyPr wrap="square" lIns="0" rIns="0" tIns="0" bIns="0" anchor="ctr">
@@ -4294,6 +4324,7 @@
             <a:avLst/>
           </a:prstGeom>
           <a:noFill/>
+          <a:effectLst/>
         </p:spPr>
         <p:txBody>
           <a:bodyPr wrap="square" lIns="0" rIns="0" tIns="0" bIns="0" anchor="ctr">
@@ -4380,6 +4411,7 @@
               <a:srgbClr val="222222"/>
             </a:solidFill>
           </a:ln>
+          <a:effectLst/>
         </p:spPr>
         <p:style>
           <a:lnRef idx="2">
@@ -4415,6 +4447,7 @@
               <a:srgbClr val="222222"/>
             </a:solidFill>
           </a:ln>
+          <a:effectLst/>
         </p:spPr>
         <p:style>
           <a:lnRef idx="2">
@@ -4450,6 +4483,7 @@
               <a:srgbClr val="222222"/>
             </a:solidFill>
           </a:ln>
+          <a:effectLst/>
         </p:spPr>
         <p:style>
           <a:lnRef idx="2">
@@ -4481,6 +4515,7 @@
             <a:avLst/>
           </a:prstGeom>
           <a:noFill/>
+          <a:effectLst/>
         </p:spPr>
         <p:txBody>
           <a:bodyPr wrap="square" lIns="0" rIns="0" tIns="0" bIns="0" anchor="ctr">
@@ -4516,6 +4551,7 @@
             <a:avLst/>
           </a:prstGeom>
           <a:noFill/>
+          <a:effectLst/>
         </p:spPr>
         <p:txBody>
           <a:bodyPr wrap="square" lIns="0" rIns="0" tIns="0" bIns="0" anchor="ctr">
@@ -4602,6 +4638,7 @@
               <a:srgbClr val="222222"/>
             </a:solidFill>
           </a:ln>
+          <a:effectLst/>
         </p:spPr>
         <p:style>
           <a:lnRef idx="2">
@@ -4637,6 +4674,7 @@
               <a:srgbClr val="222222"/>
             </a:solidFill>
           </a:ln>
+          <a:effectLst/>
         </p:spPr>
         <p:style>
           <a:lnRef idx="2">
@@ -4672,6 +4710,7 @@
               <a:srgbClr val="222222"/>
             </a:solidFill>
           </a:ln>
+          <a:effectLst/>
         </p:spPr>
         <p:style>
           <a:lnRef idx="2">
@@ -4703,6 +4742,7 @@
             <a:avLst/>
           </a:prstGeom>
           <a:noFill/>
+          <a:effectLst/>
         </p:spPr>
         <p:txBody>
           <a:bodyPr wrap="square" lIns="0" rIns="0" tIns="0" bIns="0" anchor="ctr">
@@ -4738,6 +4778,7 @@
             <a:avLst/>
           </a:prstGeom>
           <a:noFill/>
+          <a:effectLst/>
         </p:spPr>
         <p:txBody>
           <a:bodyPr wrap="square" lIns="0" rIns="0" tIns="0" bIns="0" anchor="ctr">
@@ -4774,6 +4815,7 @@
             <a:avLst/>
           </a:prstGeom>
           <a:noFill/>
+          <a:effectLst/>
         </p:spPr>
         <p:txBody>
           <a:bodyPr wrap="square" lIns="0" rIns="0" tIns="0" bIns="0" anchor="ctr">
@@ -4827,6 +4869,7 @@
             <a:avLst/>
           </a:prstGeom>
           <a:noFill/>
+          <a:effectLst/>
         </p:spPr>
         <p:txBody>
           <a:bodyPr wrap="square" lIns="0" rIns="0" tIns="0" bIns="0" anchor="ctr">
@@ -4866,6 +4909,7 @@
               <a:srgbClr val="333333"/>
             </a:solidFill>
           </a:ln>
+          <a:effectLst/>
         </p:spPr>
         <p:style>
           <a:lnRef idx="2">
@@ -4901,6 +4945,7 @@
               <a:srgbClr val="333333"/>
             </a:solidFill>
           </a:ln>
+          <a:effectLst/>
         </p:spPr>
         <p:style>
           <a:lnRef idx="2">
@@ -4936,6 +4981,7 @@
               <a:srgbClr val="333333"/>
             </a:solidFill>
           </a:ln>
+          <a:effectLst/>
         </p:spPr>
         <p:style>
           <a:lnRef idx="2">
@@ -4967,6 +5013,7 @@
             <a:avLst/>
           </a:prstGeom>
           <a:noFill/>
+          <a:effectLst/>
         </p:spPr>
         <p:txBody>
           <a:bodyPr wrap="square" lIns="0" rIns="0" tIns="0" bIns="0" anchor="ctr">
@@ -5006,6 +5053,7 @@
               <a:srgbClr val="333333"/>
             </a:solidFill>
           </a:ln>
+          <a:effectLst/>
         </p:spPr>
         <p:style>
           <a:lnRef idx="2">
@@ -5037,6 +5085,7 @@
             <a:avLst/>
           </a:prstGeom>
           <a:noFill/>
+          <a:effectLst/>
         </p:spPr>
         <p:txBody>
           <a:bodyPr wrap="square" lIns="0" rIns="0" tIns="0" bIns="0" anchor="ctr">
@@ -5076,6 +5125,7 @@
               <a:srgbClr val="333333"/>
             </a:solidFill>
           </a:ln>
+          <a:effectLst/>
         </p:spPr>
         <p:style>
           <a:lnRef idx="2">
@@ -5107,6 +5157,7 @@
             <a:avLst/>
           </a:prstGeom>
           <a:noFill/>
+          <a:effectLst/>
         </p:spPr>
         <p:txBody>
           <a:bodyPr wrap="square" lIns="0" rIns="0" tIns="0" bIns="0" anchor="ctr">
@@ -5146,6 +5197,7 @@
               <a:srgbClr val="333333"/>
             </a:solidFill>
           </a:ln>
+          <a:effectLst/>
         </p:spPr>
         <p:style>
           <a:lnRef idx="2">
@@ -5177,6 +5229,7 @@
             <a:avLst/>
           </a:prstGeom>
           <a:noFill/>
+          <a:effectLst/>
         </p:spPr>
         <p:txBody>
           <a:bodyPr wrap="square" lIns="0" rIns="0" tIns="0" bIns="0" anchor="ctr">
@@ -5216,6 +5269,7 @@
               <a:srgbClr val="333333"/>
             </a:solidFill>
           </a:ln>
+          <a:effectLst/>
         </p:spPr>
         <p:style>
           <a:lnRef idx="2">
@@ -5247,6 +5301,7 @@
             <a:avLst/>
           </a:prstGeom>
           <a:noFill/>
+          <a:effectLst/>
         </p:spPr>
         <p:txBody>
           <a:bodyPr wrap="square" lIns="0" rIns="0" tIns="0" bIns="0" anchor="ctr">
@@ -5286,6 +5341,7 @@
               <a:srgbClr val="333333"/>
             </a:solidFill>
           </a:ln>
+          <a:effectLst/>
         </p:spPr>
         <p:style>
           <a:lnRef idx="2">
@@ -5317,6 +5373,7 @@
             <a:avLst/>
           </a:prstGeom>
           <a:noFill/>
+          <a:effectLst/>
         </p:spPr>
         <p:txBody>
           <a:bodyPr wrap="square" lIns="0" rIns="0" tIns="0" bIns="0" anchor="ctr">
@@ -5356,6 +5413,7 @@
               <a:srgbClr val="333333"/>
             </a:solidFill>
           </a:ln>
+          <a:effectLst/>
         </p:spPr>
         <p:style>
           <a:lnRef idx="2">
@@ -5387,6 +5445,7 @@
             <a:avLst/>
           </a:prstGeom>
           <a:noFill/>
+          <a:effectLst/>
         </p:spPr>
         <p:txBody>
           <a:bodyPr wrap="square" lIns="0" rIns="0" tIns="0" bIns="0" anchor="ctr">
@@ -5426,6 +5485,7 @@
               <a:srgbClr val="333333"/>
             </a:solidFill>
           </a:ln>
+          <a:effectLst/>
         </p:spPr>
         <p:style>
           <a:lnRef idx="2">
@@ -5457,6 +5517,7 @@
             <a:avLst/>
           </a:prstGeom>
           <a:noFill/>
+          <a:effectLst/>
         </p:spPr>
         <p:txBody>
           <a:bodyPr wrap="square" lIns="0" rIns="0" tIns="0" bIns="0" anchor="ctr">
@@ -5496,6 +5557,7 @@
               <a:srgbClr val="333333"/>
             </a:solidFill>
           </a:ln>
+          <a:effectLst/>
         </p:spPr>
         <p:style>
           <a:lnRef idx="2">
@@ -5527,6 +5589,7 @@
             <a:avLst/>
           </a:prstGeom>
           <a:noFill/>
+          <a:effectLst/>
         </p:spPr>
         <p:txBody>
           <a:bodyPr wrap="square" lIns="0" rIns="0" tIns="0" bIns="0" anchor="ctr">
@@ -5566,6 +5629,7 @@
               <a:srgbClr val="333333"/>
             </a:solidFill>
           </a:ln>
+          <a:effectLst/>
         </p:spPr>
         <p:style>
           <a:lnRef idx="2">
@@ -5597,6 +5661,7 @@
             <a:avLst/>
           </a:prstGeom>
           <a:noFill/>
+          <a:effectLst/>
         </p:spPr>
         <p:txBody>
           <a:bodyPr wrap="square" lIns="0" rIns="0" tIns="0" bIns="0" anchor="ctr">
@@ -5636,6 +5701,7 @@
               <a:srgbClr val="333333"/>
             </a:solidFill>
           </a:ln>
+          <a:effectLst/>
         </p:spPr>
         <p:style>
           <a:lnRef idx="2">
@@ -5667,6 +5733,7 @@
             <a:avLst/>
           </a:prstGeom>
           <a:noFill/>
+          <a:effectLst/>
         </p:spPr>
         <p:txBody>
           <a:bodyPr wrap="square" lIns="0" rIns="0" tIns="0" bIns="0" anchor="ctr">
@@ -5706,6 +5773,7 @@
               <a:srgbClr val="333333"/>
             </a:solidFill>
           </a:ln>
+          <a:effectLst/>
         </p:spPr>
         <p:style>
           <a:lnRef idx="2">
@@ -5737,6 +5805,7 @@
             <a:avLst/>
           </a:prstGeom>
           <a:noFill/>
+          <a:effectLst/>
         </p:spPr>
         <p:txBody>
           <a:bodyPr wrap="square" lIns="0" rIns="0" tIns="0" bIns="0" anchor="ctr">
@@ -5772,6 +5841,7 @@
             <a:avLst/>
           </a:prstGeom>
           <a:noFill/>
+          <a:effectLst/>
         </p:spPr>
         <p:txBody>
           <a:bodyPr wrap="square" lIns="0" rIns="0" tIns="0" bIns="0" anchor="ctr">
@@ -5807,6 +5877,7 @@
             <a:avLst/>
           </a:prstGeom>
           <a:noFill/>
+          <a:effectLst/>
         </p:spPr>
         <p:txBody>
           <a:bodyPr wrap="square" lIns="0" rIns="0" tIns="0" bIns="0" anchor="ctr">
@@ -5846,6 +5917,7 @@
               <a:srgbClr val="BBBBBB"/>
             </a:solidFill>
           </a:ln>
+          <a:effectLst/>
         </p:spPr>
         <p:style>
           <a:lnRef idx="2">
@@ -5881,6 +5953,7 @@
               <a:srgbClr val="AAAAAA"/>
             </a:solidFill>
           </a:ln>
+          <a:effectLst/>
         </p:spPr>
         <p:style>
           <a:lnRef idx="2">
@@ -5916,6 +5989,7 @@
               <a:srgbClr val="AAAAAA"/>
             </a:solidFill>
           </a:ln>
+          <a:effectLst/>
         </p:spPr>
         <p:style>
           <a:lnRef idx="2">
@@ -5951,6 +6025,7 @@
               <a:srgbClr val="AAAAAA"/>
             </a:solidFill>
           </a:ln>
+          <a:effectLst/>
         </p:spPr>
         <p:style>
           <a:lnRef idx="2">
@@ -5986,6 +6061,7 @@
               <a:srgbClr val="AAAAAA"/>
             </a:solidFill>
           </a:ln>
+          <a:effectLst/>
         </p:spPr>
         <p:style>
           <a:lnRef idx="2">
@@ -6021,6 +6097,7 @@
               <a:srgbClr val="AAAAAA"/>
             </a:solidFill>
           </a:ln>
+          <a:effectLst/>
         </p:spPr>
         <p:style>
           <a:lnRef idx="2">
@@ -6056,6 +6133,7 @@
               <a:srgbClr val="AAAAAA"/>
             </a:solidFill>
           </a:ln>
+          <a:effectLst/>
         </p:spPr>
         <p:style>
           <a:lnRef idx="2">
@@ -6091,6 +6169,7 @@
               <a:srgbClr val="AAAAAA"/>
             </a:solidFill>
           </a:ln>
+          <a:effectLst/>
         </p:spPr>
         <p:style>
           <a:lnRef idx="2">
@@ -6126,6 +6205,7 @@
               <a:srgbClr val="AAAAAA"/>
             </a:solidFill>
           </a:ln>
+          <a:effectLst/>
         </p:spPr>
         <p:style>
           <a:lnRef idx="2">
@@ -6161,6 +6241,7 @@
               <a:srgbClr val="AAAAAA"/>
             </a:solidFill>
           </a:ln>
+          <a:effectLst/>
         </p:spPr>
         <p:style>
           <a:lnRef idx="2">
@@ -6196,6 +6277,7 @@
               <a:srgbClr val="AAAAAA"/>
             </a:solidFill>
           </a:ln>
+          <a:effectLst/>
         </p:spPr>
         <p:style>
           <a:lnRef idx="2">
@@ -6231,6 +6313,7 @@
               <a:srgbClr val="AAAAAA"/>
             </a:solidFill>
           </a:ln>
+          <a:effectLst/>
         </p:spPr>
         <p:style>
           <a:lnRef idx="2">
@@ -6266,6 +6349,7 @@
               <a:srgbClr val="AAAAAA"/>
             </a:solidFill>
           </a:ln>
+          <a:effectLst/>
         </p:spPr>
         <p:style>
           <a:lnRef idx="2">
@@ -6301,6 +6385,7 @@
               <a:srgbClr val="AAAAAA"/>
             </a:solidFill>
           </a:ln>
+          <a:effectLst/>
         </p:spPr>
         <p:style>
           <a:lnRef idx="2">
@@ -6336,6 +6421,7 @@
               <a:srgbClr val="AAAAAA"/>
             </a:solidFill>
           </a:ln>
+          <a:effectLst/>
         </p:spPr>
         <p:style>
           <a:lnRef idx="2">
@@ -6371,6 +6457,7 @@
               <a:srgbClr val="AAAAAA"/>
             </a:solidFill>
           </a:ln>
+          <a:effectLst/>
         </p:spPr>
         <p:style>
           <a:lnRef idx="2">
@@ -6406,6 +6493,7 @@
               <a:srgbClr val="AAAAAA"/>
             </a:solidFill>
           </a:ln>
+          <a:effectLst/>
         </p:spPr>
         <p:style>
           <a:lnRef idx="2">
@@ -6437,6 +6525,7 @@
             <a:avLst/>
           </a:prstGeom>
           <a:noFill/>
+          <a:effectLst/>
         </p:spPr>
         <p:txBody>
           <a:bodyPr wrap="square" lIns="0" rIns="0" tIns="0" bIns="0" anchor="ctr">
@@ -6473,9 +6562,10 @@
           </a:prstGeom>
           <a:ln w="15240">
             <a:solidFill>
-              <a:srgbClr val="2E86AB"/>
-            </a:solidFill>
-          </a:ln>
+              <a:srgbClr val="0A7D6E"/>
+            </a:solidFill>
+          </a:ln>
+          <a:effectLst/>
         </p:spPr>
         <p:style>
           <a:lnRef idx="2">
@@ -6508,9 +6598,10 @@
           </a:prstGeom>
           <a:ln w="15240">
             <a:solidFill>
-              <a:srgbClr val="2E86AB"/>
-            </a:solidFill>
-          </a:ln>
+              <a:srgbClr val="0A7D6E"/>
+            </a:solidFill>
+          </a:ln>
+          <a:effectLst/>
         </p:spPr>
         <p:style>
           <a:lnRef idx="2">
@@ -6543,9 +6634,10 @@
           </a:prstGeom>
           <a:ln w="15240">
             <a:solidFill>
-              <a:srgbClr val="2E86AB"/>
-            </a:solidFill>
-          </a:ln>
+              <a:srgbClr val="0A7D6E"/>
+            </a:solidFill>
+          </a:ln>
+          <a:effectLst/>
         </p:spPr>
         <p:style>
           <a:lnRef idx="2">
@@ -6578,9 +6670,10 @@
           </a:prstGeom>
           <a:ln w="15240">
             <a:solidFill>
-              <a:srgbClr val="2E86AB"/>
-            </a:solidFill>
-          </a:ln>
+              <a:srgbClr val="0A7D6E"/>
+            </a:solidFill>
+          </a:ln>
+          <a:effectLst/>
         </p:spPr>
         <p:style>
           <a:lnRef idx="2">
@@ -6613,9 +6706,10 @@
           </a:prstGeom>
           <a:ln w="15240">
             <a:solidFill>
-              <a:srgbClr val="2E86AB"/>
-            </a:solidFill>
-          </a:ln>
+              <a:srgbClr val="0A7D6E"/>
+            </a:solidFill>
+          </a:ln>
+          <a:effectLst/>
         </p:spPr>
         <p:style>
           <a:lnRef idx="2">
@@ -6648,9 +6742,10 @@
           </a:prstGeom>
           <a:ln w="15240">
             <a:solidFill>
-              <a:srgbClr val="2E86AB"/>
-            </a:solidFill>
-          </a:ln>
+              <a:srgbClr val="0A7D6E"/>
+            </a:solidFill>
+          </a:ln>
+          <a:effectLst/>
         </p:spPr>
         <p:style>
           <a:lnRef idx="2">
@@ -6683,9 +6778,10 @@
           </a:prstGeom>
           <a:ln w="15240">
             <a:solidFill>
-              <a:srgbClr val="2E86AB"/>
-            </a:solidFill>
-          </a:ln>
+              <a:srgbClr val="0A7D6E"/>
+            </a:solidFill>
+          </a:ln>
+          <a:effectLst/>
         </p:spPr>
         <p:style>
           <a:lnRef idx="2">
@@ -6718,9 +6814,10 @@
           </a:prstGeom>
           <a:ln w="15240">
             <a:solidFill>
-              <a:srgbClr val="2E86AB"/>
-            </a:solidFill>
-          </a:ln>
+              <a:srgbClr val="0A7D6E"/>
+            </a:solidFill>
+          </a:ln>
+          <a:effectLst/>
         </p:spPr>
         <p:style>
           <a:lnRef idx="2">
@@ -6753,9 +6850,10 @@
           </a:prstGeom>
           <a:ln w="15240">
             <a:solidFill>
-              <a:srgbClr val="2E86AB"/>
-            </a:solidFill>
-          </a:ln>
+              <a:srgbClr val="0A7D6E"/>
+            </a:solidFill>
+          </a:ln>
+          <a:effectLst/>
         </p:spPr>
         <p:style>
           <a:lnRef idx="2">
@@ -6788,9 +6886,10 @@
           </a:prstGeom>
           <a:ln w="15240">
             <a:solidFill>
-              <a:srgbClr val="2E86AB"/>
-            </a:solidFill>
-          </a:ln>
+              <a:srgbClr val="0A7D6E"/>
+            </a:solidFill>
+          </a:ln>
+          <a:effectLst/>
         </p:spPr>
         <p:style>
           <a:lnRef idx="2">
@@ -6823,9 +6922,10 @@
           </a:prstGeom>
           <a:ln w="15240">
             <a:solidFill>
-              <a:srgbClr val="2E86AB"/>
-            </a:solidFill>
-          </a:ln>
+              <a:srgbClr val="0A7D6E"/>
+            </a:solidFill>
+          </a:ln>
+          <a:effectLst/>
         </p:spPr>
         <p:style>
           <a:lnRef idx="2">
@@ -6858,9 +6958,10 @@
           </a:prstGeom>
           <a:ln w="15240">
             <a:solidFill>
-              <a:srgbClr val="2E86AB"/>
-            </a:solidFill>
-          </a:ln>
+              <a:srgbClr val="0A7D6E"/>
+            </a:solidFill>
+          </a:ln>
+          <a:effectLst/>
         </p:spPr>
         <p:style>
           <a:lnRef idx="2">
@@ -6893,9 +6994,10 @@
           </a:prstGeom>
           <a:ln w="15240">
             <a:solidFill>
-              <a:srgbClr val="2E86AB"/>
-            </a:solidFill>
-          </a:ln>
+              <a:srgbClr val="0A7D6E"/>
+            </a:solidFill>
+          </a:ln>
+          <a:effectLst/>
         </p:spPr>
         <p:style>
           <a:lnRef idx="2">
@@ -6928,9 +7030,10 @@
           </a:prstGeom>
           <a:ln w="15240">
             <a:solidFill>
-              <a:srgbClr val="2E86AB"/>
-            </a:solidFill>
-          </a:ln>
+              <a:srgbClr val="0A7D6E"/>
+            </a:solidFill>
+          </a:ln>
+          <a:effectLst/>
         </p:spPr>
         <p:style>
           <a:lnRef idx="2">
@@ -6963,9 +7066,10 @@
           </a:prstGeom>
           <a:ln w="15240">
             <a:solidFill>
-              <a:srgbClr val="2E86AB"/>
-            </a:solidFill>
-          </a:ln>
+              <a:srgbClr val="0A7D6E"/>
+            </a:solidFill>
+          </a:ln>
+          <a:effectLst/>
         </p:spPr>
         <p:style>
           <a:lnRef idx="2">
@@ -6998,9 +7102,10 @@
           </a:prstGeom>
           <a:ln w="15240">
             <a:solidFill>
-              <a:srgbClr val="2E86AB"/>
-            </a:solidFill>
-          </a:ln>
+              <a:srgbClr val="0A7D6E"/>
+            </a:solidFill>
+          </a:ln>
+          <a:effectLst/>
         </p:spPr>
         <p:style>
           <a:lnRef idx="2">
@@ -7033,9 +7138,10 @@
           </a:prstGeom>
           <a:ln w="15240">
             <a:solidFill>
-              <a:srgbClr val="2E86AB"/>
-            </a:solidFill>
-          </a:ln>
+              <a:srgbClr val="0A7D6E"/>
+            </a:solidFill>
+          </a:ln>
+          <a:effectLst/>
         </p:spPr>
         <p:style>
           <a:lnRef idx="2">
@@ -7068,9 +7174,10 @@
           </a:prstGeom>
           <a:ln w="17780">
             <a:solidFill>
-              <a:srgbClr val="2E86AB"/>
-            </a:solidFill>
-          </a:ln>
+              <a:srgbClr val="0A7D6E"/>
+            </a:solidFill>
+          </a:ln>
+          <a:effectLst/>
         </p:spPr>
         <p:style>
           <a:lnRef idx="2">
@@ -7102,6 +7209,7 @@
             <a:avLst/>
           </a:prstGeom>
           <a:noFill/>
+          <a:effectLst/>
         </p:spPr>
         <p:txBody>
           <a:bodyPr wrap="square" lIns="0" rIns="0" tIns="0" bIns="0" anchor="ctr">
@@ -7141,6 +7249,7 @@
               <a:srgbClr val="779977"/>
             </a:solidFill>
           </a:ln>
+          <a:effectLst/>
         </p:spPr>
         <p:style>
           <a:lnRef idx="2">
@@ -7176,6 +7285,7 @@
               <a:srgbClr val="779977"/>
             </a:solidFill>
           </a:ln>
+          <a:effectLst/>
         </p:spPr>
         <p:style>
           <a:lnRef idx="2">
@@ -7211,6 +7321,7 @@
               <a:srgbClr val="779977"/>
             </a:solidFill>
           </a:ln>
+          <a:effectLst/>
         </p:spPr>
         <p:style>
           <a:lnRef idx="2">
@@ -7246,6 +7357,7 @@
               <a:srgbClr val="779977"/>
             </a:solidFill>
           </a:ln>
+          <a:effectLst/>
         </p:spPr>
         <p:style>
           <a:lnRef idx="2">
@@ -7281,6 +7393,7 @@
               <a:srgbClr val="779977"/>
             </a:solidFill>
           </a:ln>
+          <a:effectLst/>
         </p:spPr>
         <p:style>
           <a:lnRef idx="2">
@@ -7316,6 +7429,7 @@
               <a:srgbClr val="779977"/>
             </a:solidFill>
           </a:ln>
+          <a:effectLst/>
         </p:spPr>
         <p:style>
           <a:lnRef idx="2">
@@ -7351,6 +7465,7 @@
               <a:srgbClr val="779977"/>
             </a:solidFill>
           </a:ln>
+          <a:effectLst/>
         </p:spPr>
         <p:style>
           <a:lnRef idx="2">
@@ -7386,6 +7501,7 @@
               <a:srgbClr val="779977"/>
             </a:solidFill>
           </a:ln>
+          <a:effectLst/>
         </p:spPr>
         <p:style>
           <a:lnRef idx="2">
@@ -7421,6 +7537,7 @@
               <a:srgbClr val="779977"/>
             </a:solidFill>
           </a:ln>
+          <a:effectLst/>
         </p:spPr>
         <p:style>
           <a:lnRef idx="2">
@@ -7456,6 +7573,7 @@
               <a:srgbClr val="779977"/>
             </a:solidFill>
           </a:ln>
+          <a:effectLst/>
         </p:spPr>
         <p:style>
           <a:lnRef idx="2">
@@ -7491,6 +7609,7 @@
               <a:srgbClr val="779977"/>
             </a:solidFill>
           </a:ln>
+          <a:effectLst/>
         </p:spPr>
         <p:style>
           <a:lnRef idx="2">
@@ -7526,6 +7645,7 @@
               <a:srgbClr val="779977"/>
             </a:solidFill>
           </a:ln>
+          <a:effectLst/>
         </p:spPr>
         <p:style>
           <a:lnRef idx="2">
@@ -7561,6 +7681,7 @@
               <a:srgbClr val="779977"/>
             </a:solidFill>
           </a:ln>
+          <a:effectLst/>
         </p:spPr>
         <p:style>
           <a:lnRef idx="2">
@@ -7596,6 +7717,7 @@
               <a:srgbClr val="779977"/>
             </a:solidFill>
           </a:ln>
+          <a:effectLst/>
         </p:spPr>
         <p:style>
           <a:lnRef idx="2">
@@ -7631,6 +7753,7 @@
               <a:srgbClr val="779977"/>
             </a:solidFill>
           </a:ln>
+          <a:effectLst/>
         </p:spPr>
         <p:style>
           <a:lnRef idx="2">
@@ -7666,6 +7789,7 @@
               <a:srgbClr val="779977"/>
             </a:solidFill>
           </a:ln>
+          <a:effectLst/>
         </p:spPr>
         <p:style>
           <a:lnRef idx="2">
@@ -7697,6 +7821,7 @@
             <a:avLst/>
           </a:prstGeom>
           <a:noFill/>
+          <a:effectLst/>
         </p:spPr>
         <p:txBody>
           <a:bodyPr wrap="square" lIns="0" rIns="0" tIns="0" bIns="0" anchor="ctr">
@@ -7736,6 +7861,7 @@
               <a:srgbClr val="C5A572"/>
             </a:solidFill>
           </a:ln>
+          <a:effectLst/>
         </p:spPr>
         <p:style>
           <a:lnRef idx="2">
@@ -7771,6 +7897,7 @@
               <a:srgbClr val="C5A572"/>
             </a:solidFill>
           </a:ln>
+          <a:effectLst/>
         </p:spPr>
         <p:style>
           <a:lnRef idx="2">
@@ -7806,6 +7933,7 @@
               <a:srgbClr val="C5A572"/>
             </a:solidFill>
           </a:ln>
+          <a:effectLst/>
         </p:spPr>
         <p:style>
           <a:lnRef idx="2">
@@ -7841,6 +7969,7 @@
               <a:srgbClr val="C5A572"/>
             </a:solidFill>
           </a:ln>
+          <a:effectLst/>
         </p:spPr>
         <p:style>
           <a:lnRef idx="2">
@@ -7876,6 +8005,7 @@
               <a:srgbClr val="C5A572"/>
             </a:solidFill>
           </a:ln>
+          <a:effectLst/>
         </p:spPr>
         <p:style>
           <a:lnRef idx="2">
@@ -7911,6 +8041,7 @@
               <a:srgbClr val="C5A572"/>
             </a:solidFill>
           </a:ln>
+          <a:effectLst/>
         </p:spPr>
         <p:style>
           <a:lnRef idx="2">
@@ -7946,6 +8077,7 @@
               <a:srgbClr val="C5A572"/>
             </a:solidFill>
           </a:ln>
+          <a:effectLst/>
         </p:spPr>
         <p:style>
           <a:lnRef idx="2">
@@ -7981,6 +8113,7 @@
               <a:srgbClr val="C5A572"/>
             </a:solidFill>
           </a:ln>
+          <a:effectLst/>
         </p:spPr>
         <p:style>
           <a:lnRef idx="2">
@@ -8016,6 +8149,7 @@
               <a:srgbClr val="C5A572"/>
             </a:solidFill>
           </a:ln>
+          <a:effectLst/>
         </p:spPr>
         <p:style>
           <a:lnRef idx="2">
@@ -8051,6 +8185,7 @@
               <a:srgbClr val="C5A572"/>
             </a:solidFill>
           </a:ln>
+          <a:effectLst/>
         </p:spPr>
         <p:style>
           <a:lnRef idx="2">
@@ -8086,6 +8221,7 @@
               <a:srgbClr val="C5A572"/>
             </a:solidFill>
           </a:ln>
+          <a:effectLst/>
         </p:spPr>
         <p:style>
           <a:lnRef idx="2">
@@ -8121,6 +8257,7 @@
               <a:srgbClr val="C5A572"/>
             </a:solidFill>
           </a:ln>
+          <a:effectLst/>
         </p:spPr>
         <p:style>
           <a:lnRef idx="2">
@@ -8156,6 +8293,7 @@
               <a:srgbClr val="C5A572"/>
             </a:solidFill>
           </a:ln>
+          <a:effectLst/>
         </p:spPr>
         <p:style>
           <a:lnRef idx="2">
@@ -8191,6 +8329,7 @@
               <a:srgbClr val="C5A572"/>
             </a:solidFill>
           </a:ln>
+          <a:effectLst/>
         </p:spPr>
         <p:style>
           <a:lnRef idx="2">
@@ -8226,6 +8365,7 @@
               <a:srgbClr val="C5A572"/>
             </a:solidFill>
           </a:ln>
+          <a:effectLst/>
         </p:spPr>
         <p:style>
           <a:lnRef idx="2">
@@ -8261,6 +8401,7 @@
               <a:srgbClr val="C5A572"/>
             </a:solidFill>
           </a:ln>
+          <a:effectLst/>
         </p:spPr>
         <p:style>
           <a:lnRef idx="2">
@@ -8296,6 +8437,7 @@
               <a:srgbClr val="C5A572"/>
             </a:solidFill>
           </a:ln>
+          <a:effectLst/>
         </p:spPr>
         <p:style>
           <a:lnRef idx="2">
@@ -8331,6 +8473,7 @@
               <a:srgbClr val="C5A572"/>
             </a:solidFill>
           </a:ln>
+          <a:effectLst/>
         </p:spPr>
         <p:style>
           <a:lnRef idx="2">
@@ -8366,6 +8509,7 @@
               <a:srgbClr val="C5A572"/>
             </a:solidFill>
           </a:ln>
+          <a:effectLst/>
         </p:spPr>
         <p:style>
           <a:lnRef idx="2">
@@ -8397,6 +8541,7 @@
             <a:avLst/>
           </a:prstGeom>
           <a:noFill/>
+          <a:effectLst/>
         </p:spPr>
         <p:txBody>
           <a:bodyPr wrap="square" lIns="0" rIns="0" tIns="0" bIns="0" anchor="ctr">
@@ -8436,6 +8581,7 @@
               <a:srgbClr val="A24E78"/>
             </a:solidFill>
           </a:ln>
+          <a:effectLst/>
         </p:spPr>
         <p:style>
           <a:lnRef idx="2">
@@ -8471,6 +8617,7 @@
               <a:srgbClr val="A24E78"/>
             </a:solidFill>
           </a:ln>
+          <a:effectLst/>
         </p:spPr>
         <p:style>
           <a:lnRef idx="2">
@@ -8506,6 +8653,7 @@
               <a:srgbClr val="A24E78"/>
             </a:solidFill>
           </a:ln>
+          <a:effectLst/>
         </p:spPr>
         <p:style>
           <a:lnRef idx="2">
@@ -8541,6 +8689,7 @@
               <a:srgbClr val="A24E78"/>
             </a:solidFill>
           </a:ln>
+          <a:effectLst/>
         </p:spPr>
         <p:style>
           <a:lnRef idx="2">
@@ -8576,6 +8725,7 @@
               <a:srgbClr val="A24E78"/>
             </a:solidFill>
           </a:ln>
+          <a:effectLst/>
         </p:spPr>
         <p:style>
           <a:lnRef idx="2">
@@ -8611,6 +8761,7 @@
               <a:srgbClr val="A24E78"/>
             </a:solidFill>
           </a:ln>
+          <a:effectLst/>
         </p:spPr>
         <p:style>
           <a:lnRef idx="2">
@@ -8646,6 +8797,7 @@
               <a:srgbClr val="A24E78"/>
             </a:solidFill>
           </a:ln>
+          <a:effectLst/>
         </p:spPr>
         <p:style>
           <a:lnRef idx="2">
@@ -8681,6 +8833,7 @@
               <a:srgbClr val="A24E78"/>
             </a:solidFill>
           </a:ln>
+          <a:effectLst/>
         </p:spPr>
         <p:style>
           <a:lnRef idx="2">
@@ -8716,6 +8869,7 @@
               <a:srgbClr val="A24E78"/>
             </a:solidFill>
           </a:ln>
+          <a:effectLst/>
         </p:spPr>
         <p:style>
           <a:lnRef idx="2">
@@ -8751,6 +8905,7 @@
               <a:srgbClr val="A24E78"/>
             </a:solidFill>
           </a:ln>
+          <a:effectLst/>
         </p:spPr>
         <p:style>
           <a:lnRef idx="2">
@@ -8786,6 +8941,7 @@
               <a:srgbClr val="A24E78"/>
             </a:solidFill>
           </a:ln>
+          <a:effectLst/>
         </p:spPr>
         <p:style>
           <a:lnRef idx="2">
@@ -8821,6 +8977,7 @@
               <a:srgbClr val="A24E78"/>
             </a:solidFill>
           </a:ln>
+          <a:effectLst/>
         </p:spPr>
         <p:style>
           <a:lnRef idx="2">
@@ -8856,6 +9013,7 @@
               <a:srgbClr val="A24E78"/>
             </a:solidFill>
           </a:ln>
+          <a:effectLst/>
         </p:spPr>
         <p:style>
           <a:lnRef idx="2">
@@ -8891,6 +9049,7 @@
               <a:srgbClr val="A24E78"/>
             </a:solidFill>
           </a:ln>
+          <a:effectLst/>
         </p:spPr>
         <p:style>
           <a:lnRef idx="2">
@@ -8926,6 +9085,7 @@
               <a:srgbClr val="A24E78"/>
             </a:solidFill>
           </a:ln>
+          <a:effectLst/>
         </p:spPr>
         <p:style>
           <a:lnRef idx="2">
@@ -8961,6 +9121,7 @@
               <a:srgbClr val="A24E78"/>
             </a:solidFill>
           </a:ln>
+          <a:effectLst/>
         </p:spPr>
         <p:style>
           <a:lnRef idx="2">
@@ -8996,6 +9157,7 @@
               <a:srgbClr val="A24E78"/>
             </a:solidFill>
           </a:ln>
+          <a:effectLst/>
         </p:spPr>
         <p:style>
           <a:lnRef idx="2">
@@ -9031,6 +9193,7 @@
               <a:srgbClr val="A24E78"/>
             </a:solidFill>
           </a:ln>
+          <a:effectLst/>
         </p:spPr>
         <p:style>
           <a:lnRef idx="2">
@@ -9066,6 +9229,7 @@
               <a:srgbClr val="A24E78"/>
             </a:solidFill>
           </a:ln>
+          <a:effectLst/>
         </p:spPr>
         <p:style>
           <a:lnRef idx="2">
@@ -9101,6 +9265,7 @@
               <a:srgbClr val="A24E78"/>
             </a:solidFill>
           </a:ln>
+          <a:effectLst/>
         </p:spPr>
         <p:style>
           <a:lnRef idx="2">
@@ -9132,6 +9297,7 @@
             <a:avLst/>
           </a:prstGeom>
           <a:noFill/>
+          <a:effectLst/>
         </p:spPr>
         <p:txBody>
           <a:bodyPr wrap="square" lIns="0" rIns="0" tIns="0" bIns="0" anchor="ctr">

--- a/260418_add/ppt/SuppFig_S8_5scenario_ablation_native_editable.pptx
+++ b/260418_add/ppt/SuppFig_S8_5scenario_ablation_native_editable.pptx
@@ -3114,7 +3114,7 @@
           <a:p>
             <a:pPr algn="l"/>
             <a:r>
-              <a:rPr sz="1400" b="1">
+              <a:rPr sz="1400" b="1" i="0">
                 <a:solidFill>
                   <a:srgbClr val="222222"/>
                 </a:solidFill>
@@ -3258,7 +3258,7 @@
           <a:p>
             <a:pPr algn="r"/>
             <a:r>
-              <a:rPr sz="700" b="0">
+              <a:rPr sz="700" b="0" i="0">
                 <a:solidFill>
                   <a:srgbClr val="222222"/>
                 </a:solidFill>
@@ -3330,7 +3330,7 @@
           <a:p>
             <a:pPr algn="r"/>
             <a:r>
-              <a:rPr sz="700" b="0">
+              <a:rPr sz="700" b="0" i="0">
                 <a:solidFill>
                   <a:srgbClr val="222222"/>
                 </a:solidFill>
@@ -3402,7 +3402,7 @@
           <a:p>
             <a:pPr algn="r"/>
             <a:r>
-              <a:rPr sz="700" b="0">
+              <a:rPr sz="700" b="0" i="0">
                 <a:solidFill>
                   <a:srgbClr val="222222"/>
                 </a:solidFill>
@@ -3474,7 +3474,7 @@
           <a:p>
             <a:pPr algn="r"/>
             <a:r>
-              <a:rPr sz="700" b="0">
+              <a:rPr sz="700" b="0" i="0">
                 <a:solidFill>
                   <a:srgbClr val="222222"/>
                 </a:solidFill>
@@ -3546,7 +3546,7 @@
           <a:p>
             <a:pPr algn="r"/>
             <a:r>
-              <a:rPr sz="700" b="0">
+              <a:rPr sz="700" b="0" i="0">
                 <a:solidFill>
                   <a:srgbClr val="222222"/>
                 </a:solidFill>
@@ -3582,7 +3582,7 @@
           <a:p>
             <a:pPr algn="ctr"/>
             <a:r>
-              <a:rPr sz="900" b="0">
+              <a:rPr sz="900" b="0" i="0">
                 <a:solidFill>
                   <a:srgbClr val="222222"/>
                 </a:solidFill>
@@ -3618,7 +3618,7 @@
           <a:p>
             <a:pPr algn="ctr"/>
             <a:r>
-              <a:rPr sz="900" b="0">
+              <a:rPr sz="900" b="0" i="0">
                 <a:solidFill>
                   <a:srgbClr val="222222"/>
                 </a:solidFill>
@@ -3844,7 +3844,7 @@
           <a:p>
             <a:pPr algn="ctr"/>
             <a:r>
-              <a:rPr sz="700" b="1">
+              <a:rPr sz="700" b="1" i="0">
                 <a:solidFill>
                   <a:srgbClr val="222222"/>
                 </a:solidFill>
@@ -3880,7 +3880,7 @@
           <a:p>
             <a:pPr algn="ctr"/>
             <a:r>
-              <a:rPr sz="700" b="0">
+              <a:rPr sz="700" b="0" i="0">
                 <a:solidFill>
                   <a:srgbClr val="222222"/>
                 </a:solidFill>
@@ -4071,7 +4071,7 @@
           <a:p>
             <a:pPr algn="ctr"/>
             <a:r>
-              <a:rPr sz="700" b="1">
+              <a:rPr sz="700" b="1" i="0">
                 <a:solidFill>
                   <a:srgbClr val="222222"/>
                 </a:solidFill>
@@ -4107,7 +4107,7 @@
           <a:p>
             <a:pPr algn="ctr"/>
             <a:r>
-              <a:rPr sz="700" b="0">
+              <a:rPr sz="700" b="0" i="0">
                 <a:solidFill>
                   <a:srgbClr val="222222"/>
                 </a:solidFill>
@@ -4298,7 +4298,7 @@
           <a:p>
             <a:pPr algn="ctr"/>
             <a:r>
-              <a:rPr sz="700" b="1">
+              <a:rPr sz="700" b="1" i="0">
                 <a:solidFill>
                   <a:srgbClr val="222222"/>
                 </a:solidFill>
@@ -4334,7 +4334,7 @@
           <a:p>
             <a:pPr algn="ctr"/>
             <a:r>
-              <a:rPr sz="700" b="0">
+              <a:rPr sz="700" b="0" i="0">
                 <a:solidFill>
                   <a:srgbClr val="222222"/>
                 </a:solidFill>
@@ -4525,7 +4525,7 @@
           <a:p>
             <a:pPr algn="ctr"/>
             <a:r>
-              <a:rPr sz="700" b="1">
+              <a:rPr sz="700" b="1" i="0">
                 <a:solidFill>
                   <a:srgbClr val="222222"/>
                 </a:solidFill>
@@ -4561,7 +4561,7 @@
           <a:p>
             <a:pPr algn="ctr"/>
             <a:r>
-              <a:rPr sz="700" b="0">
+              <a:rPr sz="700" b="0" i="0">
                 <a:solidFill>
                   <a:srgbClr val="222222"/>
                 </a:solidFill>
@@ -4752,7 +4752,7 @@
           <a:p>
             <a:pPr algn="ctr"/>
             <a:r>
-              <a:rPr sz="700" b="1">
+              <a:rPr sz="700" b="1" i="0">
                 <a:solidFill>
                   <a:srgbClr val="222222"/>
                 </a:solidFill>
@@ -4788,7 +4788,7 @@
           <a:p>
             <a:pPr algn="ctr"/>
             <a:r>
-              <a:rPr sz="700" b="0">
+              <a:rPr sz="700" b="0" i="0">
                 <a:solidFill>
                   <a:srgbClr val="222222"/>
                 </a:solidFill>
@@ -4825,7 +4825,7 @@
           <a:p>
             <a:pPr algn="ctr"/>
             <a:r>
-              <a:rPr sz="700" b="0">
+              <a:rPr sz="700" b="0" i="0">
                 <a:solidFill>
                   <a:srgbClr val="222222"/>
                 </a:solidFill>
@@ -4879,7 +4879,7 @@
           <a:p>
             <a:pPr algn="l"/>
             <a:r>
-              <a:rPr sz="1400" b="1">
+              <a:rPr sz="1400" b="1" i="0">
                 <a:solidFill>
                   <a:srgbClr val="222222"/>
                 </a:solidFill>
@@ -5023,7 +5023,7 @@
           <a:p>
             <a:pPr algn="ctr"/>
             <a:r>
-              <a:rPr sz="700" b="0">
+              <a:rPr sz="700" b="0" i="0">
                 <a:solidFill>
                   <a:srgbClr val="222222"/>
                 </a:solidFill>
@@ -5095,7 +5095,7 @@
           <a:p>
             <a:pPr algn="ctr"/>
             <a:r>
-              <a:rPr sz="700" b="0">
+              <a:rPr sz="700" b="0" i="0">
                 <a:solidFill>
                   <a:srgbClr val="222222"/>
                 </a:solidFill>
@@ -5167,7 +5167,7 @@
           <a:p>
             <a:pPr algn="ctr"/>
             <a:r>
-              <a:rPr sz="700" b="0">
+              <a:rPr sz="700" b="0" i="0">
                 <a:solidFill>
                   <a:srgbClr val="222222"/>
                 </a:solidFill>
@@ -5239,7 +5239,7 @@
           <a:p>
             <a:pPr algn="ctr"/>
             <a:r>
-              <a:rPr sz="700" b="0">
+              <a:rPr sz="700" b="0" i="0">
                 <a:solidFill>
                   <a:srgbClr val="222222"/>
                 </a:solidFill>
@@ -5311,7 +5311,7 @@
           <a:p>
             <a:pPr algn="ctr"/>
             <a:r>
-              <a:rPr sz="700" b="0">
+              <a:rPr sz="700" b="0" i="0">
                 <a:solidFill>
                   <a:srgbClr val="222222"/>
                 </a:solidFill>
@@ -5383,7 +5383,7 @@
           <a:p>
             <a:pPr algn="ctr"/>
             <a:r>
-              <a:rPr sz="700" b="0">
+              <a:rPr sz="700" b="0" i="0">
                 <a:solidFill>
                   <a:srgbClr val="222222"/>
                 </a:solidFill>
@@ -5455,7 +5455,7 @@
           <a:p>
             <a:pPr algn="r"/>
             <a:r>
-              <a:rPr sz="700" b="0">
+              <a:rPr sz="700" b="0" i="0">
                 <a:solidFill>
                   <a:srgbClr val="222222"/>
                 </a:solidFill>
@@ -5527,7 +5527,7 @@
           <a:p>
             <a:pPr algn="r"/>
             <a:r>
-              <a:rPr sz="700" b="0">
+              <a:rPr sz="700" b="0" i="0">
                 <a:solidFill>
                   <a:srgbClr val="222222"/>
                 </a:solidFill>
@@ -5599,7 +5599,7 @@
           <a:p>
             <a:pPr algn="r"/>
             <a:r>
-              <a:rPr sz="700" b="0">
+              <a:rPr sz="700" b="0" i="0">
                 <a:solidFill>
                   <a:srgbClr val="222222"/>
                 </a:solidFill>
@@ -5671,7 +5671,7 @@
           <a:p>
             <a:pPr algn="r"/>
             <a:r>
-              <a:rPr sz="700" b="0">
+              <a:rPr sz="700" b="0" i="0">
                 <a:solidFill>
                   <a:srgbClr val="222222"/>
                 </a:solidFill>
@@ -5743,7 +5743,7 @@
           <a:p>
             <a:pPr algn="r"/>
             <a:r>
-              <a:rPr sz="700" b="0">
+              <a:rPr sz="700" b="0" i="0">
                 <a:solidFill>
                   <a:srgbClr val="222222"/>
                 </a:solidFill>
@@ -5815,7 +5815,7 @@
           <a:p>
             <a:pPr algn="r"/>
             <a:r>
-              <a:rPr sz="700" b="0">
+              <a:rPr sz="700" b="0" i="0">
                 <a:solidFill>
                   <a:srgbClr val="222222"/>
                 </a:solidFill>
@@ -5851,7 +5851,7 @@
           <a:p>
             <a:pPr algn="ctr"/>
             <a:r>
-              <a:rPr sz="900" b="0">
+              <a:rPr sz="900" b="0" i="0">
                 <a:solidFill>
                   <a:srgbClr val="222222"/>
                 </a:solidFill>
@@ -5887,7 +5887,7 @@
           <a:p>
             <a:pPr algn="ctr"/>
             <a:r>
-              <a:rPr sz="900" b="0">
+              <a:rPr sz="900" b="0" i="0">
                 <a:solidFill>
                   <a:srgbClr val="222222"/>
                 </a:solidFill>
@@ -6535,7 +6535,7 @@
           <a:p>
             <a:pPr algn="l"/>
             <a:r>
-              <a:rPr sz="700" b="0">
+              <a:rPr sz="700" b="0" i="0">
                 <a:solidFill>
                   <a:srgbClr val="222222"/>
                 </a:solidFill>
@@ -7219,7 +7219,7 @@
           <a:p>
             <a:pPr algn="l"/>
             <a:r>
-              <a:rPr sz="700" b="0">
+              <a:rPr sz="700" b="0" i="0">
                 <a:solidFill>
                   <a:srgbClr val="222222"/>
                 </a:solidFill>
@@ -7831,7 +7831,7 @@
           <a:p>
             <a:pPr algn="l"/>
             <a:r>
-              <a:rPr sz="700" b="0">
+              <a:rPr sz="700" b="0" i="0">
                 <a:solidFill>
                   <a:srgbClr val="222222"/>
                 </a:solidFill>
@@ -8551,7 +8551,7 @@
           <a:p>
             <a:pPr algn="l"/>
             <a:r>
-              <a:rPr sz="700" b="0">
+              <a:rPr sz="700" b="0" i="0">
                 <a:solidFill>
                   <a:srgbClr val="222222"/>
                 </a:solidFill>
@@ -9307,7 +9307,7 @@
           <a:p>
             <a:pPr algn="l"/>
             <a:r>
-              <a:rPr sz="700" b="0">
+              <a:rPr sz="700" b="0" i="0">
                 <a:solidFill>
                   <a:srgbClr val="222222"/>
                 </a:solidFill>

--- a/260418_add/ppt/SuppFig_S8_5scenario_ablation_native_editable.pptx
+++ b/260418_add/ppt/SuppFig_S8_5scenario_ablation_native_editable.pptx
@@ -7,6 +7,7 @@
   <p:sldIdLst>
     <p:sldId id="256" r:id="rId7"/>
     <p:sldId id="257" r:id="rId8"/>
+    <p:sldId id="258" r:id="rId9"/>
   </p:sldIdLst>
   <p:sldSz cx="5943600" cy="4114800" type="screen4x3"/>
   <p:notesSz cx="6858000" cy="9144000"/>
@@ -9314,6 +9315,5084 @@
                 <a:latin typeface="Arial"/>
               </a:rPr>
               <a:t>Drop + add (39 feat.)  (AUC 0.735)</a:t>
+            </a:r>
+          </a:p>
+        </p:txBody>
+      </p:sp>
+    </p:spTree>
+  </p:cSld>
+  <p:clrMapOvr>
+    <a:masterClrMapping/>
+  </p:clrMapOvr>
+</p:sld>
+</file>
+
+<file path=ppt/slides/slide3.xml><?xml version="1.0" encoding="utf-8"?>
+<p:sld xmlns:a="http://schemas.openxmlformats.org/drawingml/2006/main" xmlns:p="http://schemas.openxmlformats.org/presentationml/2006/main" xmlns:r="http://schemas.openxmlformats.org/officeDocument/2006/relationships">
+  <p:cSld>
+    <p:spTree>
+      <p:nvGrpSpPr>
+        <p:cNvPr id="1" name=""/>
+        <p:cNvGrpSpPr/>
+        <p:nvPr/>
+      </p:nvGrpSpPr>
+      <p:grpSpPr/>
+      <p:sp>
+        <p:nvSpPr>
+          <p:cNvPr id="2" name="TextBox 1"/>
+          <p:cNvSpPr txBox="1"/>
+          <p:nvPr/>
+        </p:nvSpPr>
+        <p:spPr>
+          <a:xfrm>
+            <a:off x="137160" y="91440"/>
+            <a:ext cx="365760" cy="320040"/>
+          </a:xfrm>
+          <a:prstGeom prst="rect">
+            <a:avLst/>
+          </a:prstGeom>
+          <a:noFill/>
+          <a:effectLst/>
+        </p:spPr>
+        <p:txBody>
+          <a:bodyPr wrap="square" lIns="0" rIns="0" tIns="0" bIns="0" anchor="ctr">
+            <a:spAutoFit/>
+          </a:bodyPr>
+          <a:lstStyle/>
+          <a:p>
+            <a:pPr algn="l"/>
+            <a:r>
+              <a:rPr sz="1400" b="1" i="0">
+                <a:solidFill>
+                  <a:srgbClr val="222222"/>
+                </a:solidFill>
+                <a:latin typeface="Arial"/>
+              </a:rPr>
+              <a:t>C</a:t>
+            </a:r>
+          </a:p>
+        </p:txBody>
+      </p:sp>
+      <p:cxnSp>
+        <p:nvCxnSpPr>
+          <p:cNvPr id="3" name="Connector 2"/>
+          <p:cNvCxnSpPr/>
+          <p:nvPr/>
+        </p:nvCxnSpPr>
+        <p:spPr>
+          <a:xfrm>
+            <a:off x="914400" y="3474720"/>
+            <a:ext cx="4206240" cy="0"/>
+          </a:xfrm>
+          <a:prstGeom prst="line">
+            <a:avLst/>
+          </a:prstGeom>
+          <a:ln w="7620">
+            <a:solidFill>
+              <a:srgbClr val="333333"/>
+            </a:solidFill>
+          </a:ln>
+          <a:effectLst/>
+        </p:spPr>
+        <p:style>
+          <a:lnRef idx="2">
+            <a:schemeClr val="accent1"/>
+          </a:lnRef>
+          <a:fillRef idx="0">
+            <a:schemeClr val="accent1"/>
+          </a:fillRef>
+          <a:effectRef idx="1">
+            <a:schemeClr val="accent1"/>
+          </a:effectRef>
+          <a:fontRef idx="minor">
+            <a:schemeClr val="tx1"/>
+          </a:fontRef>
+        </p:style>
+      </p:cxnSp>
+      <p:cxnSp>
+        <p:nvCxnSpPr>
+          <p:cNvPr id="4" name="Connector 3"/>
+          <p:cNvCxnSpPr/>
+          <p:nvPr/>
+        </p:nvCxnSpPr>
+        <p:spPr>
+          <a:xfrm>
+            <a:off x="914400" y="548640"/>
+            <a:ext cx="0" cy="2926080"/>
+          </a:xfrm>
+          <a:prstGeom prst="line">
+            <a:avLst/>
+          </a:prstGeom>
+          <a:ln w="7620">
+            <a:solidFill>
+              <a:srgbClr val="333333"/>
+            </a:solidFill>
+          </a:ln>
+          <a:effectLst/>
+        </p:spPr>
+        <p:style>
+          <a:lnRef idx="2">
+            <a:schemeClr val="accent1"/>
+          </a:lnRef>
+          <a:fillRef idx="0">
+            <a:schemeClr val="accent1"/>
+          </a:fillRef>
+          <a:effectRef idx="1">
+            <a:schemeClr val="accent1"/>
+          </a:effectRef>
+          <a:fontRef idx="minor">
+            <a:schemeClr val="tx1"/>
+          </a:fontRef>
+        </p:style>
+      </p:cxnSp>
+      <p:cxnSp>
+        <p:nvCxnSpPr>
+          <p:cNvPr id="5" name="Connector 4"/>
+          <p:cNvCxnSpPr/>
+          <p:nvPr/>
+        </p:nvCxnSpPr>
+        <p:spPr>
+          <a:xfrm>
+            <a:off x="874400" y="3474720"/>
+            <a:ext cx="40000" cy="0"/>
+          </a:xfrm>
+          <a:prstGeom prst="line">
+            <a:avLst/>
+          </a:prstGeom>
+          <a:ln w="6350">
+            <a:solidFill>
+              <a:srgbClr val="333333"/>
+            </a:solidFill>
+          </a:ln>
+          <a:effectLst/>
+        </p:spPr>
+        <p:style>
+          <a:lnRef idx="2">
+            <a:schemeClr val="accent1"/>
+          </a:lnRef>
+          <a:fillRef idx="0">
+            <a:schemeClr val="accent1"/>
+          </a:fillRef>
+          <a:effectRef idx="1">
+            <a:schemeClr val="accent1"/>
+          </a:effectRef>
+          <a:fontRef idx="minor">
+            <a:schemeClr val="tx1"/>
+          </a:fontRef>
+        </p:style>
+      </p:cxnSp>
+      <p:sp>
+        <p:nvSpPr>
+          <p:cNvPr id="6" name="TextBox 5"/>
+          <p:cNvSpPr txBox="1"/>
+          <p:nvPr/>
+        </p:nvSpPr>
+        <p:spPr>
+          <a:xfrm>
+            <a:off x="365760" y="3392424"/>
+            <a:ext cx="502920" cy="164592"/>
+          </a:xfrm>
+          <a:prstGeom prst="rect">
+            <a:avLst/>
+          </a:prstGeom>
+          <a:noFill/>
+          <a:effectLst/>
+        </p:spPr>
+        <p:txBody>
+          <a:bodyPr wrap="square" lIns="0" rIns="0" tIns="0" bIns="0" anchor="ctr">
+            <a:spAutoFit/>
+          </a:bodyPr>
+          <a:lstStyle/>
+          <a:p>
+            <a:pPr algn="r"/>
+            <a:r>
+              <a:rPr sz="700" b="0" i="0">
+                <a:solidFill>
+                  <a:srgbClr val="222222"/>
+                </a:solidFill>
+                <a:latin typeface="Arial"/>
+              </a:rPr>
+              <a:t>0.0</a:t>
+            </a:r>
+          </a:p>
+        </p:txBody>
+      </p:sp>
+      <p:cxnSp>
+        <p:nvCxnSpPr>
+          <p:cNvPr id="7" name="Connector 6"/>
+          <p:cNvCxnSpPr/>
+          <p:nvPr/>
+        </p:nvCxnSpPr>
+        <p:spPr>
+          <a:xfrm>
+            <a:off x="874400" y="2889504"/>
+            <a:ext cx="40000" cy="0"/>
+          </a:xfrm>
+          <a:prstGeom prst="line">
+            <a:avLst/>
+          </a:prstGeom>
+          <a:ln w="6350">
+            <a:solidFill>
+              <a:srgbClr val="333333"/>
+            </a:solidFill>
+          </a:ln>
+          <a:effectLst/>
+        </p:spPr>
+        <p:style>
+          <a:lnRef idx="2">
+            <a:schemeClr val="accent1"/>
+          </a:lnRef>
+          <a:fillRef idx="0">
+            <a:schemeClr val="accent1"/>
+          </a:fillRef>
+          <a:effectRef idx="1">
+            <a:schemeClr val="accent1"/>
+          </a:effectRef>
+          <a:fontRef idx="minor">
+            <a:schemeClr val="tx1"/>
+          </a:fontRef>
+        </p:style>
+      </p:cxnSp>
+      <p:sp>
+        <p:nvSpPr>
+          <p:cNvPr id="8" name="TextBox 7"/>
+          <p:cNvSpPr txBox="1"/>
+          <p:nvPr/>
+        </p:nvSpPr>
+        <p:spPr>
+          <a:xfrm>
+            <a:off x="365760" y="2807208"/>
+            <a:ext cx="502920" cy="164592"/>
+          </a:xfrm>
+          <a:prstGeom prst="rect">
+            <a:avLst/>
+          </a:prstGeom>
+          <a:noFill/>
+          <a:effectLst/>
+        </p:spPr>
+        <p:txBody>
+          <a:bodyPr wrap="square" lIns="0" rIns="0" tIns="0" bIns="0" anchor="ctr">
+            <a:spAutoFit/>
+          </a:bodyPr>
+          <a:lstStyle/>
+          <a:p>
+            <a:pPr algn="r"/>
+            <a:r>
+              <a:rPr sz="700" b="0" i="0">
+                <a:solidFill>
+                  <a:srgbClr val="222222"/>
+                </a:solidFill>
+                <a:latin typeface="Arial"/>
+              </a:rPr>
+              <a:t>0.2</a:t>
+            </a:r>
+          </a:p>
+        </p:txBody>
+      </p:sp>
+      <p:cxnSp>
+        <p:nvCxnSpPr>
+          <p:cNvPr id="9" name="Connector 8"/>
+          <p:cNvCxnSpPr/>
+          <p:nvPr/>
+        </p:nvCxnSpPr>
+        <p:spPr>
+          <a:xfrm>
+            <a:off x="874400" y="2304288"/>
+            <a:ext cx="40000" cy="0"/>
+          </a:xfrm>
+          <a:prstGeom prst="line">
+            <a:avLst/>
+          </a:prstGeom>
+          <a:ln w="6350">
+            <a:solidFill>
+              <a:srgbClr val="333333"/>
+            </a:solidFill>
+          </a:ln>
+          <a:effectLst/>
+        </p:spPr>
+        <p:style>
+          <a:lnRef idx="2">
+            <a:schemeClr val="accent1"/>
+          </a:lnRef>
+          <a:fillRef idx="0">
+            <a:schemeClr val="accent1"/>
+          </a:fillRef>
+          <a:effectRef idx="1">
+            <a:schemeClr val="accent1"/>
+          </a:effectRef>
+          <a:fontRef idx="minor">
+            <a:schemeClr val="tx1"/>
+          </a:fontRef>
+        </p:style>
+      </p:cxnSp>
+      <p:sp>
+        <p:nvSpPr>
+          <p:cNvPr id="10" name="TextBox 9"/>
+          <p:cNvSpPr txBox="1"/>
+          <p:nvPr/>
+        </p:nvSpPr>
+        <p:spPr>
+          <a:xfrm>
+            <a:off x="365760" y="2221992"/>
+            <a:ext cx="502920" cy="164592"/>
+          </a:xfrm>
+          <a:prstGeom prst="rect">
+            <a:avLst/>
+          </a:prstGeom>
+          <a:noFill/>
+          <a:effectLst/>
+        </p:spPr>
+        <p:txBody>
+          <a:bodyPr wrap="square" lIns="0" rIns="0" tIns="0" bIns="0" anchor="ctr">
+            <a:spAutoFit/>
+          </a:bodyPr>
+          <a:lstStyle/>
+          <a:p>
+            <a:pPr algn="r"/>
+            <a:r>
+              <a:rPr sz="700" b="0" i="0">
+                <a:solidFill>
+                  <a:srgbClr val="222222"/>
+                </a:solidFill>
+                <a:latin typeface="Arial"/>
+              </a:rPr>
+              <a:t>0.4</a:t>
+            </a:r>
+          </a:p>
+        </p:txBody>
+      </p:sp>
+      <p:cxnSp>
+        <p:nvCxnSpPr>
+          <p:cNvPr id="11" name="Connector 10"/>
+          <p:cNvCxnSpPr/>
+          <p:nvPr/>
+        </p:nvCxnSpPr>
+        <p:spPr>
+          <a:xfrm>
+            <a:off x="874400" y="2011680"/>
+            <a:ext cx="40000" cy="0"/>
+          </a:xfrm>
+          <a:prstGeom prst="line">
+            <a:avLst/>
+          </a:prstGeom>
+          <a:ln w="6350">
+            <a:solidFill>
+              <a:srgbClr val="333333"/>
+            </a:solidFill>
+          </a:ln>
+          <a:effectLst/>
+        </p:spPr>
+        <p:style>
+          <a:lnRef idx="2">
+            <a:schemeClr val="accent1"/>
+          </a:lnRef>
+          <a:fillRef idx="0">
+            <a:schemeClr val="accent1"/>
+          </a:fillRef>
+          <a:effectRef idx="1">
+            <a:schemeClr val="accent1"/>
+          </a:effectRef>
+          <a:fontRef idx="minor">
+            <a:schemeClr val="tx1"/>
+          </a:fontRef>
+        </p:style>
+      </p:cxnSp>
+      <p:sp>
+        <p:nvSpPr>
+          <p:cNvPr id="12" name="TextBox 11"/>
+          <p:cNvSpPr txBox="1"/>
+          <p:nvPr/>
+        </p:nvSpPr>
+        <p:spPr>
+          <a:xfrm>
+            <a:off x="365760" y="1929384"/>
+            <a:ext cx="502920" cy="164592"/>
+          </a:xfrm>
+          <a:prstGeom prst="rect">
+            <a:avLst/>
+          </a:prstGeom>
+          <a:noFill/>
+          <a:effectLst/>
+        </p:spPr>
+        <p:txBody>
+          <a:bodyPr wrap="square" lIns="0" rIns="0" tIns="0" bIns="0" anchor="ctr">
+            <a:spAutoFit/>
+          </a:bodyPr>
+          <a:lstStyle/>
+          <a:p>
+            <a:pPr algn="r"/>
+            <a:r>
+              <a:rPr sz="700" b="0" i="0">
+                <a:solidFill>
+                  <a:srgbClr val="222222"/>
+                </a:solidFill>
+                <a:latin typeface="Arial"/>
+              </a:rPr>
+              <a:t>0.5</a:t>
+            </a:r>
+          </a:p>
+        </p:txBody>
+      </p:sp>
+      <p:cxnSp>
+        <p:nvCxnSpPr>
+          <p:cNvPr id="13" name="Connector 12"/>
+          <p:cNvCxnSpPr/>
+          <p:nvPr/>
+        </p:nvCxnSpPr>
+        <p:spPr>
+          <a:xfrm>
+            <a:off x="874400" y="1719072"/>
+            <a:ext cx="40000" cy="0"/>
+          </a:xfrm>
+          <a:prstGeom prst="line">
+            <a:avLst/>
+          </a:prstGeom>
+          <a:ln w="6350">
+            <a:solidFill>
+              <a:srgbClr val="333333"/>
+            </a:solidFill>
+          </a:ln>
+          <a:effectLst/>
+        </p:spPr>
+        <p:style>
+          <a:lnRef idx="2">
+            <a:schemeClr val="accent1"/>
+          </a:lnRef>
+          <a:fillRef idx="0">
+            <a:schemeClr val="accent1"/>
+          </a:fillRef>
+          <a:effectRef idx="1">
+            <a:schemeClr val="accent1"/>
+          </a:effectRef>
+          <a:fontRef idx="minor">
+            <a:schemeClr val="tx1"/>
+          </a:fontRef>
+        </p:style>
+      </p:cxnSp>
+      <p:sp>
+        <p:nvSpPr>
+          <p:cNvPr id="14" name="TextBox 13"/>
+          <p:cNvSpPr txBox="1"/>
+          <p:nvPr/>
+        </p:nvSpPr>
+        <p:spPr>
+          <a:xfrm>
+            <a:off x="365760" y="1636776"/>
+            <a:ext cx="502920" cy="164592"/>
+          </a:xfrm>
+          <a:prstGeom prst="rect">
+            <a:avLst/>
+          </a:prstGeom>
+          <a:noFill/>
+          <a:effectLst/>
+        </p:spPr>
+        <p:txBody>
+          <a:bodyPr wrap="square" lIns="0" rIns="0" tIns="0" bIns="0" anchor="ctr">
+            <a:spAutoFit/>
+          </a:bodyPr>
+          <a:lstStyle/>
+          <a:p>
+            <a:pPr algn="r"/>
+            <a:r>
+              <a:rPr sz="700" b="0" i="0">
+                <a:solidFill>
+                  <a:srgbClr val="222222"/>
+                </a:solidFill>
+                <a:latin typeface="Arial"/>
+              </a:rPr>
+              <a:t>0.6</a:t>
+            </a:r>
+          </a:p>
+        </p:txBody>
+      </p:sp>
+      <p:cxnSp>
+        <p:nvCxnSpPr>
+          <p:cNvPr id="15" name="Connector 14"/>
+          <p:cNvCxnSpPr/>
+          <p:nvPr/>
+        </p:nvCxnSpPr>
+        <p:spPr>
+          <a:xfrm>
+            <a:off x="874400" y="1133856"/>
+            <a:ext cx="40000" cy="0"/>
+          </a:xfrm>
+          <a:prstGeom prst="line">
+            <a:avLst/>
+          </a:prstGeom>
+          <a:ln w="6350">
+            <a:solidFill>
+              <a:srgbClr val="333333"/>
+            </a:solidFill>
+          </a:ln>
+          <a:effectLst/>
+        </p:spPr>
+        <p:style>
+          <a:lnRef idx="2">
+            <a:schemeClr val="accent1"/>
+          </a:lnRef>
+          <a:fillRef idx="0">
+            <a:schemeClr val="accent1"/>
+          </a:fillRef>
+          <a:effectRef idx="1">
+            <a:schemeClr val="accent1"/>
+          </a:effectRef>
+          <a:fontRef idx="minor">
+            <a:schemeClr val="tx1"/>
+          </a:fontRef>
+        </p:style>
+      </p:cxnSp>
+      <p:sp>
+        <p:nvSpPr>
+          <p:cNvPr id="16" name="TextBox 15"/>
+          <p:cNvSpPr txBox="1"/>
+          <p:nvPr/>
+        </p:nvSpPr>
+        <p:spPr>
+          <a:xfrm>
+            <a:off x="365760" y="1051560"/>
+            <a:ext cx="502920" cy="164592"/>
+          </a:xfrm>
+          <a:prstGeom prst="rect">
+            <a:avLst/>
+          </a:prstGeom>
+          <a:noFill/>
+          <a:effectLst/>
+        </p:spPr>
+        <p:txBody>
+          <a:bodyPr wrap="square" lIns="0" rIns="0" tIns="0" bIns="0" anchor="ctr">
+            <a:spAutoFit/>
+          </a:bodyPr>
+          <a:lstStyle/>
+          <a:p>
+            <a:pPr algn="r"/>
+            <a:r>
+              <a:rPr sz="700" b="0" i="0">
+                <a:solidFill>
+                  <a:srgbClr val="222222"/>
+                </a:solidFill>
+                <a:latin typeface="Arial"/>
+              </a:rPr>
+              <a:t>0.8</a:t>
+            </a:r>
+          </a:p>
+        </p:txBody>
+      </p:sp>
+      <p:cxnSp>
+        <p:nvCxnSpPr>
+          <p:cNvPr id="17" name="Connector 16"/>
+          <p:cNvCxnSpPr/>
+          <p:nvPr/>
+        </p:nvCxnSpPr>
+        <p:spPr>
+          <a:xfrm>
+            <a:off x="874400" y="548640"/>
+            <a:ext cx="40000" cy="0"/>
+          </a:xfrm>
+          <a:prstGeom prst="line">
+            <a:avLst/>
+          </a:prstGeom>
+          <a:ln w="6350">
+            <a:solidFill>
+              <a:srgbClr val="333333"/>
+            </a:solidFill>
+          </a:ln>
+          <a:effectLst/>
+        </p:spPr>
+        <p:style>
+          <a:lnRef idx="2">
+            <a:schemeClr val="accent1"/>
+          </a:lnRef>
+          <a:fillRef idx="0">
+            <a:schemeClr val="accent1"/>
+          </a:fillRef>
+          <a:effectRef idx="1">
+            <a:schemeClr val="accent1"/>
+          </a:effectRef>
+          <a:fontRef idx="minor">
+            <a:schemeClr val="tx1"/>
+          </a:fontRef>
+        </p:style>
+      </p:cxnSp>
+      <p:sp>
+        <p:nvSpPr>
+          <p:cNvPr id="18" name="TextBox 17"/>
+          <p:cNvSpPr txBox="1"/>
+          <p:nvPr/>
+        </p:nvSpPr>
+        <p:spPr>
+          <a:xfrm>
+            <a:off x="365760" y="466344"/>
+            <a:ext cx="502920" cy="164592"/>
+          </a:xfrm>
+          <a:prstGeom prst="rect">
+            <a:avLst/>
+          </a:prstGeom>
+          <a:noFill/>
+          <a:effectLst/>
+        </p:spPr>
+        <p:txBody>
+          <a:bodyPr wrap="square" lIns="0" rIns="0" tIns="0" bIns="0" anchor="ctr">
+            <a:spAutoFit/>
+          </a:bodyPr>
+          <a:lstStyle/>
+          <a:p>
+            <a:pPr algn="r"/>
+            <a:r>
+              <a:rPr sz="700" b="0" i="0">
+                <a:solidFill>
+                  <a:srgbClr val="222222"/>
+                </a:solidFill>
+                <a:latin typeface="Arial"/>
+              </a:rPr>
+              <a:t>1.0</a:t>
+            </a:r>
+          </a:p>
+        </p:txBody>
+      </p:sp>
+      <p:sp>
+        <p:nvSpPr>
+          <p:cNvPr id="19" name="TextBox 18"/>
+          <p:cNvSpPr txBox="1"/>
+          <p:nvPr/>
+        </p:nvSpPr>
+        <p:spPr>
+          <a:xfrm>
+            <a:off x="914400" y="3767328"/>
+            <a:ext cx="4206240" cy="201168"/>
+          </a:xfrm>
+          <a:prstGeom prst="rect">
+            <a:avLst/>
+          </a:prstGeom>
+          <a:noFill/>
+          <a:effectLst/>
+        </p:spPr>
+        <p:txBody>
+          <a:bodyPr wrap="square" lIns="0" rIns="0" tIns="0" bIns="0" anchor="ctr">
+            <a:spAutoFit/>
+          </a:bodyPr>
+          <a:lstStyle/>
+          <a:p>
+            <a:pPr algn="ctr"/>
+            <a:r>
+              <a:rPr sz="900" b="0" i="0">
+                <a:solidFill>
+                  <a:srgbClr val="222222"/>
+                </a:solidFill>
+                <a:latin typeface="Arial"/>
+              </a:rPr>
+              <a:t>Subjects, ordered by predicted probability</a:t>
+            </a:r>
+          </a:p>
+        </p:txBody>
+      </p:sp>
+      <p:sp>
+        <p:nvSpPr>
+          <p:cNvPr id="20" name="TextBox 19"/>
+          <p:cNvSpPr txBox="1"/>
+          <p:nvPr/>
+        </p:nvSpPr>
+        <p:spPr>
+          <a:xfrm rot="16200000">
+            <a:off x="45720" y="1463040"/>
+            <a:ext cx="777240" cy="1097280"/>
+          </a:xfrm>
+          <a:prstGeom prst="rect">
+            <a:avLst/>
+          </a:prstGeom>
+          <a:noFill/>
+          <a:effectLst/>
+        </p:spPr>
+        <p:txBody>
+          <a:bodyPr wrap="square" lIns="0" rIns="0" tIns="0" bIns="0" anchor="ctr">
+            <a:spAutoFit/>
+          </a:bodyPr>
+          <a:lstStyle/>
+          <a:p>
+            <a:pPr algn="ctr"/>
+            <a:r>
+              <a:rPr sz="900" b="0" i="0">
+                <a:solidFill>
+                  <a:srgbClr val="222222"/>
+                </a:solidFill>
+                <a:latin typeface="Arial"/>
+              </a:rPr>
+              <a:t>Predicted P(good)</a:t>
+            </a:r>
+          </a:p>
+        </p:txBody>
+      </p:sp>
+      <p:cxnSp>
+        <p:nvCxnSpPr>
+          <p:cNvPr id="21" name="Connector 20"/>
+          <p:cNvCxnSpPr/>
+          <p:nvPr/>
+        </p:nvCxnSpPr>
+        <p:spPr>
+          <a:xfrm>
+            <a:off x="914400" y="2011680"/>
+            <a:ext cx="4206240" cy="0"/>
+          </a:xfrm>
+          <a:prstGeom prst="line">
+            <a:avLst/>
+          </a:prstGeom>
+          <a:ln w="7620">
+            <a:solidFill>
+              <a:srgbClr val="222222"/>
+            </a:solidFill>
+          </a:ln>
+          <a:effectLst/>
+        </p:spPr>
+        <p:style>
+          <a:lnRef idx="2">
+            <a:schemeClr val="accent1"/>
+          </a:lnRef>
+          <a:fillRef idx="0">
+            <a:schemeClr val="accent1"/>
+          </a:fillRef>
+          <a:effectRef idx="1">
+            <a:schemeClr val="accent1"/>
+          </a:effectRef>
+          <a:fontRef idx="minor">
+            <a:schemeClr val="tx1"/>
+          </a:fontRef>
+        </p:style>
+      </p:cxnSp>
+      <p:sp>
+        <p:nvSpPr>
+          <p:cNvPr id="22" name="TextBox 21"/>
+          <p:cNvSpPr txBox="1"/>
+          <p:nvPr/>
+        </p:nvSpPr>
+        <p:spPr>
+          <a:xfrm>
+            <a:off x="5140640" y="1920240"/>
+            <a:ext cx="731520" cy="182880"/>
+          </a:xfrm>
+          <a:prstGeom prst="rect">
+            <a:avLst/>
+          </a:prstGeom>
+          <a:noFill/>
+          <a:effectLst/>
+        </p:spPr>
+        <p:txBody>
+          <a:bodyPr wrap="square" lIns="0" rIns="0" tIns="0" bIns="0" anchor="ctr">
+            <a:spAutoFit/>
+          </a:bodyPr>
+          <a:lstStyle/>
+          <a:p>
+            <a:pPr algn="l"/>
+            <a:r>
+              <a:rPr sz="700" b="0" i="0">
+                <a:solidFill>
+                  <a:srgbClr val="222222"/>
+                </a:solidFill>
+                <a:latin typeface="Arial"/>
+              </a:rPr>
+              <a:t>0.5 threshold</a:t>
+            </a:r>
+          </a:p>
+        </p:txBody>
+      </p:sp>
+      <p:sp>
+        <p:nvSpPr>
+          <p:cNvPr id="23" name="Rectangle 22"/>
+          <p:cNvSpPr/>
+          <p:nvPr/>
+        </p:nvSpPr>
+        <p:spPr>
+          <a:xfrm>
+            <a:off x="925216" y="2758576"/>
+            <a:ext cx="98546" cy="716144"/>
+          </a:xfrm>
+          <a:prstGeom prst="rect">
+            <a:avLst/>
+          </a:prstGeom>
+          <a:solidFill>
+            <a:srgbClr val="C53E1F"/>
+          </a:solidFill>
+          <a:ln w="2540">
+            <a:solidFill>
+              <a:srgbClr val="FFFFFF"/>
+            </a:solidFill>
+          </a:ln>
+          <a:effectLst/>
+        </p:spPr>
+        <p:style>
+          <a:lnRef idx="1">
+            <a:schemeClr val="accent1"/>
+          </a:lnRef>
+          <a:fillRef idx="3">
+            <a:schemeClr val="accent1"/>
+          </a:fillRef>
+          <a:effectRef idx="2">
+            <a:schemeClr val="accent1"/>
+          </a:effectRef>
+          <a:fontRef idx="minor">
+            <a:schemeClr val="lt1"/>
+          </a:fontRef>
+        </p:style>
+        <p:txBody>
+          <a:bodyPr rtlCol="0" anchor="ctr"/>
+          <a:lstStyle/>
+          <a:p>
+            <a:pPr algn="ctr"/>
+          </a:p>
+        </p:txBody>
+      </p:sp>
+      <p:sp>
+        <p:nvSpPr>
+          <p:cNvPr id="24" name="TextBox 23"/>
+          <p:cNvSpPr txBox="1"/>
+          <p:nvPr/>
+        </p:nvSpPr>
+        <p:spPr>
+          <a:xfrm>
+            <a:off x="864761" y="3493008"/>
+            <a:ext cx="219456" cy="109728"/>
+          </a:xfrm>
+          <a:prstGeom prst="rect">
+            <a:avLst/>
+          </a:prstGeom>
+          <a:noFill/>
+          <a:effectLst/>
+        </p:spPr>
+        <p:txBody>
+          <a:bodyPr wrap="square" lIns="0" rIns="0" tIns="0" bIns="0" anchor="ctr">
+            <a:spAutoFit/>
+          </a:bodyPr>
+          <a:lstStyle/>
+          <a:p>
+            <a:pPr algn="ctr"/>
+            <a:r>
+              <a:rPr sz="400" b="0" i="0">
+                <a:solidFill>
+                  <a:srgbClr val="C53E1F"/>
+                </a:solidFill>
+                <a:latin typeface="Arial"/>
+              </a:rPr>
+              <a:t>35</a:t>
+            </a:r>
+          </a:p>
+        </p:txBody>
+      </p:sp>
+      <p:sp>
+        <p:nvSpPr>
+          <p:cNvPr id="25" name="Rectangle 24"/>
+          <p:cNvSpPr/>
+          <p:nvPr/>
+        </p:nvSpPr>
+        <p:spPr>
+          <a:xfrm>
+            <a:off x="1045394" y="2753829"/>
+            <a:ext cx="98546" cy="720891"/>
+          </a:xfrm>
+          <a:prstGeom prst="rect">
+            <a:avLst/>
+          </a:prstGeom>
+          <a:solidFill>
+            <a:srgbClr val="C53E1F"/>
+          </a:solidFill>
+          <a:ln w="2540">
+            <a:solidFill>
+              <a:srgbClr val="FFFFFF"/>
+            </a:solidFill>
+          </a:ln>
+          <a:effectLst/>
+        </p:spPr>
+        <p:style>
+          <a:lnRef idx="1">
+            <a:schemeClr val="accent1"/>
+          </a:lnRef>
+          <a:fillRef idx="3">
+            <a:schemeClr val="accent1"/>
+          </a:fillRef>
+          <a:effectRef idx="2">
+            <a:schemeClr val="accent1"/>
+          </a:effectRef>
+          <a:fontRef idx="minor">
+            <a:schemeClr val="lt1"/>
+          </a:fontRef>
+        </p:style>
+        <p:txBody>
+          <a:bodyPr rtlCol="0" anchor="ctr"/>
+          <a:lstStyle/>
+          <a:p>
+            <a:pPr algn="ctr"/>
+          </a:p>
+        </p:txBody>
+      </p:sp>
+      <p:sp>
+        <p:nvSpPr>
+          <p:cNvPr id="26" name="TextBox 25"/>
+          <p:cNvSpPr txBox="1"/>
+          <p:nvPr/>
+        </p:nvSpPr>
+        <p:spPr>
+          <a:xfrm>
+            <a:off x="984939" y="3493008"/>
+            <a:ext cx="219456" cy="109728"/>
+          </a:xfrm>
+          <a:prstGeom prst="rect">
+            <a:avLst/>
+          </a:prstGeom>
+          <a:noFill/>
+          <a:effectLst/>
+        </p:spPr>
+        <p:txBody>
+          <a:bodyPr wrap="square" lIns="0" rIns="0" tIns="0" bIns="0" anchor="ctr">
+            <a:spAutoFit/>
+          </a:bodyPr>
+          <a:lstStyle/>
+          <a:p>
+            <a:pPr algn="ctr"/>
+            <a:r>
+              <a:rPr sz="400" b="0" i="0">
+                <a:solidFill>
+                  <a:srgbClr val="C53E1F"/>
+                </a:solidFill>
+                <a:latin typeface="Arial"/>
+              </a:rPr>
+              <a:t>19</a:t>
+            </a:r>
+          </a:p>
+        </p:txBody>
+      </p:sp>
+      <p:sp>
+        <p:nvSpPr>
+          <p:cNvPr id="27" name="Rectangle 26"/>
+          <p:cNvSpPr/>
+          <p:nvPr/>
+        </p:nvSpPr>
+        <p:spPr>
+          <a:xfrm>
+            <a:off x="1165572" y="2621041"/>
+            <a:ext cx="98546" cy="853679"/>
+          </a:xfrm>
+          <a:prstGeom prst="rect">
+            <a:avLst/>
+          </a:prstGeom>
+          <a:solidFill>
+            <a:srgbClr val="C53E1F"/>
+          </a:solidFill>
+          <a:ln w="2540">
+            <a:solidFill>
+              <a:srgbClr val="FFFFFF"/>
+            </a:solidFill>
+          </a:ln>
+          <a:effectLst/>
+        </p:spPr>
+        <p:style>
+          <a:lnRef idx="1">
+            <a:schemeClr val="accent1"/>
+          </a:lnRef>
+          <a:fillRef idx="3">
+            <a:schemeClr val="accent1"/>
+          </a:fillRef>
+          <a:effectRef idx="2">
+            <a:schemeClr val="accent1"/>
+          </a:effectRef>
+          <a:fontRef idx="minor">
+            <a:schemeClr val="lt1"/>
+          </a:fontRef>
+        </p:style>
+        <p:txBody>
+          <a:bodyPr rtlCol="0" anchor="ctr"/>
+          <a:lstStyle/>
+          <a:p>
+            <a:pPr algn="ctr"/>
+          </a:p>
+        </p:txBody>
+      </p:sp>
+      <p:sp>
+        <p:nvSpPr>
+          <p:cNvPr id="28" name="TextBox 27"/>
+          <p:cNvSpPr txBox="1"/>
+          <p:nvPr/>
+        </p:nvSpPr>
+        <p:spPr>
+          <a:xfrm>
+            <a:off x="1105117" y="3493008"/>
+            <a:ext cx="219456" cy="109728"/>
+          </a:xfrm>
+          <a:prstGeom prst="rect">
+            <a:avLst/>
+          </a:prstGeom>
+          <a:noFill/>
+          <a:effectLst/>
+        </p:spPr>
+        <p:txBody>
+          <a:bodyPr wrap="square" lIns="0" rIns="0" tIns="0" bIns="0" anchor="ctr">
+            <a:spAutoFit/>
+          </a:bodyPr>
+          <a:lstStyle/>
+          <a:p>
+            <a:pPr algn="ctr"/>
+            <a:r>
+              <a:rPr sz="400" b="0" i="0">
+                <a:solidFill>
+                  <a:srgbClr val="C53E1F"/>
+                </a:solidFill>
+                <a:latin typeface="Arial"/>
+              </a:rPr>
+              <a:t>15</a:t>
+            </a:r>
+          </a:p>
+        </p:txBody>
+      </p:sp>
+      <p:sp>
+        <p:nvSpPr>
+          <p:cNvPr id="29" name="Rectangle 28"/>
+          <p:cNvSpPr/>
+          <p:nvPr/>
+        </p:nvSpPr>
+        <p:spPr>
+          <a:xfrm>
+            <a:off x="1285751" y="2602061"/>
+            <a:ext cx="98546" cy="872659"/>
+          </a:xfrm>
+          <a:prstGeom prst="rect">
+            <a:avLst/>
+          </a:prstGeom>
+          <a:solidFill>
+            <a:srgbClr val="0A7D6E"/>
+          </a:solidFill>
+          <a:ln w="2540">
+            <a:solidFill>
+              <a:srgbClr val="FFFFFF"/>
+            </a:solidFill>
+          </a:ln>
+          <a:effectLst/>
+        </p:spPr>
+        <p:style>
+          <a:lnRef idx="1">
+            <a:schemeClr val="accent1"/>
+          </a:lnRef>
+          <a:fillRef idx="3">
+            <a:schemeClr val="accent1"/>
+          </a:fillRef>
+          <a:effectRef idx="2">
+            <a:schemeClr val="accent1"/>
+          </a:effectRef>
+          <a:fontRef idx="minor">
+            <a:schemeClr val="lt1"/>
+          </a:fontRef>
+        </p:style>
+        <p:txBody>
+          <a:bodyPr rtlCol="0" anchor="ctr"/>
+          <a:lstStyle/>
+          <a:p>
+            <a:pPr algn="ctr"/>
+          </a:p>
+        </p:txBody>
+      </p:sp>
+      <p:sp>
+        <p:nvSpPr>
+          <p:cNvPr id="30" name="Rectangle 29"/>
+          <p:cNvSpPr/>
+          <p:nvPr/>
+        </p:nvSpPr>
+        <p:spPr>
+          <a:xfrm>
+            <a:off x="1285751" y="2602061"/>
+            <a:ext cx="98546" cy="872659"/>
+          </a:xfrm>
+          <a:prstGeom prst="rect">
+            <a:avLst/>
+          </a:prstGeom>
+          <a:noFill/>
+          <a:ln w="16510">
+            <a:solidFill>
+              <a:srgbClr val="D4A300"/>
+            </a:solidFill>
+          </a:ln>
+          <a:effectLst/>
+        </p:spPr>
+        <p:style>
+          <a:lnRef idx="1">
+            <a:schemeClr val="accent1"/>
+          </a:lnRef>
+          <a:fillRef idx="3">
+            <a:schemeClr val="accent1"/>
+          </a:fillRef>
+          <a:effectRef idx="2">
+            <a:schemeClr val="accent1"/>
+          </a:effectRef>
+          <a:fontRef idx="minor">
+            <a:schemeClr val="lt1"/>
+          </a:fontRef>
+        </p:style>
+        <p:txBody>
+          <a:bodyPr rtlCol="0" anchor="ctr"/>
+          <a:lstStyle/>
+          <a:p>
+            <a:pPr algn="ctr"/>
+          </a:p>
+        </p:txBody>
+      </p:sp>
+      <p:sp>
+        <p:nvSpPr>
+          <p:cNvPr id="31" name="TextBox 30"/>
+          <p:cNvSpPr txBox="1"/>
+          <p:nvPr/>
+        </p:nvSpPr>
+        <p:spPr>
+          <a:xfrm>
+            <a:off x="1261872" y="2455757"/>
+            <a:ext cx="146304" cy="128016"/>
+          </a:xfrm>
+          <a:prstGeom prst="rect">
+            <a:avLst/>
+          </a:prstGeom>
+          <a:noFill/>
+          <a:effectLst/>
+        </p:spPr>
+        <p:txBody>
+          <a:bodyPr wrap="square" lIns="0" rIns="0" tIns="0" bIns="0" anchor="ctr">
+            <a:spAutoFit/>
+          </a:bodyPr>
+          <a:lstStyle/>
+          <a:p>
+            <a:pPr algn="ctr"/>
+            <a:r>
+              <a:rPr sz="1000" b="1" i="0">
+                <a:solidFill>
+                  <a:srgbClr val="D4A300"/>
+                </a:solidFill>
+                <a:latin typeface="Arial"/>
+              </a:rPr>
+              <a:t>✗</a:t>
+            </a:r>
+          </a:p>
+        </p:txBody>
+      </p:sp>
+      <p:sp>
+        <p:nvSpPr>
+          <p:cNvPr id="32" name="TextBox 31"/>
+          <p:cNvSpPr txBox="1"/>
+          <p:nvPr/>
+        </p:nvSpPr>
+        <p:spPr>
+          <a:xfrm>
+            <a:off x="1225296" y="3493008"/>
+            <a:ext cx="219456" cy="109728"/>
+          </a:xfrm>
+          <a:prstGeom prst="rect">
+            <a:avLst/>
+          </a:prstGeom>
+          <a:noFill/>
+          <a:effectLst/>
+        </p:spPr>
+        <p:txBody>
+          <a:bodyPr wrap="square" lIns="0" rIns="0" tIns="0" bIns="0" anchor="ctr">
+            <a:spAutoFit/>
+          </a:bodyPr>
+          <a:lstStyle/>
+          <a:p>
+            <a:pPr algn="ctr"/>
+            <a:r>
+              <a:rPr sz="400" b="0" i="0">
+                <a:solidFill>
+                  <a:srgbClr val="0A7D6E"/>
+                </a:solidFill>
+                <a:latin typeface="Arial"/>
+              </a:rPr>
+              <a:t>17</a:t>
+            </a:r>
+          </a:p>
+        </p:txBody>
+      </p:sp>
+      <p:sp>
+        <p:nvSpPr>
+          <p:cNvPr id="33" name="Rectangle 32"/>
+          <p:cNvSpPr/>
+          <p:nvPr/>
+        </p:nvSpPr>
+        <p:spPr>
+          <a:xfrm>
+            <a:off x="1405929" y="2588353"/>
+            <a:ext cx="98546" cy="886367"/>
+          </a:xfrm>
+          <a:prstGeom prst="rect">
+            <a:avLst/>
+          </a:prstGeom>
+          <a:solidFill>
+            <a:srgbClr val="C53E1F"/>
+          </a:solidFill>
+          <a:ln w="2540">
+            <a:solidFill>
+              <a:srgbClr val="FFFFFF"/>
+            </a:solidFill>
+          </a:ln>
+          <a:effectLst/>
+        </p:spPr>
+        <p:style>
+          <a:lnRef idx="1">
+            <a:schemeClr val="accent1"/>
+          </a:lnRef>
+          <a:fillRef idx="3">
+            <a:schemeClr val="accent1"/>
+          </a:fillRef>
+          <a:effectRef idx="2">
+            <a:schemeClr val="accent1"/>
+          </a:effectRef>
+          <a:fontRef idx="minor">
+            <a:schemeClr val="lt1"/>
+          </a:fontRef>
+        </p:style>
+        <p:txBody>
+          <a:bodyPr rtlCol="0" anchor="ctr"/>
+          <a:lstStyle/>
+          <a:p>
+            <a:pPr algn="ctr"/>
+          </a:p>
+        </p:txBody>
+      </p:sp>
+      <p:sp>
+        <p:nvSpPr>
+          <p:cNvPr id="34" name="TextBox 33"/>
+          <p:cNvSpPr txBox="1"/>
+          <p:nvPr/>
+        </p:nvSpPr>
+        <p:spPr>
+          <a:xfrm>
+            <a:off x="1345474" y="3493008"/>
+            <a:ext cx="219456" cy="109728"/>
+          </a:xfrm>
+          <a:prstGeom prst="rect">
+            <a:avLst/>
+          </a:prstGeom>
+          <a:noFill/>
+          <a:effectLst/>
+        </p:spPr>
+        <p:txBody>
+          <a:bodyPr wrap="square" lIns="0" rIns="0" tIns="0" bIns="0" anchor="ctr">
+            <a:spAutoFit/>
+          </a:bodyPr>
+          <a:lstStyle/>
+          <a:p>
+            <a:pPr algn="ctr"/>
+            <a:r>
+              <a:rPr sz="400" b="0" i="0">
+                <a:solidFill>
+                  <a:srgbClr val="C53E1F"/>
+                </a:solidFill>
+                <a:latin typeface="Arial"/>
+              </a:rPr>
+              <a:t>34</a:t>
+            </a:r>
+          </a:p>
+        </p:txBody>
+      </p:sp>
+      <p:sp>
+        <p:nvSpPr>
+          <p:cNvPr id="35" name="Rectangle 34"/>
+          <p:cNvSpPr/>
+          <p:nvPr/>
+        </p:nvSpPr>
+        <p:spPr>
+          <a:xfrm>
+            <a:off x="1526107" y="2553215"/>
+            <a:ext cx="98546" cy="921505"/>
+          </a:xfrm>
+          <a:prstGeom prst="rect">
+            <a:avLst/>
+          </a:prstGeom>
+          <a:solidFill>
+            <a:srgbClr val="C53E1F"/>
+          </a:solidFill>
+          <a:ln w="2540">
+            <a:solidFill>
+              <a:srgbClr val="FFFFFF"/>
+            </a:solidFill>
+          </a:ln>
+          <a:effectLst/>
+        </p:spPr>
+        <p:style>
+          <a:lnRef idx="1">
+            <a:schemeClr val="accent1"/>
+          </a:lnRef>
+          <a:fillRef idx="3">
+            <a:schemeClr val="accent1"/>
+          </a:fillRef>
+          <a:effectRef idx="2">
+            <a:schemeClr val="accent1"/>
+          </a:effectRef>
+          <a:fontRef idx="minor">
+            <a:schemeClr val="lt1"/>
+          </a:fontRef>
+        </p:style>
+        <p:txBody>
+          <a:bodyPr rtlCol="0" anchor="ctr"/>
+          <a:lstStyle/>
+          <a:p>
+            <a:pPr algn="ctr"/>
+          </a:p>
+        </p:txBody>
+      </p:sp>
+      <p:sp>
+        <p:nvSpPr>
+          <p:cNvPr id="36" name="TextBox 35"/>
+          <p:cNvSpPr txBox="1"/>
+          <p:nvPr/>
+        </p:nvSpPr>
+        <p:spPr>
+          <a:xfrm>
+            <a:off x="1465652" y="3493008"/>
+            <a:ext cx="219456" cy="109728"/>
+          </a:xfrm>
+          <a:prstGeom prst="rect">
+            <a:avLst/>
+          </a:prstGeom>
+          <a:noFill/>
+          <a:effectLst/>
+        </p:spPr>
+        <p:txBody>
+          <a:bodyPr wrap="square" lIns="0" rIns="0" tIns="0" bIns="0" anchor="ctr">
+            <a:spAutoFit/>
+          </a:bodyPr>
+          <a:lstStyle/>
+          <a:p>
+            <a:pPr algn="ctr"/>
+            <a:r>
+              <a:rPr sz="400" b="0" i="0">
+                <a:solidFill>
+                  <a:srgbClr val="C53E1F"/>
+                </a:solidFill>
+                <a:latin typeface="Arial"/>
+              </a:rPr>
+              <a:t>22</a:t>
+            </a:r>
+          </a:p>
+        </p:txBody>
+      </p:sp>
+      <p:sp>
+        <p:nvSpPr>
+          <p:cNvPr id="37" name="Rectangle 36"/>
+          <p:cNvSpPr/>
+          <p:nvPr/>
+        </p:nvSpPr>
+        <p:spPr>
+          <a:xfrm>
+            <a:off x="1646285" y="2525542"/>
+            <a:ext cx="98546" cy="949178"/>
+          </a:xfrm>
+          <a:prstGeom prst="rect">
+            <a:avLst/>
+          </a:prstGeom>
+          <a:solidFill>
+            <a:srgbClr val="0A7D6E"/>
+          </a:solidFill>
+          <a:ln w="2540">
+            <a:solidFill>
+              <a:srgbClr val="FFFFFF"/>
+            </a:solidFill>
+          </a:ln>
+          <a:effectLst/>
+        </p:spPr>
+        <p:style>
+          <a:lnRef idx="1">
+            <a:schemeClr val="accent1"/>
+          </a:lnRef>
+          <a:fillRef idx="3">
+            <a:schemeClr val="accent1"/>
+          </a:fillRef>
+          <a:effectRef idx="2">
+            <a:schemeClr val="accent1"/>
+          </a:effectRef>
+          <a:fontRef idx="minor">
+            <a:schemeClr val="lt1"/>
+          </a:fontRef>
+        </p:style>
+        <p:txBody>
+          <a:bodyPr rtlCol="0" anchor="ctr"/>
+          <a:lstStyle/>
+          <a:p>
+            <a:pPr algn="ctr"/>
+          </a:p>
+        </p:txBody>
+      </p:sp>
+      <p:sp>
+        <p:nvSpPr>
+          <p:cNvPr id="38" name="Rectangle 37"/>
+          <p:cNvSpPr/>
+          <p:nvPr/>
+        </p:nvSpPr>
+        <p:spPr>
+          <a:xfrm>
+            <a:off x="1646285" y="2525542"/>
+            <a:ext cx="98546" cy="949178"/>
+          </a:xfrm>
+          <a:prstGeom prst="rect">
+            <a:avLst/>
+          </a:prstGeom>
+          <a:noFill/>
+          <a:ln w="16510">
+            <a:solidFill>
+              <a:srgbClr val="D4A300"/>
+            </a:solidFill>
+          </a:ln>
+          <a:effectLst/>
+        </p:spPr>
+        <p:style>
+          <a:lnRef idx="1">
+            <a:schemeClr val="accent1"/>
+          </a:lnRef>
+          <a:fillRef idx="3">
+            <a:schemeClr val="accent1"/>
+          </a:fillRef>
+          <a:effectRef idx="2">
+            <a:schemeClr val="accent1"/>
+          </a:effectRef>
+          <a:fontRef idx="minor">
+            <a:schemeClr val="lt1"/>
+          </a:fontRef>
+        </p:style>
+        <p:txBody>
+          <a:bodyPr rtlCol="0" anchor="ctr"/>
+          <a:lstStyle/>
+          <a:p>
+            <a:pPr algn="ctr"/>
+          </a:p>
+        </p:txBody>
+      </p:sp>
+      <p:sp>
+        <p:nvSpPr>
+          <p:cNvPr id="39" name="TextBox 38"/>
+          <p:cNvSpPr txBox="1"/>
+          <p:nvPr/>
+        </p:nvSpPr>
+        <p:spPr>
+          <a:xfrm>
+            <a:off x="1622406" y="2379238"/>
+            <a:ext cx="146304" cy="128016"/>
+          </a:xfrm>
+          <a:prstGeom prst="rect">
+            <a:avLst/>
+          </a:prstGeom>
+          <a:noFill/>
+          <a:effectLst/>
+        </p:spPr>
+        <p:txBody>
+          <a:bodyPr wrap="square" lIns="0" rIns="0" tIns="0" bIns="0" anchor="ctr">
+            <a:spAutoFit/>
+          </a:bodyPr>
+          <a:lstStyle/>
+          <a:p>
+            <a:pPr algn="ctr"/>
+            <a:r>
+              <a:rPr sz="1000" b="1" i="0">
+                <a:solidFill>
+                  <a:srgbClr val="D4A300"/>
+                </a:solidFill>
+                <a:latin typeface="Arial"/>
+              </a:rPr>
+              <a:t>✗</a:t>
+            </a:r>
+          </a:p>
+        </p:txBody>
+      </p:sp>
+      <p:sp>
+        <p:nvSpPr>
+          <p:cNvPr id="40" name="TextBox 39"/>
+          <p:cNvSpPr txBox="1"/>
+          <p:nvPr/>
+        </p:nvSpPr>
+        <p:spPr>
+          <a:xfrm>
+            <a:off x="1585830" y="3493008"/>
+            <a:ext cx="219456" cy="109728"/>
+          </a:xfrm>
+          <a:prstGeom prst="rect">
+            <a:avLst/>
+          </a:prstGeom>
+          <a:noFill/>
+          <a:effectLst/>
+        </p:spPr>
+        <p:txBody>
+          <a:bodyPr wrap="square" lIns="0" rIns="0" tIns="0" bIns="0" anchor="ctr">
+            <a:spAutoFit/>
+          </a:bodyPr>
+          <a:lstStyle/>
+          <a:p>
+            <a:pPr algn="ctr"/>
+            <a:r>
+              <a:rPr sz="400" b="0" i="0">
+                <a:solidFill>
+                  <a:srgbClr val="0A7D6E"/>
+                </a:solidFill>
+                <a:latin typeface="Arial"/>
+              </a:rPr>
+              <a:t>23</a:t>
+            </a:r>
+          </a:p>
+        </p:txBody>
+      </p:sp>
+      <p:sp>
+        <p:nvSpPr>
+          <p:cNvPr id="41" name="Rectangle 40"/>
+          <p:cNvSpPr/>
+          <p:nvPr/>
+        </p:nvSpPr>
+        <p:spPr>
+          <a:xfrm>
+            <a:off x="1766464" y="2475021"/>
+            <a:ext cx="98546" cy="999699"/>
+          </a:xfrm>
+          <a:prstGeom prst="rect">
+            <a:avLst/>
+          </a:prstGeom>
+          <a:solidFill>
+            <a:srgbClr val="C53E1F"/>
+          </a:solidFill>
+          <a:ln w="2540">
+            <a:solidFill>
+              <a:srgbClr val="FFFFFF"/>
+            </a:solidFill>
+          </a:ln>
+          <a:effectLst/>
+        </p:spPr>
+        <p:style>
+          <a:lnRef idx="1">
+            <a:schemeClr val="accent1"/>
+          </a:lnRef>
+          <a:fillRef idx="3">
+            <a:schemeClr val="accent1"/>
+          </a:fillRef>
+          <a:effectRef idx="2">
+            <a:schemeClr val="accent1"/>
+          </a:effectRef>
+          <a:fontRef idx="minor">
+            <a:schemeClr val="lt1"/>
+          </a:fontRef>
+        </p:style>
+        <p:txBody>
+          <a:bodyPr rtlCol="0" anchor="ctr"/>
+          <a:lstStyle/>
+          <a:p>
+            <a:pPr algn="ctr"/>
+          </a:p>
+        </p:txBody>
+      </p:sp>
+      <p:sp>
+        <p:nvSpPr>
+          <p:cNvPr id="42" name="TextBox 41"/>
+          <p:cNvSpPr txBox="1"/>
+          <p:nvPr/>
+        </p:nvSpPr>
+        <p:spPr>
+          <a:xfrm>
+            <a:off x="1706009" y="3493008"/>
+            <a:ext cx="219456" cy="109728"/>
+          </a:xfrm>
+          <a:prstGeom prst="rect">
+            <a:avLst/>
+          </a:prstGeom>
+          <a:noFill/>
+          <a:effectLst/>
+        </p:spPr>
+        <p:txBody>
+          <a:bodyPr wrap="square" lIns="0" rIns="0" tIns="0" bIns="0" anchor="ctr">
+            <a:spAutoFit/>
+          </a:bodyPr>
+          <a:lstStyle/>
+          <a:p>
+            <a:pPr algn="ctr"/>
+            <a:r>
+              <a:rPr sz="400" b="0" i="0">
+                <a:solidFill>
+                  <a:srgbClr val="C53E1F"/>
+                </a:solidFill>
+                <a:latin typeface="Arial"/>
+              </a:rPr>
+              <a:t>18</a:t>
+            </a:r>
+          </a:p>
+        </p:txBody>
+      </p:sp>
+      <p:sp>
+        <p:nvSpPr>
+          <p:cNvPr id="43" name="Rectangle 42"/>
+          <p:cNvSpPr/>
+          <p:nvPr/>
+        </p:nvSpPr>
+        <p:spPr>
+          <a:xfrm>
+            <a:off x="1886642" y="2417458"/>
+            <a:ext cx="98546" cy="1057262"/>
+          </a:xfrm>
+          <a:prstGeom prst="rect">
+            <a:avLst/>
+          </a:prstGeom>
+          <a:solidFill>
+            <a:srgbClr val="C53E1F"/>
+          </a:solidFill>
+          <a:ln w="2540">
+            <a:solidFill>
+              <a:srgbClr val="FFFFFF"/>
+            </a:solidFill>
+          </a:ln>
+          <a:effectLst/>
+        </p:spPr>
+        <p:style>
+          <a:lnRef idx="1">
+            <a:schemeClr val="accent1"/>
+          </a:lnRef>
+          <a:fillRef idx="3">
+            <a:schemeClr val="accent1"/>
+          </a:fillRef>
+          <a:effectRef idx="2">
+            <a:schemeClr val="accent1"/>
+          </a:effectRef>
+          <a:fontRef idx="minor">
+            <a:schemeClr val="lt1"/>
+          </a:fontRef>
+        </p:style>
+        <p:txBody>
+          <a:bodyPr rtlCol="0" anchor="ctr"/>
+          <a:lstStyle/>
+          <a:p>
+            <a:pPr algn="ctr"/>
+          </a:p>
+        </p:txBody>
+      </p:sp>
+      <p:sp>
+        <p:nvSpPr>
+          <p:cNvPr id="44" name="TextBox 43"/>
+          <p:cNvSpPr txBox="1"/>
+          <p:nvPr/>
+        </p:nvSpPr>
+        <p:spPr>
+          <a:xfrm>
+            <a:off x="1826187" y="3493008"/>
+            <a:ext cx="219456" cy="109728"/>
+          </a:xfrm>
+          <a:prstGeom prst="rect">
+            <a:avLst/>
+          </a:prstGeom>
+          <a:noFill/>
+          <a:effectLst/>
+        </p:spPr>
+        <p:txBody>
+          <a:bodyPr wrap="square" lIns="0" rIns="0" tIns="0" bIns="0" anchor="ctr">
+            <a:spAutoFit/>
+          </a:bodyPr>
+          <a:lstStyle/>
+          <a:p>
+            <a:pPr algn="ctr"/>
+            <a:r>
+              <a:rPr sz="400" b="0" i="0">
+                <a:solidFill>
+                  <a:srgbClr val="C53E1F"/>
+                </a:solidFill>
+                <a:latin typeface="Arial"/>
+              </a:rPr>
+              <a:t>13</a:t>
+            </a:r>
+          </a:p>
+        </p:txBody>
+      </p:sp>
+      <p:sp>
+        <p:nvSpPr>
+          <p:cNvPr id="45" name="Rectangle 44"/>
+          <p:cNvSpPr/>
+          <p:nvPr/>
+        </p:nvSpPr>
+        <p:spPr>
+          <a:xfrm>
+            <a:off x="2006820" y="2273589"/>
+            <a:ext cx="98546" cy="1201131"/>
+          </a:xfrm>
+          <a:prstGeom prst="rect">
+            <a:avLst/>
+          </a:prstGeom>
+          <a:solidFill>
+            <a:srgbClr val="0A7D6E"/>
+          </a:solidFill>
+          <a:ln w="2540">
+            <a:solidFill>
+              <a:srgbClr val="FFFFFF"/>
+            </a:solidFill>
+          </a:ln>
+          <a:effectLst/>
+        </p:spPr>
+        <p:style>
+          <a:lnRef idx="1">
+            <a:schemeClr val="accent1"/>
+          </a:lnRef>
+          <a:fillRef idx="3">
+            <a:schemeClr val="accent1"/>
+          </a:fillRef>
+          <a:effectRef idx="2">
+            <a:schemeClr val="accent1"/>
+          </a:effectRef>
+          <a:fontRef idx="minor">
+            <a:schemeClr val="lt1"/>
+          </a:fontRef>
+        </p:style>
+        <p:txBody>
+          <a:bodyPr rtlCol="0" anchor="ctr"/>
+          <a:lstStyle/>
+          <a:p>
+            <a:pPr algn="ctr"/>
+          </a:p>
+        </p:txBody>
+      </p:sp>
+      <p:sp>
+        <p:nvSpPr>
+          <p:cNvPr id="46" name="Rectangle 45"/>
+          <p:cNvSpPr/>
+          <p:nvPr/>
+        </p:nvSpPr>
+        <p:spPr>
+          <a:xfrm>
+            <a:off x="2006820" y="2273589"/>
+            <a:ext cx="98546" cy="1201131"/>
+          </a:xfrm>
+          <a:prstGeom prst="rect">
+            <a:avLst/>
+          </a:prstGeom>
+          <a:noFill/>
+          <a:ln w="16510">
+            <a:solidFill>
+              <a:srgbClr val="D4A300"/>
+            </a:solidFill>
+          </a:ln>
+          <a:effectLst/>
+        </p:spPr>
+        <p:style>
+          <a:lnRef idx="1">
+            <a:schemeClr val="accent1"/>
+          </a:lnRef>
+          <a:fillRef idx="3">
+            <a:schemeClr val="accent1"/>
+          </a:fillRef>
+          <a:effectRef idx="2">
+            <a:schemeClr val="accent1"/>
+          </a:effectRef>
+          <a:fontRef idx="minor">
+            <a:schemeClr val="lt1"/>
+          </a:fontRef>
+        </p:style>
+        <p:txBody>
+          <a:bodyPr rtlCol="0" anchor="ctr"/>
+          <a:lstStyle/>
+          <a:p>
+            <a:pPr algn="ctr"/>
+          </a:p>
+        </p:txBody>
+      </p:sp>
+      <p:sp>
+        <p:nvSpPr>
+          <p:cNvPr id="47" name="TextBox 46"/>
+          <p:cNvSpPr txBox="1"/>
+          <p:nvPr/>
+        </p:nvSpPr>
+        <p:spPr>
+          <a:xfrm>
+            <a:off x="1982941" y="2127285"/>
+            <a:ext cx="146304" cy="128016"/>
+          </a:xfrm>
+          <a:prstGeom prst="rect">
+            <a:avLst/>
+          </a:prstGeom>
+          <a:noFill/>
+          <a:effectLst/>
+        </p:spPr>
+        <p:txBody>
+          <a:bodyPr wrap="square" lIns="0" rIns="0" tIns="0" bIns="0" anchor="ctr">
+            <a:spAutoFit/>
+          </a:bodyPr>
+          <a:lstStyle/>
+          <a:p>
+            <a:pPr algn="ctr"/>
+            <a:r>
+              <a:rPr sz="1000" b="1" i="0">
+                <a:solidFill>
+                  <a:srgbClr val="D4A300"/>
+                </a:solidFill>
+                <a:latin typeface="Arial"/>
+              </a:rPr>
+              <a:t>✗</a:t>
+            </a:r>
+          </a:p>
+        </p:txBody>
+      </p:sp>
+      <p:sp>
+        <p:nvSpPr>
+          <p:cNvPr id="48" name="TextBox 47"/>
+          <p:cNvSpPr txBox="1"/>
+          <p:nvPr/>
+        </p:nvSpPr>
+        <p:spPr>
+          <a:xfrm>
+            <a:off x="1946365" y="3493008"/>
+            <a:ext cx="219456" cy="109728"/>
+          </a:xfrm>
+          <a:prstGeom prst="rect">
+            <a:avLst/>
+          </a:prstGeom>
+          <a:noFill/>
+          <a:effectLst/>
+        </p:spPr>
+        <p:txBody>
+          <a:bodyPr wrap="square" lIns="0" rIns="0" tIns="0" bIns="0" anchor="ctr">
+            <a:spAutoFit/>
+          </a:bodyPr>
+          <a:lstStyle/>
+          <a:p>
+            <a:pPr algn="ctr"/>
+            <a:r>
+              <a:rPr sz="400" b="0" i="0">
+                <a:solidFill>
+                  <a:srgbClr val="0A7D6E"/>
+                </a:solidFill>
+                <a:latin typeface="Arial"/>
+              </a:rPr>
+              <a:t>16</a:t>
+            </a:r>
+          </a:p>
+        </p:txBody>
+      </p:sp>
+      <p:sp>
+        <p:nvSpPr>
+          <p:cNvPr id="49" name="Rectangle 48"/>
+          <p:cNvSpPr/>
+          <p:nvPr/>
+        </p:nvSpPr>
+        <p:spPr>
+          <a:xfrm>
+            <a:off x="2126999" y="2272993"/>
+            <a:ext cx="98546" cy="1201727"/>
+          </a:xfrm>
+          <a:prstGeom prst="rect">
+            <a:avLst/>
+          </a:prstGeom>
+          <a:solidFill>
+            <a:srgbClr val="0A7D6E"/>
+          </a:solidFill>
+          <a:ln w="2540">
+            <a:solidFill>
+              <a:srgbClr val="FFFFFF"/>
+            </a:solidFill>
+          </a:ln>
+          <a:effectLst/>
+        </p:spPr>
+        <p:style>
+          <a:lnRef idx="1">
+            <a:schemeClr val="accent1"/>
+          </a:lnRef>
+          <a:fillRef idx="3">
+            <a:schemeClr val="accent1"/>
+          </a:fillRef>
+          <a:effectRef idx="2">
+            <a:schemeClr val="accent1"/>
+          </a:effectRef>
+          <a:fontRef idx="minor">
+            <a:schemeClr val="lt1"/>
+          </a:fontRef>
+        </p:style>
+        <p:txBody>
+          <a:bodyPr rtlCol="0" anchor="ctr"/>
+          <a:lstStyle/>
+          <a:p>
+            <a:pPr algn="ctr"/>
+          </a:p>
+        </p:txBody>
+      </p:sp>
+      <p:sp>
+        <p:nvSpPr>
+          <p:cNvPr id="50" name="Rectangle 49"/>
+          <p:cNvSpPr/>
+          <p:nvPr/>
+        </p:nvSpPr>
+        <p:spPr>
+          <a:xfrm>
+            <a:off x="2126999" y="2272993"/>
+            <a:ext cx="98546" cy="1201727"/>
+          </a:xfrm>
+          <a:prstGeom prst="rect">
+            <a:avLst/>
+          </a:prstGeom>
+          <a:noFill/>
+          <a:ln w="16510">
+            <a:solidFill>
+              <a:srgbClr val="D4A300"/>
+            </a:solidFill>
+          </a:ln>
+          <a:effectLst/>
+        </p:spPr>
+        <p:style>
+          <a:lnRef idx="1">
+            <a:schemeClr val="accent1"/>
+          </a:lnRef>
+          <a:fillRef idx="3">
+            <a:schemeClr val="accent1"/>
+          </a:fillRef>
+          <a:effectRef idx="2">
+            <a:schemeClr val="accent1"/>
+          </a:effectRef>
+          <a:fontRef idx="minor">
+            <a:schemeClr val="lt1"/>
+          </a:fontRef>
+        </p:style>
+        <p:txBody>
+          <a:bodyPr rtlCol="0" anchor="ctr"/>
+          <a:lstStyle/>
+          <a:p>
+            <a:pPr algn="ctr"/>
+          </a:p>
+        </p:txBody>
+      </p:sp>
+      <p:sp>
+        <p:nvSpPr>
+          <p:cNvPr id="51" name="TextBox 50"/>
+          <p:cNvSpPr txBox="1"/>
+          <p:nvPr/>
+        </p:nvSpPr>
+        <p:spPr>
+          <a:xfrm>
+            <a:off x="2103120" y="2126689"/>
+            <a:ext cx="146304" cy="128016"/>
+          </a:xfrm>
+          <a:prstGeom prst="rect">
+            <a:avLst/>
+          </a:prstGeom>
+          <a:noFill/>
+          <a:effectLst/>
+        </p:spPr>
+        <p:txBody>
+          <a:bodyPr wrap="square" lIns="0" rIns="0" tIns="0" bIns="0" anchor="ctr">
+            <a:spAutoFit/>
+          </a:bodyPr>
+          <a:lstStyle/>
+          <a:p>
+            <a:pPr algn="ctr"/>
+            <a:r>
+              <a:rPr sz="1000" b="1" i="0">
+                <a:solidFill>
+                  <a:srgbClr val="D4A300"/>
+                </a:solidFill>
+                <a:latin typeface="Arial"/>
+              </a:rPr>
+              <a:t>✗</a:t>
+            </a:r>
+          </a:p>
+        </p:txBody>
+      </p:sp>
+      <p:sp>
+        <p:nvSpPr>
+          <p:cNvPr id="52" name="TextBox 51"/>
+          <p:cNvSpPr txBox="1"/>
+          <p:nvPr/>
+        </p:nvSpPr>
+        <p:spPr>
+          <a:xfrm>
+            <a:off x="2066544" y="3493008"/>
+            <a:ext cx="219456" cy="109728"/>
+          </a:xfrm>
+          <a:prstGeom prst="rect">
+            <a:avLst/>
+          </a:prstGeom>
+          <a:noFill/>
+          <a:effectLst/>
+        </p:spPr>
+        <p:txBody>
+          <a:bodyPr wrap="square" lIns="0" rIns="0" tIns="0" bIns="0" anchor="ctr">
+            <a:spAutoFit/>
+          </a:bodyPr>
+          <a:lstStyle/>
+          <a:p>
+            <a:pPr algn="ctr"/>
+            <a:r>
+              <a:rPr sz="400" b="0" i="0">
+                <a:solidFill>
+                  <a:srgbClr val="0A7D6E"/>
+                </a:solidFill>
+                <a:latin typeface="Arial"/>
+              </a:rPr>
+              <a:t>8</a:t>
+            </a:r>
+          </a:p>
+        </p:txBody>
+      </p:sp>
+      <p:sp>
+        <p:nvSpPr>
+          <p:cNvPr id="53" name="Rectangle 52"/>
+          <p:cNvSpPr/>
+          <p:nvPr/>
+        </p:nvSpPr>
+        <p:spPr>
+          <a:xfrm>
+            <a:off x="2247177" y="2147043"/>
+            <a:ext cx="98546" cy="1327677"/>
+          </a:xfrm>
+          <a:prstGeom prst="rect">
+            <a:avLst/>
+          </a:prstGeom>
+          <a:solidFill>
+            <a:srgbClr val="0A7D6E"/>
+          </a:solidFill>
+          <a:ln w="2540">
+            <a:solidFill>
+              <a:srgbClr val="FFFFFF"/>
+            </a:solidFill>
+          </a:ln>
+          <a:effectLst/>
+        </p:spPr>
+        <p:style>
+          <a:lnRef idx="1">
+            <a:schemeClr val="accent1"/>
+          </a:lnRef>
+          <a:fillRef idx="3">
+            <a:schemeClr val="accent1"/>
+          </a:fillRef>
+          <a:effectRef idx="2">
+            <a:schemeClr val="accent1"/>
+          </a:effectRef>
+          <a:fontRef idx="minor">
+            <a:schemeClr val="lt1"/>
+          </a:fontRef>
+        </p:style>
+        <p:txBody>
+          <a:bodyPr rtlCol="0" anchor="ctr"/>
+          <a:lstStyle/>
+          <a:p>
+            <a:pPr algn="ctr"/>
+          </a:p>
+        </p:txBody>
+      </p:sp>
+      <p:sp>
+        <p:nvSpPr>
+          <p:cNvPr id="54" name="Rectangle 53"/>
+          <p:cNvSpPr/>
+          <p:nvPr/>
+        </p:nvSpPr>
+        <p:spPr>
+          <a:xfrm>
+            <a:off x="2247177" y="2147043"/>
+            <a:ext cx="98546" cy="1327677"/>
+          </a:xfrm>
+          <a:prstGeom prst="rect">
+            <a:avLst/>
+          </a:prstGeom>
+          <a:noFill/>
+          <a:ln w="16510">
+            <a:solidFill>
+              <a:srgbClr val="D4A300"/>
+            </a:solidFill>
+          </a:ln>
+          <a:effectLst/>
+        </p:spPr>
+        <p:style>
+          <a:lnRef idx="1">
+            <a:schemeClr val="accent1"/>
+          </a:lnRef>
+          <a:fillRef idx="3">
+            <a:schemeClr val="accent1"/>
+          </a:fillRef>
+          <a:effectRef idx="2">
+            <a:schemeClr val="accent1"/>
+          </a:effectRef>
+          <a:fontRef idx="minor">
+            <a:schemeClr val="lt1"/>
+          </a:fontRef>
+        </p:style>
+        <p:txBody>
+          <a:bodyPr rtlCol="0" anchor="ctr"/>
+          <a:lstStyle/>
+          <a:p>
+            <a:pPr algn="ctr"/>
+          </a:p>
+        </p:txBody>
+      </p:sp>
+      <p:sp>
+        <p:nvSpPr>
+          <p:cNvPr id="55" name="TextBox 54"/>
+          <p:cNvSpPr txBox="1"/>
+          <p:nvPr/>
+        </p:nvSpPr>
+        <p:spPr>
+          <a:xfrm>
+            <a:off x="2223298" y="2000739"/>
+            <a:ext cx="146304" cy="128016"/>
+          </a:xfrm>
+          <a:prstGeom prst="rect">
+            <a:avLst/>
+          </a:prstGeom>
+          <a:noFill/>
+          <a:effectLst/>
+        </p:spPr>
+        <p:txBody>
+          <a:bodyPr wrap="square" lIns="0" rIns="0" tIns="0" bIns="0" anchor="ctr">
+            <a:spAutoFit/>
+          </a:bodyPr>
+          <a:lstStyle/>
+          <a:p>
+            <a:pPr algn="ctr"/>
+            <a:r>
+              <a:rPr sz="1000" b="1" i="0">
+                <a:solidFill>
+                  <a:srgbClr val="D4A300"/>
+                </a:solidFill>
+                <a:latin typeface="Arial"/>
+              </a:rPr>
+              <a:t>✗</a:t>
+            </a:r>
+          </a:p>
+        </p:txBody>
+      </p:sp>
+      <p:sp>
+        <p:nvSpPr>
+          <p:cNvPr id="56" name="TextBox 55"/>
+          <p:cNvSpPr txBox="1"/>
+          <p:nvPr/>
+        </p:nvSpPr>
+        <p:spPr>
+          <a:xfrm>
+            <a:off x="2186722" y="3493008"/>
+            <a:ext cx="219456" cy="109728"/>
+          </a:xfrm>
+          <a:prstGeom prst="rect">
+            <a:avLst/>
+          </a:prstGeom>
+          <a:noFill/>
+          <a:effectLst/>
+        </p:spPr>
+        <p:txBody>
+          <a:bodyPr wrap="square" lIns="0" rIns="0" tIns="0" bIns="0" anchor="ctr">
+            <a:spAutoFit/>
+          </a:bodyPr>
+          <a:lstStyle/>
+          <a:p>
+            <a:pPr algn="ctr"/>
+            <a:r>
+              <a:rPr sz="400" b="0" i="0">
+                <a:solidFill>
+                  <a:srgbClr val="0A7D6E"/>
+                </a:solidFill>
+                <a:latin typeface="Arial"/>
+              </a:rPr>
+              <a:t>25</a:t>
+            </a:r>
+          </a:p>
+        </p:txBody>
+      </p:sp>
+      <p:sp>
+        <p:nvSpPr>
+          <p:cNvPr id="57" name="Rectangle 56"/>
+          <p:cNvSpPr/>
+          <p:nvPr/>
+        </p:nvSpPr>
+        <p:spPr>
+          <a:xfrm>
+            <a:off x="2367355" y="2077451"/>
+            <a:ext cx="98546" cy="1397269"/>
+          </a:xfrm>
+          <a:prstGeom prst="rect">
+            <a:avLst/>
+          </a:prstGeom>
+          <a:solidFill>
+            <a:srgbClr val="C53E1F"/>
+          </a:solidFill>
+          <a:ln w="2540">
+            <a:solidFill>
+              <a:srgbClr val="FFFFFF"/>
+            </a:solidFill>
+          </a:ln>
+          <a:effectLst/>
+        </p:spPr>
+        <p:style>
+          <a:lnRef idx="1">
+            <a:schemeClr val="accent1"/>
+          </a:lnRef>
+          <a:fillRef idx="3">
+            <a:schemeClr val="accent1"/>
+          </a:fillRef>
+          <a:effectRef idx="2">
+            <a:schemeClr val="accent1"/>
+          </a:effectRef>
+          <a:fontRef idx="minor">
+            <a:schemeClr val="lt1"/>
+          </a:fontRef>
+        </p:style>
+        <p:txBody>
+          <a:bodyPr rtlCol="0" anchor="ctr"/>
+          <a:lstStyle/>
+          <a:p>
+            <a:pPr algn="ctr"/>
+          </a:p>
+        </p:txBody>
+      </p:sp>
+      <p:sp>
+        <p:nvSpPr>
+          <p:cNvPr id="58" name="TextBox 57"/>
+          <p:cNvSpPr txBox="1"/>
+          <p:nvPr/>
+        </p:nvSpPr>
+        <p:spPr>
+          <a:xfrm>
+            <a:off x="2306900" y="3493008"/>
+            <a:ext cx="219456" cy="109728"/>
+          </a:xfrm>
+          <a:prstGeom prst="rect">
+            <a:avLst/>
+          </a:prstGeom>
+          <a:noFill/>
+          <a:effectLst/>
+        </p:spPr>
+        <p:txBody>
+          <a:bodyPr wrap="square" lIns="0" rIns="0" tIns="0" bIns="0" anchor="ctr">
+            <a:spAutoFit/>
+          </a:bodyPr>
+          <a:lstStyle/>
+          <a:p>
+            <a:pPr algn="ctr"/>
+            <a:r>
+              <a:rPr sz="400" b="0" i="0">
+                <a:solidFill>
+                  <a:srgbClr val="C53E1F"/>
+                </a:solidFill>
+                <a:latin typeface="Arial"/>
+              </a:rPr>
+              <a:t>32</a:t>
+            </a:r>
+          </a:p>
+        </p:txBody>
+      </p:sp>
+      <p:sp>
+        <p:nvSpPr>
+          <p:cNvPr id="59" name="Rectangle 58"/>
+          <p:cNvSpPr/>
+          <p:nvPr/>
+        </p:nvSpPr>
+        <p:spPr>
+          <a:xfrm>
+            <a:off x="2487533" y="1959619"/>
+            <a:ext cx="98546" cy="1515101"/>
+          </a:xfrm>
+          <a:prstGeom prst="rect">
+            <a:avLst/>
+          </a:prstGeom>
+          <a:solidFill>
+            <a:srgbClr val="C53E1F"/>
+          </a:solidFill>
+          <a:ln w="2540">
+            <a:solidFill>
+              <a:srgbClr val="FFFFFF"/>
+            </a:solidFill>
+          </a:ln>
+          <a:effectLst/>
+        </p:spPr>
+        <p:style>
+          <a:lnRef idx="1">
+            <a:schemeClr val="accent1"/>
+          </a:lnRef>
+          <a:fillRef idx="3">
+            <a:schemeClr val="accent1"/>
+          </a:fillRef>
+          <a:effectRef idx="2">
+            <a:schemeClr val="accent1"/>
+          </a:effectRef>
+          <a:fontRef idx="minor">
+            <a:schemeClr val="lt1"/>
+          </a:fontRef>
+        </p:style>
+        <p:txBody>
+          <a:bodyPr rtlCol="0" anchor="ctr"/>
+          <a:lstStyle/>
+          <a:p>
+            <a:pPr algn="ctr"/>
+          </a:p>
+        </p:txBody>
+      </p:sp>
+      <p:sp>
+        <p:nvSpPr>
+          <p:cNvPr id="60" name="Rectangle 59"/>
+          <p:cNvSpPr/>
+          <p:nvPr/>
+        </p:nvSpPr>
+        <p:spPr>
+          <a:xfrm>
+            <a:off x="2487533" y="1959619"/>
+            <a:ext cx="98546" cy="1515101"/>
+          </a:xfrm>
+          <a:prstGeom prst="rect">
+            <a:avLst/>
+          </a:prstGeom>
+          <a:noFill/>
+          <a:ln w="16510">
+            <a:solidFill>
+              <a:srgbClr val="D4A300"/>
+            </a:solidFill>
+          </a:ln>
+          <a:effectLst/>
+        </p:spPr>
+        <p:style>
+          <a:lnRef idx="1">
+            <a:schemeClr val="accent1"/>
+          </a:lnRef>
+          <a:fillRef idx="3">
+            <a:schemeClr val="accent1"/>
+          </a:fillRef>
+          <a:effectRef idx="2">
+            <a:schemeClr val="accent1"/>
+          </a:effectRef>
+          <a:fontRef idx="minor">
+            <a:schemeClr val="lt1"/>
+          </a:fontRef>
+        </p:style>
+        <p:txBody>
+          <a:bodyPr rtlCol="0" anchor="ctr"/>
+          <a:lstStyle/>
+          <a:p>
+            <a:pPr algn="ctr"/>
+          </a:p>
+        </p:txBody>
+      </p:sp>
+      <p:sp>
+        <p:nvSpPr>
+          <p:cNvPr id="61" name="TextBox 60"/>
+          <p:cNvSpPr txBox="1"/>
+          <p:nvPr/>
+        </p:nvSpPr>
+        <p:spPr>
+          <a:xfrm>
+            <a:off x="2463654" y="1813315"/>
+            <a:ext cx="146304" cy="128016"/>
+          </a:xfrm>
+          <a:prstGeom prst="rect">
+            <a:avLst/>
+          </a:prstGeom>
+          <a:noFill/>
+          <a:effectLst/>
+        </p:spPr>
+        <p:txBody>
+          <a:bodyPr wrap="square" lIns="0" rIns="0" tIns="0" bIns="0" anchor="ctr">
+            <a:spAutoFit/>
+          </a:bodyPr>
+          <a:lstStyle/>
+          <a:p>
+            <a:pPr algn="ctr"/>
+            <a:r>
+              <a:rPr sz="1000" b="1" i="0">
+                <a:solidFill>
+                  <a:srgbClr val="D4A300"/>
+                </a:solidFill>
+                <a:latin typeface="Arial"/>
+              </a:rPr>
+              <a:t>✗</a:t>
+            </a:r>
+          </a:p>
+        </p:txBody>
+      </p:sp>
+      <p:sp>
+        <p:nvSpPr>
+          <p:cNvPr id="62" name="TextBox 61"/>
+          <p:cNvSpPr txBox="1"/>
+          <p:nvPr/>
+        </p:nvSpPr>
+        <p:spPr>
+          <a:xfrm>
+            <a:off x="2427078" y="3493008"/>
+            <a:ext cx="219456" cy="109728"/>
+          </a:xfrm>
+          <a:prstGeom prst="rect">
+            <a:avLst/>
+          </a:prstGeom>
+          <a:noFill/>
+          <a:effectLst/>
+        </p:spPr>
+        <p:txBody>
+          <a:bodyPr wrap="square" lIns="0" rIns="0" tIns="0" bIns="0" anchor="ctr">
+            <a:spAutoFit/>
+          </a:bodyPr>
+          <a:lstStyle/>
+          <a:p>
+            <a:pPr algn="ctr"/>
+            <a:r>
+              <a:rPr sz="400" b="0" i="0">
+                <a:solidFill>
+                  <a:srgbClr val="C53E1F"/>
+                </a:solidFill>
+                <a:latin typeface="Arial"/>
+              </a:rPr>
+              <a:t>10</a:t>
+            </a:r>
+          </a:p>
+        </p:txBody>
+      </p:sp>
+      <p:sp>
+        <p:nvSpPr>
+          <p:cNvPr id="63" name="Rectangle 62"/>
+          <p:cNvSpPr/>
+          <p:nvPr/>
+        </p:nvSpPr>
+        <p:spPr>
+          <a:xfrm>
+            <a:off x="2607712" y="1942548"/>
+            <a:ext cx="98546" cy="1532172"/>
+          </a:xfrm>
+          <a:prstGeom prst="rect">
+            <a:avLst/>
+          </a:prstGeom>
+          <a:solidFill>
+            <a:srgbClr val="C53E1F"/>
+          </a:solidFill>
+          <a:ln w="2540">
+            <a:solidFill>
+              <a:srgbClr val="FFFFFF"/>
+            </a:solidFill>
+          </a:ln>
+          <a:effectLst/>
+        </p:spPr>
+        <p:style>
+          <a:lnRef idx="1">
+            <a:schemeClr val="accent1"/>
+          </a:lnRef>
+          <a:fillRef idx="3">
+            <a:schemeClr val="accent1"/>
+          </a:fillRef>
+          <a:effectRef idx="2">
+            <a:schemeClr val="accent1"/>
+          </a:effectRef>
+          <a:fontRef idx="minor">
+            <a:schemeClr val="lt1"/>
+          </a:fontRef>
+        </p:style>
+        <p:txBody>
+          <a:bodyPr rtlCol="0" anchor="ctr"/>
+          <a:lstStyle/>
+          <a:p>
+            <a:pPr algn="ctr"/>
+          </a:p>
+        </p:txBody>
+      </p:sp>
+      <p:sp>
+        <p:nvSpPr>
+          <p:cNvPr id="64" name="Rectangle 63"/>
+          <p:cNvSpPr/>
+          <p:nvPr/>
+        </p:nvSpPr>
+        <p:spPr>
+          <a:xfrm>
+            <a:off x="2607712" y="1942548"/>
+            <a:ext cx="98546" cy="1532172"/>
+          </a:xfrm>
+          <a:prstGeom prst="rect">
+            <a:avLst/>
+          </a:prstGeom>
+          <a:noFill/>
+          <a:ln w="16510">
+            <a:solidFill>
+              <a:srgbClr val="D4A300"/>
+            </a:solidFill>
+          </a:ln>
+          <a:effectLst/>
+        </p:spPr>
+        <p:style>
+          <a:lnRef idx="1">
+            <a:schemeClr val="accent1"/>
+          </a:lnRef>
+          <a:fillRef idx="3">
+            <a:schemeClr val="accent1"/>
+          </a:fillRef>
+          <a:effectRef idx="2">
+            <a:schemeClr val="accent1"/>
+          </a:effectRef>
+          <a:fontRef idx="minor">
+            <a:schemeClr val="lt1"/>
+          </a:fontRef>
+        </p:style>
+        <p:txBody>
+          <a:bodyPr rtlCol="0" anchor="ctr"/>
+          <a:lstStyle/>
+          <a:p>
+            <a:pPr algn="ctr"/>
+          </a:p>
+        </p:txBody>
+      </p:sp>
+      <p:sp>
+        <p:nvSpPr>
+          <p:cNvPr id="65" name="TextBox 64"/>
+          <p:cNvSpPr txBox="1"/>
+          <p:nvPr/>
+        </p:nvSpPr>
+        <p:spPr>
+          <a:xfrm>
+            <a:off x="2583833" y="1796244"/>
+            <a:ext cx="146304" cy="128016"/>
+          </a:xfrm>
+          <a:prstGeom prst="rect">
+            <a:avLst/>
+          </a:prstGeom>
+          <a:noFill/>
+          <a:effectLst/>
+        </p:spPr>
+        <p:txBody>
+          <a:bodyPr wrap="square" lIns="0" rIns="0" tIns="0" bIns="0" anchor="ctr">
+            <a:spAutoFit/>
+          </a:bodyPr>
+          <a:lstStyle/>
+          <a:p>
+            <a:pPr algn="ctr"/>
+            <a:r>
+              <a:rPr sz="1000" b="1" i="0">
+                <a:solidFill>
+                  <a:srgbClr val="D4A300"/>
+                </a:solidFill>
+                <a:latin typeface="Arial"/>
+              </a:rPr>
+              <a:t>✗</a:t>
+            </a:r>
+          </a:p>
+        </p:txBody>
+      </p:sp>
+      <p:sp>
+        <p:nvSpPr>
+          <p:cNvPr id="66" name="TextBox 65"/>
+          <p:cNvSpPr txBox="1"/>
+          <p:nvPr/>
+        </p:nvSpPr>
+        <p:spPr>
+          <a:xfrm>
+            <a:off x="2547257" y="3493008"/>
+            <a:ext cx="219456" cy="109728"/>
+          </a:xfrm>
+          <a:prstGeom prst="rect">
+            <a:avLst/>
+          </a:prstGeom>
+          <a:noFill/>
+          <a:effectLst/>
+        </p:spPr>
+        <p:txBody>
+          <a:bodyPr wrap="square" lIns="0" rIns="0" tIns="0" bIns="0" anchor="ctr">
+            <a:spAutoFit/>
+          </a:bodyPr>
+          <a:lstStyle/>
+          <a:p>
+            <a:pPr algn="ctr"/>
+            <a:r>
+              <a:rPr sz="400" b="0" i="0">
+                <a:solidFill>
+                  <a:srgbClr val="C53E1F"/>
+                </a:solidFill>
+                <a:latin typeface="Arial"/>
+              </a:rPr>
+              <a:t>1</a:t>
+            </a:r>
+          </a:p>
+        </p:txBody>
+      </p:sp>
+      <p:sp>
+        <p:nvSpPr>
+          <p:cNvPr id="67" name="Rectangle 66"/>
+          <p:cNvSpPr/>
+          <p:nvPr/>
+        </p:nvSpPr>
+        <p:spPr>
+          <a:xfrm>
+            <a:off x="2727890" y="1924828"/>
+            <a:ext cx="98546" cy="1549892"/>
+          </a:xfrm>
+          <a:prstGeom prst="rect">
+            <a:avLst/>
+          </a:prstGeom>
+          <a:solidFill>
+            <a:srgbClr val="C53E1F"/>
+          </a:solidFill>
+          <a:ln w="2540">
+            <a:solidFill>
+              <a:srgbClr val="FFFFFF"/>
+            </a:solidFill>
+          </a:ln>
+          <a:effectLst/>
+        </p:spPr>
+        <p:style>
+          <a:lnRef idx="1">
+            <a:schemeClr val="accent1"/>
+          </a:lnRef>
+          <a:fillRef idx="3">
+            <a:schemeClr val="accent1"/>
+          </a:fillRef>
+          <a:effectRef idx="2">
+            <a:schemeClr val="accent1"/>
+          </a:effectRef>
+          <a:fontRef idx="minor">
+            <a:schemeClr val="lt1"/>
+          </a:fontRef>
+        </p:style>
+        <p:txBody>
+          <a:bodyPr rtlCol="0" anchor="ctr"/>
+          <a:lstStyle/>
+          <a:p>
+            <a:pPr algn="ctr"/>
+          </a:p>
+        </p:txBody>
+      </p:sp>
+      <p:sp>
+        <p:nvSpPr>
+          <p:cNvPr id="68" name="Rectangle 67"/>
+          <p:cNvSpPr/>
+          <p:nvPr/>
+        </p:nvSpPr>
+        <p:spPr>
+          <a:xfrm>
+            <a:off x="2727890" y="1924828"/>
+            <a:ext cx="98546" cy="1549892"/>
+          </a:xfrm>
+          <a:prstGeom prst="rect">
+            <a:avLst/>
+          </a:prstGeom>
+          <a:noFill/>
+          <a:ln w="16510">
+            <a:solidFill>
+              <a:srgbClr val="D4A300"/>
+            </a:solidFill>
+          </a:ln>
+          <a:effectLst/>
+        </p:spPr>
+        <p:style>
+          <a:lnRef idx="1">
+            <a:schemeClr val="accent1"/>
+          </a:lnRef>
+          <a:fillRef idx="3">
+            <a:schemeClr val="accent1"/>
+          </a:fillRef>
+          <a:effectRef idx="2">
+            <a:schemeClr val="accent1"/>
+          </a:effectRef>
+          <a:fontRef idx="minor">
+            <a:schemeClr val="lt1"/>
+          </a:fontRef>
+        </p:style>
+        <p:txBody>
+          <a:bodyPr rtlCol="0" anchor="ctr"/>
+          <a:lstStyle/>
+          <a:p>
+            <a:pPr algn="ctr"/>
+          </a:p>
+        </p:txBody>
+      </p:sp>
+      <p:sp>
+        <p:nvSpPr>
+          <p:cNvPr id="69" name="TextBox 68"/>
+          <p:cNvSpPr txBox="1"/>
+          <p:nvPr/>
+        </p:nvSpPr>
+        <p:spPr>
+          <a:xfrm>
+            <a:off x="2704011" y="1778524"/>
+            <a:ext cx="146304" cy="128016"/>
+          </a:xfrm>
+          <a:prstGeom prst="rect">
+            <a:avLst/>
+          </a:prstGeom>
+          <a:noFill/>
+          <a:effectLst/>
+        </p:spPr>
+        <p:txBody>
+          <a:bodyPr wrap="square" lIns="0" rIns="0" tIns="0" bIns="0" anchor="ctr">
+            <a:spAutoFit/>
+          </a:bodyPr>
+          <a:lstStyle/>
+          <a:p>
+            <a:pPr algn="ctr"/>
+            <a:r>
+              <a:rPr sz="1000" b="1" i="0">
+                <a:solidFill>
+                  <a:srgbClr val="D4A300"/>
+                </a:solidFill>
+                <a:latin typeface="Arial"/>
+              </a:rPr>
+              <a:t>✗</a:t>
+            </a:r>
+          </a:p>
+        </p:txBody>
+      </p:sp>
+      <p:sp>
+        <p:nvSpPr>
+          <p:cNvPr id="70" name="TextBox 69"/>
+          <p:cNvSpPr txBox="1"/>
+          <p:nvPr/>
+        </p:nvSpPr>
+        <p:spPr>
+          <a:xfrm>
+            <a:off x="2667435" y="3493008"/>
+            <a:ext cx="219456" cy="109728"/>
+          </a:xfrm>
+          <a:prstGeom prst="rect">
+            <a:avLst/>
+          </a:prstGeom>
+          <a:noFill/>
+          <a:effectLst/>
+        </p:spPr>
+        <p:txBody>
+          <a:bodyPr wrap="square" lIns="0" rIns="0" tIns="0" bIns="0" anchor="ctr">
+            <a:spAutoFit/>
+          </a:bodyPr>
+          <a:lstStyle/>
+          <a:p>
+            <a:pPr algn="ctr"/>
+            <a:r>
+              <a:rPr sz="400" b="0" i="0">
+                <a:solidFill>
+                  <a:srgbClr val="C53E1F"/>
+                </a:solidFill>
+                <a:latin typeface="Arial"/>
+              </a:rPr>
+              <a:t>12</a:t>
+            </a:r>
+          </a:p>
+        </p:txBody>
+      </p:sp>
+      <p:sp>
+        <p:nvSpPr>
+          <p:cNvPr id="71" name="Rectangle 70"/>
+          <p:cNvSpPr/>
+          <p:nvPr/>
+        </p:nvSpPr>
+        <p:spPr>
+          <a:xfrm>
+            <a:off x="2848068" y="1904546"/>
+            <a:ext cx="98546" cy="1570174"/>
+          </a:xfrm>
+          <a:prstGeom prst="rect">
+            <a:avLst/>
+          </a:prstGeom>
+          <a:solidFill>
+            <a:srgbClr val="0A7D6E"/>
+          </a:solidFill>
+          <a:ln w="2540">
+            <a:solidFill>
+              <a:srgbClr val="FFFFFF"/>
+            </a:solidFill>
+          </a:ln>
+          <a:effectLst/>
+        </p:spPr>
+        <p:style>
+          <a:lnRef idx="1">
+            <a:schemeClr val="accent1"/>
+          </a:lnRef>
+          <a:fillRef idx="3">
+            <a:schemeClr val="accent1"/>
+          </a:fillRef>
+          <a:effectRef idx="2">
+            <a:schemeClr val="accent1"/>
+          </a:effectRef>
+          <a:fontRef idx="minor">
+            <a:schemeClr val="lt1"/>
+          </a:fontRef>
+        </p:style>
+        <p:txBody>
+          <a:bodyPr rtlCol="0" anchor="ctr"/>
+          <a:lstStyle/>
+          <a:p>
+            <a:pPr algn="ctr"/>
+          </a:p>
+        </p:txBody>
+      </p:sp>
+      <p:sp>
+        <p:nvSpPr>
+          <p:cNvPr id="72" name="TextBox 71"/>
+          <p:cNvSpPr txBox="1"/>
+          <p:nvPr/>
+        </p:nvSpPr>
+        <p:spPr>
+          <a:xfrm>
+            <a:off x="2787613" y="3493008"/>
+            <a:ext cx="219456" cy="109728"/>
+          </a:xfrm>
+          <a:prstGeom prst="rect">
+            <a:avLst/>
+          </a:prstGeom>
+          <a:noFill/>
+          <a:effectLst/>
+        </p:spPr>
+        <p:txBody>
+          <a:bodyPr wrap="square" lIns="0" rIns="0" tIns="0" bIns="0" anchor="ctr">
+            <a:spAutoFit/>
+          </a:bodyPr>
+          <a:lstStyle/>
+          <a:p>
+            <a:pPr algn="ctr"/>
+            <a:r>
+              <a:rPr sz="400" b="0" i="0">
+                <a:solidFill>
+                  <a:srgbClr val="0A7D6E"/>
+                </a:solidFill>
+                <a:latin typeface="Arial"/>
+              </a:rPr>
+              <a:t>28</a:t>
+            </a:r>
+          </a:p>
+        </p:txBody>
+      </p:sp>
+      <p:sp>
+        <p:nvSpPr>
+          <p:cNvPr id="73" name="Rectangle 72"/>
+          <p:cNvSpPr/>
+          <p:nvPr/>
+        </p:nvSpPr>
+        <p:spPr>
+          <a:xfrm>
+            <a:off x="2968247" y="1870041"/>
+            <a:ext cx="98546" cy="1604679"/>
+          </a:xfrm>
+          <a:prstGeom prst="rect">
+            <a:avLst/>
+          </a:prstGeom>
+          <a:solidFill>
+            <a:srgbClr val="C53E1F"/>
+          </a:solidFill>
+          <a:ln w="2540">
+            <a:solidFill>
+              <a:srgbClr val="FFFFFF"/>
+            </a:solidFill>
+          </a:ln>
+          <a:effectLst/>
+        </p:spPr>
+        <p:style>
+          <a:lnRef idx="1">
+            <a:schemeClr val="accent1"/>
+          </a:lnRef>
+          <a:fillRef idx="3">
+            <a:schemeClr val="accent1"/>
+          </a:fillRef>
+          <a:effectRef idx="2">
+            <a:schemeClr val="accent1"/>
+          </a:effectRef>
+          <a:fontRef idx="minor">
+            <a:schemeClr val="lt1"/>
+          </a:fontRef>
+        </p:style>
+        <p:txBody>
+          <a:bodyPr rtlCol="0" anchor="ctr"/>
+          <a:lstStyle/>
+          <a:p>
+            <a:pPr algn="ctr"/>
+          </a:p>
+        </p:txBody>
+      </p:sp>
+      <p:sp>
+        <p:nvSpPr>
+          <p:cNvPr id="74" name="Rectangle 73"/>
+          <p:cNvSpPr/>
+          <p:nvPr/>
+        </p:nvSpPr>
+        <p:spPr>
+          <a:xfrm>
+            <a:off x="2968247" y="1870041"/>
+            <a:ext cx="98546" cy="1604679"/>
+          </a:xfrm>
+          <a:prstGeom prst="rect">
+            <a:avLst/>
+          </a:prstGeom>
+          <a:noFill/>
+          <a:ln w="16510">
+            <a:solidFill>
+              <a:srgbClr val="D4A300"/>
+            </a:solidFill>
+          </a:ln>
+          <a:effectLst/>
+        </p:spPr>
+        <p:style>
+          <a:lnRef idx="1">
+            <a:schemeClr val="accent1"/>
+          </a:lnRef>
+          <a:fillRef idx="3">
+            <a:schemeClr val="accent1"/>
+          </a:fillRef>
+          <a:effectRef idx="2">
+            <a:schemeClr val="accent1"/>
+          </a:effectRef>
+          <a:fontRef idx="minor">
+            <a:schemeClr val="lt1"/>
+          </a:fontRef>
+        </p:style>
+        <p:txBody>
+          <a:bodyPr rtlCol="0" anchor="ctr"/>
+          <a:lstStyle/>
+          <a:p>
+            <a:pPr algn="ctr"/>
+          </a:p>
+        </p:txBody>
+      </p:sp>
+      <p:sp>
+        <p:nvSpPr>
+          <p:cNvPr id="75" name="TextBox 74"/>
+          <p:cNvSpPr txBox="1"/>
+          <p:nvPr/>
+        </p:nvSpPr>
+        <p:spPr>
+          <a:xfrm>
+            <a:off x="2944368" y="1723737"/>
+            <a:ext cx="146304" cy="128016"/>
+          </a:xfrm>
+          <a:prstGeom prst="rect">
+            <a:avLst/>
+          </a:prstGeom>
+          <a:noFill/>
+          <a:effectLst/>
+        </p:spPr>
+        <p:txBody>
+          <a:bodyPr wrap="square" lIns="0" rIns="0" tIns="0" bIns="0" anchor="ctr">
+            <a:spAutoFit/>
+          </a:bodyPr>
+          <a:lstStyle/>
+          <a:p>
+            <a:pPr algn="ctr"/>
+            <a:r>
+              <a:rPr sz="1000" b="1" i="0">
+                <a:solidFill>
+                  <a:srgbClr val="D4A300"/>
+                </a:solidFill>
+                <a:latin typeface="Arial"/>
+              </a:rPr>
+              <a:t>✗</a:t>
+            </a:r>
+          </a:p>
+        </p:txBody>
+      </p:sp>
+      <p:sp>
+        <p:nvSpPr>
+          <p:cNvPr id="76" name="TextBox 75"/>
+          <p:cNvSpPr txBox="1"/>
+          <p:nvPr/>
+        </p:nvSpPr>
+        <p:spPr>
+          <a:xfrm>
+            <a:off x="2907792" y="3493008"/>
+            <a:ext cx="219456" cy="109728"/>
+          </a:xfrm>
+          <a:prstGeom prst="rect">
+            <a:avLst/>
+          </a:prstGeom>
+          <a:noFill/>
+          <a:effectLst/>
+        </p:spPr>
+        <p:txBody>
+          <a:bodyPr wrap="square" lIns="0" rIns="0" tIns="0" bIns="0" anchor="ctr">
+            <a:spAutoFit/>
+          </a:bodyPr>
+          <a:lstStyle/>
+          <a:p>
+            <a:pPr algn="ctr"/>
+            <a:r>
+              <a:rPr sz="400" b="0" i="0">
+                <a:solidFill>
+                  <a:srgbClr val="C53E1F"/>
+                </a:solidFill>
+                <a:latin typeface="Arial"/>
+              </a:rPr>
+              <a:t>33</a:t>
+            </a:r>
+          </a:p>
+        </p:txBody>
+      </p:sp>
+      <p:sp>
+        <p:nvSpPr>
+          <p:cNvPr id="77" name="Rectangle 76"/>
+          <p:cNvSpPr/>
+          <p:nvPr/>
+        </p:nvSpPr>
+        <p:spPr>
+          <a:xfrm>
+            <a:off x="3088425" y="1849532"/>
+            <a:ext cx="98546" cy="1625188"/>
+          </a:xfrm>
+          <a:prstGeom prst="rect">
+            <a:avLst/>
+          </a:prstGeom>
+          <a:solidFill>
+            <a:srgbClr val="C53E1F"/>
+          </a:solidFill>
+          <a:ln w="2540">
+            <a:solidFill>
+              <a:srgbClr val="FFFFFF"/>
+            </a:solidFill>
+          </a:ln>
+          <a:effectLst/>
+        </p:spPr>
+        <p:style>
+          <a:lnRef idx="1">
+            <a:schemeClr val="accent1"/>
+          </a:lnRef>
+          <a:fillRef idx="3">
+            <a:schemeClr val="accent1"/>
+          </a:fillRef>
+          <a:effectRef idx="2">
+            <a:schemeClr val="accent1"/>
+          </a:effectRef>
+          <a:fontRef idx="minor">
+            <a:schemeClr val="lt1"/>
+          </a:fontRef>
+        </p:style>
+        <p:txBody>
+          <a:bodyPr rtlCol="0" anchor="ctr"/>
+          <a:lstStyle/>
+          <a:p>
+            <a:pPr algn="ctr"/>
+          </a:p>
+        </p:txBody>
+      </p:sp>
+      <p:sp>
+        <p:nvSpPr>
+          <p:cNvPr id="78" name="Rectangle 77"/>
+          <p:cNvSpPr/>
+          <p:nvPr/>
+        </p:nvSpPr>
+        <p:spPr>
+          <a:xfrm>
+            <a:off x="3088425" y="1849532"/>
+            <a:ext cx="98546" cy="1625188"/>
+          </a:xfrm>
+          <a:prstGeom prst="rect">
+            <a:avLst/>
+          </a:prstGeom>
+          <a:noFill/>
+          <a:ln w="16510">
+            <a:solidFill>
+              <a:srgbClr val="D4A300"/>
+            </a:solidFill>
+          </a:ln>
+          <a:effectLst/>
+        </p:spPr>
+        <p:style>
+          <a:lnRef idx="1">
+            <a:schemeClr val="accent1"/>
+          </a:lnRef>
+          <a:fillRef idx="3">
+            <a:schemeClr val="accent1"/>
+          </a:fillRef>
+          <a:effectRef idx="2">
+            <a:schemeClr val="accent1"/>
+          </a:effectRef>
+          <a:fontRef idx="minor">
+            <a:schemeClr val="lt1"/>
+          </a:fontRef>
+        </p:style>
+        <p:txBody>
+          <a:bodyPr rtlCol="0" anchor="ctr"/>
+          <a:lstStyle/>
+          <a:p>
+            <a:pPr algn="ctr"/>
+          </a:p>
+        </p:txBody>
+      </p:sp>
+      <p:sp>
+        <p:nvSpPr>
+          <p:cNvPr id="79" name="TextBox 78"/>
+          <p:cNvSpPr txBox="1"/>
+          <p:nvPr/>
+        </p:nvSpPr>
+        <p:spPr>
+          <a:xfrm>
+            <a:off x="3064546" y="1703228"/>
+            <a:ext cx="146304" cy="128016"/>
+          </a:xfrm>
+          <a:prstGeom prst="rect">
+            <a:avLst/>
+          </a:prstGeom>
+          <a:noFill/>
+          <a:effectLst/>
+        </p:spPr>
+        <p:txBody>
+          <a:bodyPr wrap="square" lIns="0" rIns="0" tIns="0" bIns="0" anchor="ctr">
+            <a:spAutoFit/>
+          </a:bodyPr>
+          <a:lstStyle/>
+          <a:p>
+            <a:pPr algn="ctr"/>
+            <a:r>
+              <a:rPr sz="1000" b="1" i="0">
+                <a:solidFill>
+                  <a:srgbClr val="D4A300"/>
+                </a:solidFill>
+                <a:latin typeface="Arial"/>
+              </a:rPr>
+              <a:t>✗</a:t>
+            </a:r>
+          </a:p>
+        </p:txBody>
+      </p:sp>
+      <p:sp>
+        <p:nvSpPr>
+          <p:cNvPr id="80" name="TextBox 79"/>
+          <p:cNvSpPr txBox="1"/>
+          <p:nvPr/>
+        </p:nvSpPr>
+        <p:spPr>
+          <a:xfrm>
+            <a:off x="3027970" y="3493008"/>
+            <a:ext cx="219456" cy="109728"/>
+          </a:xfrm>
+          <a:prstGeom prst="rect">
+            <a:avLst/>
+          </a:prstGeom>
+          <a:noFill/>
+          <a:effectLst/>
+        </p:spPr>
+        <p:txBody>
+          <a:bodyPr wrap="square" lIns="0" rIns="0" tIns="0" bIns="0" anchor="ctr">
+            <a:spAutoFit/>
+          </a:bodyPr>
+          <a:lstStyle/>
+          <a:p>
+            <a:pPr algn="ctr"/>
+            <a:r>
+              <a:rPr sz="400" b="0" i="0">
+                <a:solidFill>
+                  <a:srgbClr val="C53E1F"/>
+                </a:solidFill>
+                <a:latin typeface="Arial"/>
+              </a:rPr>
+              <a:t>5</a:t>
+            </a:r>
+          </a:p>
+        </p:txBody>
+      </p:sp>
+      <p:sp>
+        <p:nvSpPr>
+          <p:cNvPr id="81" name="Rectangle 80"/>
+          <p:cNvSpPr/>
+          <p:nvPr/>
+        </p:nvSpPr>
+        <p:spPr>
+          <a:xfrm>
+            <a:off x="3208603" y="1848709"/>
+            <a:ext cx="98546" cy="1626011"/>
+          </a:xfrm>
+          <a:prstGeom prst="rect">
+            <a:avLst/>
+          </a:prstGeom>
+          <a:solidFill>
+            <a:srgbClr val="0A7D6E"/>
+          </a:solidFill>
+          <a:ln w="2540">
+            <a:solidFill>
+              <a:srgbClr val="FFFFFF"/>
+            </a:solidFill>
+          </a:ln>
+          <a:effectLst/>
+        </p:spPr>
+        <p:style>
+          <a:lnRef idx="1">
+            <a:schemeClr val="accent1"/>
+          </a:lnRef>
+          <a:fillRef idx="3">
+            <a:schemeClr val="accent1"/>
+          </a:fillRef>
+          <a:effectRef idx="2">
+            <a:schemeClr val="accent1"/>
+          </a:effectRef>
+          <a:fontRef idx="minor">
+            <a:schemeClr val="lt1"/>
+          </a:fontRef>
+        </p:style>
+        <p:txBody>
+          <a:bodyPr rtlCol="0" anchor="ctr"/>
+          <a:lstStyle/>
+          <a:p>
+            <a:pPr algn="ctr"/>
+          </a:p>
+        </p:txBody>
+      </p:sp>
+      <p:sp>
+        <p:nvSpPr>
+          <p:cNvPr id="82" name="TextBox 81"/>
+          <p:cNvSpPr txBox="1"/>
+          <p:nvPr/>
+        </p:nvSpPr>
+        <p:spPr>
+          <a:xfrm>
+            <a:off x="3148148" y="3493008"/>
+            <a:ext cx="219456" cy="109728"/>
+          </a:xfrm>
+          <a:prstGeom prst="rect">
+            <a:avLst/>
+          </a:prstGeom>
+          <a:noFill/>
+          <a:effectLst/>
+        </p:spPr>
+        <p:txBody>
+          <a:bodyPr wrap="square" lIns="0" rIns="0" tIns="0" bIns="0" anchor="ctr">
+            <a:spAutoFit/>
+          </a:bodyPr>
+          <a:lstStyle/>
+          <a:p>
+            <a:pPr algn="ctr"/>
+            <a:r>
+              <a:rPr sz="400" b="0" i="0">
+                <a:solidFill>
+                  <a:srgbClr val="0A7D6E"/>
+                </a:solidFill>
+                <a:latin typeface="Arial"/>
+              </a:rPr>
+              <a:t>30</a:t>
+            </a:r>
+          </a:p>
+        </p:txBody>
+      </p:sp>
+      <p:sp>
+        <p:nvSpPr>
+          <p:cNvPr id="83" name="Rectangle 82"/>
+          <p:cNvSpPr/>
+          <p:nvPr/>
+        </p:nvSpPr>
+        <p:spPr>
+          <a:xfrm>
+            <a:off x="3328781" y="1745079"/>
+            <a:ext cx="98546" cy="1729641"/>
+          </a:xfrm>
+          <a:prstGeom prst="rect">
+            <a:avLst/>
+          </a:prstGeom>
+          <a:solidFill>
+            <a:srgbClr val="C53E1F"/>
+          </a:solidFill>
+          <a:ln w="2540">
+            <a:solidFill>
+              <a:srgbClr val="FFFFFF"/>
+            </a:solidFill>
+          </a:ln>
+          <a:effectLst/>
+        </p:spPr>
+        <p:style>
+          <a:lnRef idx="1">
+            <a:schemeClr val="accent1"/>
+          </a:lnRef>
+          <a:fillRef idx="3">
+            <a:schemeClr val="accent1"/>
+          </a:fillRef>
+          <a:effectRef idx="2">
+            <a:schemeClr val="accent1"/>
+          </a:effectRef>
+          <a:fontRef idx="minor">
+            <a:schemeClr val="lt1"/>
+          </a:fontRef>
+        </p:style>
+        <p:txBody>
+          <a:bodyPr rtlCol="0" anchor="ctr"/>
+          <a:lstStyle/>
+          <a:p>
+            <a:pPr algn="ctr"/>
+          </a:p>
+        </p:txBody>
+      </p:sp>
+      <p:sp>
+        <p:nvSpPr>
+          <p:cNvPr id="84" name="Rectangle 83"/>
+          <p:cNvSpPr/>
+          <p:nvPr/>
+        </p:nvSpPr>
+        <p:spPr>
+          <a:xfrm>
+            <a:off x="3328781" y="1745079"/>
+            <a:ext cx="98546" cy="1729641"/>
+          </a:xfrm>
+          <a:prstGeom prst="rect">
+            <a:avLst/>
+          </a:prstGeom>
+          <a:noFill/>
+          <a:ln w="16510">
+            <a:solidFill>
+              <a:srgbClr val="D4A300"/>
+            </a:solidFill>
+          </a:ln>
+          <a:effectLst/>
+        </p:spPr>
+        <p:style>
+          <a:lnRef idx="1">
+            <a:schemeClr val="accent1"/>
+          </a:lnRef>
+          <a:fillRef idx="3">
+            <a:schemeClr val="accent1"/>
+          </a:fillRef>
+          <a:effectRef idx="2">
+            <a:schemeClr val="accent1"/>
+          </a:effectRef>
+          <a:fontRef idx="minor">
+            <a:schemeClr val="lt1"/>
+          </a:fontRef>
+        </p:style>
+        <p:txBody>
+          <a:bodyPr rtlCol="0" anchor="ctr"/>
+          <a:lstStyle/>
+          <a:p>
+            <a:pPr algn="ctr"/>
+          </a:p>
+        </p:txBody>
+      </p:sp>
+      <p:sp>
+        <p:nvSpPr>
+          <p:cNvPr id="85" name="TextBox 84"/>
+          <p:cNvSpPr txBox="1"/>
+          <p:nvPr/>
+        </p:nvSpPr>
+        <p:spPr>
+          <a:xfrm>
+            <a:off x="3304902" y="1598775"/>
+            <a:ext cx="146304" cy="128016"/>
+          </a:xfrm>
+          <a:prstGeom prst="rect">
+            <a:avLst/>
+          </a:prstGeom>
+          <a:noFill/>
+          <a:effectLst/>
+        </p:spPr>
+        <p:txBody>
+          <a:bodyPr wrap="square" lIns="0" rIns="0" tIns="0" bIns="0" anchor="ctr">
+            <a:spAutoFit/>
+          </a:bodyPr>
+          <a:lstStyle/>
+          <a:p>
+            <a:pPr algn="ctr"/>
+            <a:r>
+              <a:rPr sz="1000" b="1" i="0">
+                <a:solidFill>
+                  <a:srgbClr val="D4A300"/>
+                </a:solidFill>
+                <a:latin typeface="Arial"/>
+              </a:rPr>
+              <a:t>✗</a:t>
+            </a:r>
+          </a:p>
+        </p:txBody>
+      </p:sp>
+      <p:sp>
+        <p:nvSpPr>
+          <p:cNvPr id="86" name="TextBox 85"/>
+          <p:cNvSpPr txBox="1"/>
+          <p:nvPr/>
+        </p:nvSpPr>
+        <p:spPr>
+          <a:xfrm>
+            <a:off x="3268326" y="3493008"/>
+            <a:ext cx="219456" cy="109728"/>
+          </a:xfrm>
+          <a:prstGeom prst="rect">
+            <a:avLst/>
+          </a:prstGeom>
+          <a:noFill/>
+          <a:effectLst/>
+        </p:spPr>
+        <p:txBody>
+          <a:bodyPr wrap="square" lIns="0" rIns="0" tIns="0" bIns="0" anchor="ctr">
+            <a:spAutoFit/>
+          </a:bodyPr>
+          <a:lstStyle/>
+          <a:p>
+            <a:pPr algn="ctr"/>
+            <a:r>
+              <a:rPr sz="400" b="0" i="0">
+                <a:solidFill>
+                  <a:srgbClr val="C53E1F"/>
+                </a:solidFill>
+                <a:latin typeface="Arial"/>
+              </a:rPr>
+              <a:t>21</a:t>
+            </a:r>
+          </a:p>
+        </p:txBody>
+      </p:sp>
+      <p:sp>
+        <p:nvSpPr>
+          <p:cNvPr id="87" name="Rectangle 86"/>
+          <p:cNvSpPr/>
+          <p:nvPr/>
+        </p:nvSpPr>
+        <p:spPr>
+          <a:xfrm>
+            <a:off x="3448960" y="1740655"/>
+            <a:ext cx="98546" cy="1734065"/>
+          </a:xfrm>
+          <a:prstGeom prst="rect">
+            <a:avLst/>
+          </a:prstGeom>
+          <a:solidFill>
+            <a:srgbClr val="C53E1F"/>
+          </a:solidFill>
+          <a:ln w="2540">
+            <a:solidFill>
+              <a:srgbClr val="FFFFFF"/>
+            </a:solidFill>
+          </a:ln>
+          <a:effectLst/>
+        </p:spPr>
+        <p:style>
+          <a:lnRef idx="1">
+            <a:schemeClr val="accent1"/>
+          </a:lnRef>
+          <a:fillRef idx="3">
+            <a:schemeClr val="accent1"/>
+          </a:fillRef>
+          <a:effectRef idx="2">
+            <a:schemeClr val="accent1"/>
+          </a:effectRef>
+          <a:fontRef idx="minor">
+            <a:schemeClr val="lt1"/>
+          </a:fontRef>
+        </p:style>
+        <p:txBody>
+          <a:bodyPr rtlCol="0" anchor="ctr"/>
+          <a:lstStyle/>
+          <a:p>
+            <a:pPr algn="ctr"/>
+          </a:p>
+        </p:txBody>
+      </p:sp>
+      <p:sp>
+        <p:nvSpPr>
+          <p:cNvPr id="88" name="Rectangle 87"/>
+          <p:cNvSpPr/>
+          <p:nvPr/>
+        </p:nvSpPr>
+        <p:spPr>
+          <a:xfrm>
+            <a:off x="3448960" y="1740655"/>
+            <a:ext cx="98546" cy="1734065"/>
+          </a:xfrm>
+          <a:prstGeom prst="rect">
+            <a:avLst/>
+          </a:prstGeom>
+          <a:noFill/>
+          <a:ln w="16510">
+            <a:solidFill>
+              <a:srgbClr val="D4A300"/>
+            </a:solidFill>
+          </a:ln>
+          <a:effectLst/>
+        </p:spPr>
+        <p:style>
+          <a:lnRef idx="1">
+            <a:schemeClr val="accent1"/>
+          </a:lnRef>
+          <a:fillRef idx="3">
+            <a:schemeClr val="accent1"/>
+          </a:fillRef>
+          <a:effectRef idx="2">
+            <a:schemeClr val="accent1"/>
+          </a:effectRef>
+          <a:fontRef idx="minor">
+            <a:schemeClr val="lt1"/>
+          </a:fontRef>
+        </p:style>
+        <p:txBody>
+          <a:bodyPr rtlCol="0" anchor="ctr"/>
+          <a:lstStyle/>
+          <a:p>
+            <a:pPr algn="ctr"/>
+          </a:p>
+        </p:txBody>
+      </p:sp>
+      <p:sp>
+        <p:nvSpPr>
+          <p:cNvPr id="89" name="TextBox 88"/>
+          <p:cNvSpPr txBox="1"/>
+          <p:nvPr/>
+        </p:nvSpPr>
+        <p:spPr>
+          <a:xfrm>
+            <a:off x="3425081" y="1594351"/>
+            <a:ext cx="146304" cy="128016"/>
+          </a:xfrm>
+          <a:prstGeom prst="rect">
+            <a:avLst/>
+          </a:prstGeom>
+          <a:noFill/>
+          <a:effectLst/>
+        </p:spPr>
+        <p:txBody>
+          <a:bodyPr wrap="square" lIns="0" rIns="0" tIns="0" bIns="0" anchor="ctr">
+            <a:spAutoFit/>
+          </a:bodyPr>
+          <a:lstStyle/>
+          <a:p>
+            <a:pPr algn="ctr"/>
+            <a:r>
+              <a:rPr sz="1000" b="1" i="0">
+                <a:solidFill>
+                  <a:srgbClr val="D4A300"/>
+                </a:solidFill>
+                <a:latin typeface="Arial"/>
+              </a:rPr>
+              <a:t>✗</a:t>
+            </a:r>
+          </a:p>
+        </p:txBody>
+      </p:sp>
+      <p:sp>
+        <p:nvSpPr>
+          <p:cNvPr id="90" name="TextBox 89"/>
+          <p:cNvSpPr txBox="1"/>
+          <p:nvPr/>
+        </p:nvSpPr>
+        <p:spPr>
+          <a:xfrm>
+            <a:off x="3388505" y="3493008"/>
+            <a:ext cx="219456" cy="109728"/>
+          </a:xfrm>
+          <a:prstGeom prst="rect">
+            <a:avLst/>
+          </a:prstGeom>
+          <a:noFill/>
+          <a:effectLst/>
+        </p:spPr>
+        <p:txBody>
+          <a:bodyPr wrap="square" lIns="0" rIns="0" tIns="0" bIns="0" anchor="ctr">
+            <a:spAutoFit/>
+          </a:bodyPr>
+          <a:lstStyle/>
+          <a:p>
+            <a:pPr algn="ctr"/>
+            <a:r>
+              <a:rPr sz="400" b="0" i="0">
+                <a:solidFill>
+                  <a:srgbClr val="C53E1F"/>
+                </a:solidFill>
+                <a:latin typeface="Arial"/>
+              </a:rPr>
+              <a:t>7</a:t>
+            </a:r>
+          </a:p>
+        </p:txBody>
+      </p:sp>
+      <p:sp>
+        <p:nvSpPr>
+          <p:cNvPr id="91" name="Rectangle 90"/>
+          <p:cNvSpPr/>
+          <p:nvPr/>
+        </p:nvSpPr>
+        <p:spPr>
+          <a:xfrm>
+            <a:off x="3569138" y="1720764"/>
+            <a:ext cx="98546" cy="1753956"/>
+          </a:xfrm>
+          <a:prstGeom prst="rect">
+            <a:avLst/>
+          </a:prstGeom>
+          <a:solidFill>
+            <a:srgbClr val="0A7D6E"/>
+          </a:solidFill>
+          <a:ln w="2540">
+            <a:solidFill>
+              <a:srgbClr val="FFFFFF"/>
+            </a:solidFill>
+          </a:ln>
+          <a:effectLst/>
+        </p:spPr>
+        <p:style>
+          <a:lnRef idx="1">
+            <a:schemeClr val="accent1"/>
+          </a:lnRef>
+          <a:fillRef idx="3">
+            <a:schemeClr val="accent1"/>
+          </a:fillRef>
+          <a:effectRef idx="2">
+            <a:schemeClr val="accent1"/>
+          </a:effectRef>
+          <a:fontRef idx="minor">
+            <a:schemeClr val="lt1"/>
+          </a:fontRef>
+        </p:style>
+        <p:txBody>
+          <a:bodyPr rtlCol="0" anchor="ctr"/>
+          <a:lstStyle/>
+          <a:p>
+            <a:pPr algn="ctr"/>
+          </a:p>
+        </p:txBody>
+      </p:sp>
+      <p:sp>
+        <p:nvSpPr>
+          <p:cNvPr id="92" name="TextBox 91"/>
+          <p:cNvSpPr txBox="1"/>
+          <p:nvPr/>
+        </p:nvSpPr>
+        <p:spPr>
+          <a:xfrm>
+            <a:off x="3508683" y="3493008"/>
+            <a:ext cx="219456" cy="109728"/>
+          </a:xfrm>
+          <a:prstGeom prst="rect">
+            <a:avLst/>
+          </a:prstGeom>
+          <a:noFill/>
+          <a:effectLst/>
+        </p:spPr>
+        <p:txBody>
+          <a:bodyPr wrap="square" lIns="0" rIns="0" tIns="0" bIns="0" anchor="ctr">
+            <a:spAutoFit/>
+          </a:bodyPr>
+          <a:lstStyle/>
+          <a:p>
+            <a:pPr algn="ctr"/>
+            <a:r>
+              <a:rPr sz="400" b="0" i="0">
+                <a:solidFill>
+                  <a:srgbClr val="0A7D6E"/>
+                </a:solidFill>
+                <a:latin typeface="Arial"/>
+              </a:rPr>
+              <a:t>20</a:t>
+            </a:r>
+          </a:p>
+        </p:txBody>
+      </p:sp>
+      <p:sp>
+        <p:nvSpPr>
+          <p:cNvPr id="93" name="Rectangle 92"/>
+          <p:cNvSpPr/>
+          <p:nvPr/>
+        </p:nvSpPr>
+        <p:spPr>
+          <a:xfrm>
+            <a:off x="3689316" y="1702302"/>
+            <a:ext cx="98546" cy="1772418"/>
+          </a:xfrm>
+          <a:prstGeom prst="rect">
+            <a:avLst/>
+          </a:prstGeom>
+          <a:solidFill>
+            <a:srgbClr val="0A7D6E"/>
+          </a:solidFill>
+          <a:ln w="2540">
+            <a:solidFill>
+              <a:srgbClr val="FFFFFF"/>
+            </a:solidFill>
+          </a:ln>
+          <a:effectLst/>
+        </p:spPr>
+        <p:style>
+          <a:lnRef idx="1">
+            <a:schemeClr val="accent1"/>
+          </a:lnRef>
+          <a:fillRef idx="3">
+            <a:schemeClr val="accent1"/>
+          </a:fillRef>
+          <a:effectRef idx="2">
+            <a:schemeClr val="accent1"/>
+          </a:effectRef>
+          <a:fontRef idx="minor">
+            <a:schemeClr val="lt1"/>
+          </a:fontRef>
+        </p:style>
+        <p:txBody>
+          <a:bodyPr rtlCol="0" anchor="ctr"/>
+          <a:lstStyle/>
+          <a:p>
+            <a:pPr algn="ctr"/>
+          </a:p>
+        </p:txBody>
+      </p:sp>
+      <p:sp>
+        <p:nvSpPr>
+          <p:cNvPr id="94" name="TextBox 93"/>
+          <p:cNvSpPr txBox="1"/>
+          <p:nvPr/>
+        </p:nvSpPr>
+        <p:spPr>
+          <a:xfrm>
+            <a:off x="3628861" y="3493008"/>
+            <a:ext cx="219456" cy="109728"/>
+          </a:xfrm>
+          <a:prstGeom prst="rect">
+            <a:avLst/>
+          </a:prstGeom>
+          <a:noFill/>
+          <a:effectLst/>
+        </p:spPr>
+        <p:txBody>
+          <a:bodyPr wrap="square" lIns="0" rIns="0" tIns="0" bIns="0" anchor="ctr">
+            <a:spAutoFit/>
+          </a:bodyPr>
+          <a:lstStyle/>
+          <a:p>
+            <a:pPr algn="ctr"/>
+            <a:r>
+              <a:rPr sz="400" b="0" i="0">
+                <a:solidFill>
+                  <a:srgbClr val="0A7D6E"/>
+                </a:solidFill>
+                <a:latin typeface="Arial"/>
+              </a:rPr>
+              <a:t>4</a:t>
+            </a:r>
+          </a:p>
+        </p:txBody>
+      </p:sp>
+      <p:sp>
+        <p:nvSpPr>
+          <p:cNvPr id="95" name="Rectangle 94"/>
+          <p:cNvSpPr/>
+          <p:nvPr/>
+        </p:nvSpPr>
+        <p:spPr>
+          <a:xfrm>
+            <a:off x="3809495" y="1693599"/>
+            <a:ext cx="98546" cy="1781121"/>
+          </a:xfrm>
+          <a:prstGeom prst="rect">
+            <a:avLst/>
+          </a:prstGeom>
+          <a:solidFill>
+            <a:srgbClr val="0A7D6E"/>
+          </a:solidFill>
+          <a:ln w="2540">
+            <a:solidFill>
+              <a:srgbClr val="FFFFFF"/>
+            </a:solidFill>
+          </a:ln>
+          <a:effectLst/>
+        </p:spPr>
+        <p:style>
+          <a:lnRef idx="1">
+            <a:schemeClr val="accent1"/>
+          </a:lnRef>
+          <a:fillRef idx="3">
+            <a:schemeClr val="accent1"/>
+          </a:fillRef>
+          <a:effectRef idx="2">
+            <a:schemeClr val="accent1"/>
+          </a:effectRef>
+          <a:fontRef idx="minor">
+            <a:schemeClr val="lt1"/>
+          </a:fontRef>
+        </p:style>
+        <p:txBody>
+          <a:bodyPr rtlCol="0" anchor="ctr"/>
+          <a:lstStyle/>
+          <a:p>
+            <a:pPr algn="ctr"/>
+          </a:p>
+        </p:txBody>
+      </p:sp>
+      <p:sp>
+        <p:nvSpPr>
+          <p:cNvPr id="96" name="TextBox 95"/>
+          <p:cNvSpPr txBox="1"/>
+          <p:nvPr/>
+        </p:nvSpPr>
+        <p:spPr>
+          <a:xfrm>
+            <a:off x="3749040" y="3493008"/>
+            <a:ext cx="219456" cy="109728"/>
+          </a:xfrm>
+          <a:prstGeom prst="rect">
+            <a:avLst/>
+          </a:prstGeom>
+          <a:noFill/>
+          <a:effectLst/>
+        </p:spPr>
+        <p:txBody>
+          <a:bodyPr wrap="square" lIns="0" rIns="0" tIns="0" bIns="0" anchor="ctr">
+            <a:spAutoFit/>
+          </a:bodyPr>
+          <a:lstStyle/>
+          <a:p>
+            <a:pPr algn="ctr"/>
+            <a:r>
+              <a:rPr sz="400" b="0" i="0">
+                <a:solidFill>
+                  <a:srgbClr val="0A7D6E"/>
+                </a:solidFill>
+                <a:latin typeface="Arial"/>
+              </a:rPr>
+              <a:t>31</a:t>
+            </a:r>
+          </a:p>
+        </p:txBody>
+      </p:sp>
+      <p:sp>
+        <p:nvSpPr>
+          <p:cNvPr id="97" name="Rectangle 96"/>
+          <p:cNvSpPr/>
+          <p:nvPr/>
+        </p:nvSpPr>
+        <p:spPr>
+          <a:xfrm>
+            <a:off x="3929673" y="1637866"/>
+            <a:ext cx="98546" cy="1836854"/>
+          </a:xfrm>
+          <a:prstGeom prst="rect">
+            <a:avLst/>
+          </a:prstGeom>
+          <a:solidFill>
+            <a:srgbClr val="0A7D6E"/>
+          </a:solidFill>
+          <a:ln w="2540">
+            <a:solidFill>
+              <a:srgbClr val="FFFFFF"/>
+            </a:solidFill>
+          </a:ln>
+          <a:effectLst/>
+        </p:spPr>
+        <p:style>
+          <a:lnRef idx="1">
+            <a:schemeClr val="accent1"/>
+          </a:lnRef>
+          <a:fillRef idx="3">
+            <a:schemeClr val="accent1"/>
+          </a:fillRef>
+          <a:effectRef idx="2">
+            <a:schemeClr val="accent1"/>
+          </a:effectRef>
+          <a:fontRef idx="minor">
+            <a:schemeClr val="lt1"/>
+          </a:fontRef>
+        </p:style>
+        <p:txBody>
+          <a:bodyPr rtlCol="0" anchor="ctr"/>
+          <a:lstStyle/>
+          <a:p>
+            <a:pPr algn="ctr"/>
+          </a:p>
+        </p:txBody>
+      </p:sp>
+      <p:sp>
+        <p:nvSpPr>
+          <p:cNvPr id="98" name="TextBox 97"/>
+          <p:cNvSpPr txBox="1"/>
+          <p:nvPr/>
+        </p:nvSpPr>
+        <p:spPr>
+          <a:xfrm>
+            <a:off x="3869218" y="3493008"/>
+            <a:ext cx="219456" cy="109728"/>
+          </a:xfrm>
+          <a:prstGeom prst="rect">
+            <a:avLst/>
+          </a:prstGeom>
+          <a:noFill/>
+          <a:effectLst/>
+        </p:spPr>
+        <p:txBody>
+          <a:bodyPr wrap="square" lIns="0" rIns="0" tIns="0" bIns="0" anchor="ctr">
+            <a:spAutoFit/>
+          </a:bodyPr>
+          <a:lstStyle/>
+          <a:p>
+            <a:pPr algn="ctr"/>
+            <a:r>
+              <a:rPr sz="400" b="0" i="0">
+                <a:solidFill>
+                  <a:srgbClr val="0A7D6E"/>
+                </a:solidFill>
+                <a:latin typeface="Arial"/>
+              </a:rPr>
+              <a:t>6</a:t>
+            </a:r>
+          </a:p>
+        </p:txBody>
+      </p:sp>
+      <p:sp>
+        <p:nvSpPr>
+          <p:cNvPr id="99" name="Rectangle 98"/>
+          <p:cNvSpPr/>
+          <p:nvPr/>
+        </p:nvSpPr>
+        <p:spPr>
+          <a:xfrm>
+            <a:off x="4049851" y="1576072"/>
+            <a:ext cx="98546" cy="1898648"/>
+          </a:xfrm>
+          <a:prstGeom prst="rect">
+            <a:avLst/>
+          </a:prstGeom>
+          <a:solidFill>
+            <a:srgbClr val="C53E1F"/>
+          </a:solidFill>
+          <a:ln w="2540">
+            <a:solidFill>
+              <a:srgbClr val="FFFFFF"/>
+            </a:solidFill>
+          </a:ln>
+          <a:effectLst/>
+        </p:spPr>
+        <p:style>
+          <a:lnRef idx="1">
+            <a:schemeClr val="accent1"/>
+          </a:lnRef>
+          <a:fillRef idx="3">
+            <a:schemeClr val="accent1"/>
+          </a:fillRef>
+          <a:effectRef idx="2">
+            <a:schemeClr val="accent1"/>
+          </a:effectRef>
+          <a:fontRef idx="minor">
+            <a:schemeClr val="lt1"/>
+          </a:fontRef>
+        </p:style>
+        <p:txBody>
+          <a:bodyPr rtlCol="0" anchor="ctr"/>
+          <a:lstStyle/>
+          <a:p>
+            <a:pPr algn="ctr"/>
+          </a:p>
+        </p:txBody>
+      </p:sp>
+      <p:sp>
+        <p:nvSpPr>
+          <p:cNvPr id="100" name="Rectangle 99"/>
+          <p:cNvSpPr/>
+          <p:nvPr/>
+        </p:nvSpPr>
+        <p:spPr>
+          <a:xfrm>
+            <a:off x="4049851" y="1576072"/>
+            <a:ext cx="98546" cy="1898648"/>
+          </a:xfrm>
+          <a:prstGeom prst="rect">
+            <a:avLst/>
+          </a:prstGeom>
+          <a:noFill/>
+          <a:ln w="16510">
+            <a:solidFill>
+              <a:srgbClr val="D4A300"/>
+            </a:solidFill>
+          </a:ln>
+          <a:effectLst/>
+        </p:spPr>
+        <p:style>
+          <a:lnRef idx="1">
+            <a:schemeClr val="accent1"/>
+          </a:lnRef>
+          <a:fillRef idx="3">
+            <a:schemeClr val="accent1"/>
+          </a:fillRef>
+          <a:effectRef idx="2">
+            <a:schemeClr val="accent1"/>
+          </a:effectRef>
+          <a:fontRef idx="minor">
+            <a:schemeClr val="lt1"/>
+          </a:fontRef>
+        </p:style>
+        <p:txBody>
+          <a:bodyPr rtlCol="0" anchor="ctr"/>
+          <a:lstStyle/>
+          <a:p>
+            <a:pPr algn="ctr"/>
+          </a:p>
+        </p:txBody>
+      </p:sp>
+      <p:sp>
+        <p:nvSpPr>
+          <p:cNvPr id="101" name="TextBox 100"/>
+          <p:cNvSpPr txBox="1"/>
+          <p:nvPr/>
+        </p:nvSpPr>
+        <p:spPr>
+          <a:xfrm>
+            <a:off x="4025972" y="1429768"/>
+            <a:ext cx="146304" cy="128016"/>
+          </a:xfrm>
+          <a:prstGeom prst="rect">
+            <a:avLst/>
+          </a:prstGeom>
+          <a:noFill/>
+          <a:effectLst/>
+        </p:spPr>
+        <p:txBody>
+          <a:bodyPr wrap="square" lIns="0" rIns="0" tIns="0" bIns="0" anchor="ctr">
+            <a:spAutoFit/>
+          </a:bodyPr>
+          <a:lstStyle/>
+          <a:p>
+            <a:pPr algn="ctr"/>
+            <a:r>
+              <a:rPr sz="1000" b="1" i="0">
+                <a:solidFill>
+                  <a:srgbClr val="D4A300"/>
+                </a:solidFill>
+                <a:latin typeface="Arial"/>
+              </a:rPr>
+              <a:t>✗</a:t>
+            </a:r>
+          </a:p>
+        </p:txBody>
+      </p:sp>
+      <p:sp>
+        <p:nvSpPr>
+          <p:cNvPr id="102" name="TextBox 101"/>
+          <p:cNvSpPr txBox="1"/>
+          <p:nvPr/>
+        </p:nvSpPr>
+        <p:spPr>
+          <a:xfrm>
+            <a:off x="3989396" y="3493008"/>
+            <a:ext cx="219456" cy="109728"/>
+          </a:xfrm>
+          <a:prstGeom prst="rect">
+            <a:avLst/>
+          </a:prstGeom>
+          <a:noFill/>
+          <a:effectLst/>
+        </p:spPr>
+        <p:txBody>
+          <a:bodyPr wrap="square" lIns="0" rIns="0" tIns="0" bIns="0" anchor="ctr">
+            <a:spAutoFit/>
+          </a:bodyPr>
+          <a:lstStyle/>
+          <a:p>
+            <a:pPr algn="ctr"/>
+            <a:r>
+              <a:rPr sz="400" b="0" i="0">
+                <a:solidFill>
+                  <a:srgbClr val="C53E1F"/>
+                </a:solidFill>
+                <a:latin typeface="Arial"/>
+              </a:rPr>
+              <a:t>11</a:t>
+            </a:r>
+          </a:p>
+        </p:txBody>
+      </p:sp>
+      <p:sp>
+        <p:nvSpPr>
+          <p:cNvPr id="103" name="Rectangle 102"/>
+          <p:cNvSpPr/>
+          <p:nvPr/>
+        </p:nvSpPr>
+        <p:spPr>
+          <a:xfrm>
+            <a:off x="4170029" y="1573876"/>
+            <a:ext cx="98546" cy="1900844"/>
+          </a:xfrm>
+          <a:prstGeom prst="rect">
+            <a:avLst/>
+          </a:prstGeom>
+          <a:solidFill>
+            <a:srgbClr val="0A7D6E"/>
+          </a:solidFill>
+          <a:ln w="2540">
+            <a:solidFill>
+              <a:srgbClr val="FFFFFF"/>
+            </a:solidFill>
+          </a:ln>
+          <a:effectLst/>
+        </p:spPr>
+        <p:style>
+          <a:lnRef idx="1">
+            <a:schemeClr val="accent1"/>
+          </a:lnRef>
+          <a:fillRef idx="3">
+            <a:schemeClr val="accent1"/>
+          </a:fillRef>
+          <a:effectRef idx="2">
+            <a:schemeClr val="accent1"/>
+          </a:effectRef>
+          <a:fontRef idx="minor">
+            <a:schemeClr val="lt1"/>
+          </a:fontRef>
+        </p:style>
+        <p:txBody>
+          <a:bodyPr rtlCol="0" anchor="ctr"/>
+          <a:lstStyle/>
+          <a:p>
+            <a:pPr algn="ctr"/>
+          </a:p>
+        </p:txBody>
+      </p:sp>
+      <p:sp>
+        <p:nvSpPr>
+          <p:cNvPr id="104" name="TextBox 103"/>
+          <p:cNvSpPr txBox="1"/>
+          <p:nvPr/>
+        </p:nvSpPr>
+        <p:spPr>
+          <a:xfrm>
+            <a:off x="4109574" y="3493008"/>
+            <a:ext cx="219456" cy="109728"/>
+          </a:xfrm>
+          <a:prstGeom prst="rect">
+            <a:avLst/>
+          </a:prstGeom>
+          <a:noFill/>
+          <a:effectLst/>
+        </p:spPr>
+        <p:txBody>
+          <a:bodyPr wrap="square" lIns="0" rIns="0" tIns="0" bIns="0" anchor="ctr">
+            <a:spAutoFit/>
+          </a:bodyPr>
+          <a:lstStyle/>
+          <a:p>
+            <a:pPr algn="ctr"/>
+            <a:r>
+              <a:rPr sz="400" b="0" i="0">
+                <a:solidFill>
+                  <a:srgbClr val="0A7D6E"/>
+                </a:solidFill>
+                <a:latin typeface="Arial"/>
+              </a:rPr>
+              <a:t>14</a:t>
+            </a:r>
+          </a:p>
+        </p:txBody>
+      </p:sp>
+      <p:sp>
+        <p:nvSpPr>
+          <p:cNvPr id="105" name="Rectangle 104"/>
+          <p:cNvSpPr/>
+          <p:nvPr/>
+        </p:nvSpPr>
+        <p:spPr>
+          <a:xfrm>
+            <a:off x="4290208" y="1527756"/>
+            <a:ext cx="98546" cy="1946964"/>
+          </a:xfrm>
+          <a:prstGeom prst="rect">
+            <a:avLst/>
+          </a:prstGeom>
+          <a:solidFill>
+            <a:srgbClr val="0A7D6E"/>
+          </a:solidFill>
+          <a:ln w="2540">
+            <a:solidFill>
+              <a:srgbClr val="FFFFFF"/>
+            </a:solidFill>
+          </a:ln>
+          <a:effectLst/>
+        </p:spPr>
+        <p:style>
+          <a:lnRef idx="1">
+            <a:schemeClr val="accent1"/>
+          </a:lnRef>
+          <a:fillRef idx="3">
+            <a:schemeClr val="accent1"/>
+          </a:fillRef>
+          <a:effectRef idx="2">
+            <a:schemeClr val="accent1"/>
+          </a:effectRef>
+          <a:fontRef idx="minor">
+            <a:schemeClr val="lt1"/>
+          </a:fontRef>
+        </p:style>
+        <p:txBody>
+          <a:bodyPr rtlCol="0" anchor="ctr"/>
+          <a:lstStyle/>
+          <a:p>
+            <a:pPr algn="ctr"/>
+          </a:p>
+        </p:txBody>
+      </p:sp>
+      <p:sp>
+        <p:nvSpPr>
+          <p:cNvPr id="106" name="TextBox 105"/>
+          <p:cNvSpPr txBox="1"/>
+          <p:nvPr/>
+        </p:nvSpPr>
+        <p:spPr>
+          <a:xfrm>
+            <a:off x="4229753" y="3493008"/>
+            <a:ext cx="219456" cy="109728"/>
+          </a:xfrm>
+          <a:prstGeom prst="rect">
+            <a:avLst/>
+          </a:prstGeom>
+          <a:noFill/>
+          <a:effectLst/>
+        </p:spPr>
+        <p:txBody>
+          <a:bodyPr wrap="square" lIns="0" rIns="0" tIns="0" bIns="0" anchor="ctr">
+            <a:spAutoFit/>
+          </a:bodyPr>
+          <a:lstStyle/>
+          <a:p>
+            <a:pPr algn="ctr"/>
+            <a:r>
+              <a:rPr sz="400" b="0" i="0">
+                <a:solidFill>
+                  <a:srgbClr val="0A7D6E"/>
+                </a:solidFill>
+                <a:latin typeface="Arial"/>
+              </a:rPr>
+              <a:t>2</a:t>
+            </a:r>
+          </a:p>
+        </p:txBody>
+      </p:sp>
+      <p:sp>
+        <p:nvSpPr>
+          <p:cNvPr id="107" name="Rectangle 106"/>
+          <p:cNvSpPr/>
+          <p:nvPr/>
+        </p:nvSpPr>
+        <p:spPr>
+          <a:xfrm>
+            <a:off x="4410386" y="1442514"/>
+            <a:ext cx="98546" cy="2032206"/>
+          </a:xfrm>
+          <a:prstGeom prst="rect">
+            <a:avLst/>
+          </a:prstGeom>
+          <a:solidFill>
+            <a:srgbClr val="0A7D6E"/>
+          </a:solidFill>
+          <a:ln w="2540">
+            <a:solidFill>
+              <a:srgbClr val="FFFFFF"/>
+            </a:solidFill>
+          </a:ln>
+          <a:effectLst/>
+        </p:spPr>
+        <p:style>
+          <a:lnRef idx="1">
+            <a:schemeClr val="accent1"/>
+          </a:lnRef>
+          <a:fillRef idx="3">
+            <a:schemeClr val="accent1"/>
+          </a:fillRef>
+          <a:effectRef idx="2">
+            <a:schemeClr val="accent1"/>
+          </a:effectRef>
+          <a:fontRef idx="minor">
+            <a:schemeClr val="lt1"/>
+          </a:fontRef>
+        </p:style>
+        <p:txBody>
+          <a:bodyPr rtlCol="0" anchor="ctr"/>
+          <a:lstStyle/>
+          <a:p>
+            <a:pPr algn="ctr"/>
+          </a:p>
+        </p:txBody>
+      </p:sp>
+      <p:sp>
+        <p:nvSpPr>
+          <p:cNvPr id="108" name="TextBox 107"/>
+          <p:cNvSpPr txBox="1"/>
+          <p:nvPr/>
+        </p:nvSpPr>
+        <p:spPr>
+          <a:xfrm>
+            <a:off x="4349931" y="3493008"/>
+            <a:ext cx="219456" cy="109728"/>
+          </a:xfrm>
+          <a:prstGeom prst="rect">
+            <a:avLst/>
+          </a:prstGeom>
+          <a:noFill/>
+          <a:effectLst/>
+        </p:spPr>
+        <p:txBody>
+          <a:bodyPr wrap="square" lIns="0" rIns="0" tIns="0" bIns="0" anchor="ctr">
+            <a:spAutoFit/>
+          </a:bodyPr>
+          <a:lstStyle/>
+          <a:p>
+            <a:pPr algn="ctr"/>
+            <a:r>
+              <a:rPr sz="400" b="0" i="0">
+                <a:solidFill>
+                  <a:srgbClr val="0A7D6E"/>
+                </a:solidFill>
+                <a:latin typeface="Arial"/>
+              </a:rPr>
+              <a:t>27</a:t>
+            </a:r>
+          </a:p>
+        </p:txBody>
+      </p:sp>
+      <p:sp>
+        <p:nvSpPr>
+          <p:cNvPr id="109" name="Rectangle 108"/>
+          <p:cNvSpPr/>
+          <p:nvPr/>
+        </p:nvSpPr>
+        <p:spPr>
+          <a:xfrm>
+            <a:off x="4530564" y="1412949"/>
+            <a:ext cx="98546" cy="2061771"/>
+          </a:xfrm>
+          <a:prstGeom prst="rect">
+            <a:avLst/>
+          </a:prstGeom>
+          <a:solidFill>
+            <a:srgbClr val="0A7D6E"/>
+          </a:solidFill>
+          <a:ln w="2540">
+            <a:solidFill>
+              <a:srgbClr val="FFFFFF"/>
+            </a:solidFill>
+          </a:ln>
+          <a:effectLst/>
+        </p:spPr>
+        <p:style>
+          <a:lnRef idx="1">
+            <a:schemeClr val="accent1"/>
+          </a:lnRef>
+          <a:fillRef idx="3">
+            <a:schemeClr val="accent1"/>
+          </a:fillRef>
+          <a:effectRef idx="2">
+            <a:schemeClr val="accent1"/>
+          </a:effectRef>
+          <a:fontRef idx="minor">
+            <a:schemeClr val="lt1"/>
+          </a:fontRef>
+        </p:style>
+        <p:txBody>
+          <a:bodyPr rtlCol="0" anchor="ctr"/>
+          <a:lstStyle/>
+          <a:p>
+            <a:pPr algn="ctr"/>
+          </a:p>
+        </p:txBody>
+      </p:sp>
+      <p:sp>
+        <p:nvSpPr>
+          <p:cNvPr id="110" name="TextBox 109"/>
+          <p:cNvSpPr txBox="1"/>
+          <p:nvPr/>
+        </p:nvSpPr>
+        <p:spPr>
+          <a:xfrm>
+            <a:off x="4470109" y="3493008"/>
+            <a:ext cx="219456" cy="109728"/>
+          </a:xfrm>
+          <a:prstGeom prst="rect">
+            <a:avLst/>
+          </a:prstGeom>
+          <a:noFill/>
+          <a:effectLst/>
+        </p:spPr>
+        <p:txBody>
+          <a:bodyPr wrap="square" lIns="0" rIns="0" tIns="0" bIns="0" anchor="ctr">
+            <a:spAutoFit/>
+          </a:bodyPr>
+          <a:lstStyle/>
+          <a:p>
+            <a:pPr algn="ctr"/>
+            <a:r>
+              <a:rPr sz="400" b="0" i="0">
+                <a:solidFill>
+                  <a:srgbClr val="0A7D6E"/>
+                </a:solidFill>
+                <a:latin typeface="Arial"/>
+              </a:rPr>
+              <a:t>9</a:t>
+            </a:r>
+          </a:p>
+        </p:txBody>
+      </p:sp>
+      <p:sp>
+        <p:nvSpPr>
+          <p:cNvPr id="111" name="Rectangle 110"/>
+          <p:cNvSpPr/>
+          <p:nvPr/>
+        </p:nvSpPr>
+        <p:spPr>
+          <a:xfrm>
+            <a:off x="4650743" y="1321088"/>
+            <a:ext cx="98546" cy="2153632"/>
+          </a:xfrm>
+          <a:prstGeom prst="rect">
+            <a:avLst/>
+          </a:prstGeom>
+          <a:solidFill>
+            <a:srgbClr val="C53E1F"/>
+          </a:solidFill>
+          <a:ln w="2540">
+            <a:solidFill>
+              <a:srgbClr val="FFFFFF"/>
+            </a:solidFill>
+          </a:ln>
+          <a:effectLst/>
+        </p:spPr>
+        <p:style>
+          <a:lnRef idx="1">
+            <a:schemeClr val="accent1"/>
+          </a:lnRef>
+          <a:fillRef idx="3">
+            <a:schemeClr val="accent1"/>
+          </a:fillRef>
+          <a:effectRef idx="2">
+            <a:schemeClr val="accent1"/>
+          </a:effectRef>
+          <a:fontRef idx="minor">
+            <a:schemeClr val="lt1"/>
+          </a:fontRef>
+        </p:style>
+        <p:txBody>
+          <a:bodyPr rtlCol="0" anchor="ctr"/>
+          <a:lstStyle/>
+          <a:p>
+            <a:pPr algn="ctr"/>
+          </a:p>
+        </p:txBody>
+      </p:sp>
+      <p:sp>
+        <p:nvSpPr>
+          <p:cNvPr id="112" name="Rectangle 111"/>
+          <p:cNvSpPr/>
+          <p:nvPr/>
+        </p:nvSpPr>
+        <p:spPr>
+          <a:xfrm>
+            <a:off x="4650743" y="1321088"/>
+            <a:ext cx="98546" cy="2153632"/>
+          </a:xfrm>
+          <a:prstGeom prst="rect">
+            <a:avLst/>
+          </a:prstGeom>
+          <a:noFill/>
+          <a:ln w="16510">
+            <a:solidFill>
+              <a:srgbClr val="D4A300"/>
+            </a:solidFill>
+          </a:ln>
+          <a:effectLst/>
+        </p:spPr>
+        <p:style>
+          <a:lnRef idx="1">
+            <a:schemeClr val="accent1"/>
+          </a:lnRef>
+          <a:fillRef idx="3">
+            <a:schemeClr val="accent1"/>
+          </a:fillRef>
+          <a:effectRef idx="2">
+            <a:schemeClr val="accent1"/>
+          </a:effectRef>
+          <a:fontRef idx="minor">
+            <a:schemeClr val="lt1"/>
+          </a:fontRef>
+        </p:style>
+        <p:txBody>
+          <a:bodyPr rtlCol="0" anchor="ctr"/>
+          <a:lstStyle/>
+          <a:p>
+            <a:pPr algn="ctr"/>
+          </a:p>
+        </p:txBody>
+      </p:sp>
+      <p:sp>
+        <p:nvSpPr>
+          <p:cNvPr id="113" name="TextBox 112"/>
+          <p:cNvSpPr txBox="1"/>
+          <p:nvPr/>
+        </p:nvSpPr>
+        <p:spPr>
+          <a:xfrm>
+            <a:off x="4626864" y="1174784"/>
+            <a:ext cx="146304" cy="128016"/>
+          </a:xfrm>
+          <a:prstGeom prst="rect">
+            <a:avLst/>
+          </a:prstGeom>
+          <a:noFill/>
+          <a:effectLst/>
+        </p:spPr>
+        <p:txBody>
+          <a:bodyPr wrap="square" lIns="0" rIns="0" tIns="0" bIns="0" anchor="ctr">
+            <a:spAutoFit/>
+          </a:bodyPr>
+          <a:lstStyle/>
+          <a:p>
+            <a:pPr algn="ctr"/>
+            <a:r>
+              <a:rPr sz="1000" b="1" i="0">
+                <a:solidFill>
+                  <a:srgbClr val="D4A300"/>
+                </a:solidFill>
+                <a:latin typeface="Arial"/>
+              </a:rPr>
+              <a:t>✗</a:t>
+            </a:r>
+          </a:p>
+        </p:txBody>
+      </p:sp>
+      <p:sp>
+        <p:nvSpPr>
+          <p:cNvPr id="114" name="TextBox 113"/>
+          <p:cNvSpPr txBox="1"/>
+          <p:nvPr/>
+        </p:nvSpPr>
+        <p:spPr>
+          <a:xfrm>
+            <a:off x="4590288" y="3493008"/>
+            <a:ext cx="219456" cy="109728"/>
+          </a:xfrm>
+          <a:prstGeom prst="rect">
+            <a:avLst/>
+          </a:prstGeom>
+          <a:noFill/>
+          <a:effectLst/>
+        </p:spPr>
+        <p:txBody>
+          <a:bodyPr wrap="square" lIns="0" rIns="0" tIns="0" bIns="0" anchor="ctr">
+            <a:spAutoFit/>
+          </a:bodyPr>
+          <a:lstStyle/>
+          <a:p>
+            <a:pPr algn="ctr"/>
+            <a:r>
+              <a:rPr sz="400" b="0" i="0">
+                <a:solidFill>
+                  <a:srgbClr val="C53E1F"/>
+                </a:solidFill>
+                <a:latin typeface="Arial"/>
+              </a:rPr>
+              <a:t>26</a:t>
+            </a:r>
+          </a:p>
+        </p:txBody>
+      </p:sp>
+      <p:sp>
+        <p:nvSpPr>
+          <p:cNvPr id="115" name="Rectangle 114"/>
+          <p:cNvSpPr/>
+          <p:nvPr/>
+        </p:nvSpPr>
+        <p:spPr>
+          <a:xfrm>
+            <a:off x="4770921" y="1233174"/>
+            <a:ext cx="98546" cy="2241546"/>
+          </a:xfrm>
+          <a:prstGeom prst="rect">
+            <a:avLst/>
+          </a:prstGeom>
+          <a:solidFill>
+            <a:srgbClr val="0A7D6E"/>
+          </a:solidFill>
+          <a:ln w="2540">
+            <a:solidFill>
+              <a:srgbClr val="FFFFFF"/>
+            </a:solidFill>
+          </a:ln>
+          <a:effectLst/>
+        </p:spPr>
+        <p:style>
+          <a:lnRef idx="1">
+            <a:schemeClr val="accent1"/>
+          </a:lnRef>
+          <a:fillRef idx="3">
+            <a:schemeClr val="accent1"/>
+          </a:fillRef>
+          <a:effectRef idx="2">
+            <a:schemeClr val="accent1"/>
+          </a:effectRef>
+          <a:fontRef idx="minor">
+            <a:schemeClr val="lt1"/>
+          </a:fontRef>
+        </p:style>
+        <p:txBody>
+          <a:bodyPr rtlCol="0" anchor="ctr"/>
+          <a:lstStyle/>
+          <a:p>
+            <a:pPr algn="ctr"/>
+          </a:p>
+        </p:txBody>
+      </p:sp>
+      <p:sp>
+        <p:nvSpPr>
+          <p:cNvPr id="116" name="TextBox 115"/>
+          <p:cNvSpPr txBox="1"/>
+          <p:nvPr/>
+        </p:nvSpPr>
+        <p:spPr>
+          <a:xfrm>
+            <a:off x="4710466" y="3493008"/>
+            <a:ext cx="219456" cy="109728"/>
+          </a:xfrm>
+          <a:prstGeom prst="rect">
+            <a:avLst/>
+          </a:prstGeom>
+          <a:noFill/>
+          <a:effectLst/>
+        </p:spPr>
+        <p:txBody>
+          <a:bodyPr wrap="square" lIns="0" rIns="0" tIns="0" bIns="0" anchor="ctr">
+            <a:spAutoFit/>
+          </a:bodyPr>
+          <a:lstStyle/>
+          <a:p>
+            <a:pPr algn="ctr"/>
+            <a:r>
+              <a:rPr sz="400" b="0" i="0">
+                <a:solidFill>
+                  <a:srgbClr val="0A7D6E"/>
+                </a:solidFill>
+                <a:latin typeface="Arial"/>
+              </a:rPr>
+              <a:t>29</a:t>
+            </a:r>
+          </a:p>
+        </p:txBody>
+      </p:sp>
+      <p:sp>
+        <p:nvSpPr>
+          <p:cNvPr id="117" name="Rectangle 116"/>
+          <p:cNvSpPr/>
+          <p:nvPr/>
+        </p:nvSpPr>
+        <p:spPr>
+          <a:xfrm>
+            <a:off x="4891099" y="1217942"/>
+            <a:ext cx="98546" cy="2256778"/>
+          </a:xfrm>
+          <a:prstGeom prst="rect">
+            <a:avLst/>
+          </a:prstGeom>
+          <a:solidFill>
+            <a:srgbClr val="0A7D6E"/>
+          </a:solidFill>
+          <a:ln w="2540">
+            <a:solidFill>
+              <a:srgbClr val="FFFFFF"/>
+            </a:solidFill>
+          </a:ln>
+          <a:effectLst/>
+        </p:spPr>
+        <p:style>
+          <a:lnRef idx="1">
+            <a:schemeClr val="accent1"/>
+          </a:lnRef>
+          <a:fillRef idx="3">
+            <a:schemeClr val="accent1"/>
+          </a:fillRef>
+          <a:effectRef idx="2">
+            <a:schemeClr val="accent1"/>
+          </a:effectRef>
+          <a:fontRef idx="minor">
+            <a:schemeClr val="lt1"/>
+          </a:fontRef>
+        </p:style>
+        <p:txBody>
+          <a:bodyPr rtlCol="0" anchor="ctr"/>
+          <a:lstStyle/>
+          <a:p>
+            <a:pPr algn="ctr"/>
+          </a:p>
+        </p:txBody>
+      </p:sp>
+      <p:sp>
+        <p:nvSpPr>
+          <p:cNvPr id="118" name="TextBox 117"/>
+          <p:cNvSpPr txBox="1"/>
+          <p:nvPr/>
+        </p:nvSpPr>
+        <p:spPr>
+          <a:xfrm>
+            <a:off x="4830644" y="3493008"/>
+            <a:ext cx="219456" cy="109728"/>
+          </a:xfrm>
+          <a:prstGeom prst="rect">
+            <a:avLst/>
+          </a:prstGeom>
+          <a:noFill/>
+          <a:effectLst/>
+        </p:spPr>
+        <p:txBody>
+          <a:bodyPr wrap="square" lIns="0" rIns="0" tIns="0" bIns="0" anchor="ctr">
+            <a:spAutoFit/>
+          </a:bodyPr>
+          <a:lstStyle/>
+          <a:p>
+            <a:pPr algn="ctr"/>
+            <a:r>
+              <a:rPr sz="400" b="0" i="0">
+                <a:solidFill>
+                  <a:srgbClr val="0A7D6E"/>
+                </a:solidFill>
+                <a:latin typeface="Arial"/>
+              </a:rPr>
+              <a:t>3</a:t>
+            </a:r>
+          </a:p>
+        </p:txBody>
+      </p:sp>
+      <p:sp>
+        <p:nvSpPr>
+          <p:cNvPr id="119" name="Rectangle 118"/>
+          <p:cNvSpPr/>
+          <p:nvPr/>
+        </p:nvSpPr>
+        <p:spPr>
+          <a:xfrm>
+            <a:off x="5011277" y="1161735"/>
+            <a:ext cx="98546" cy="2312985"/>
+          </a:xfrm>
+          <a:prstGeom prst="rect">
+            <a:avLst/>
+          </a:prstGeom>
+          <a:solidFill>
+            <a:srgbClr val="0A7D6E"/>
+          </a:solidFill>
+          <a:ln w="2540">
+            <a:solidFill>
+              <a:srgbClr val="FFFFFF"/>
+            </a:solidFill>
+          </a:ln>
+          <a:effectLst/>
+        </p:spPr>
+        <p:style>
+          <a:lnRef idx="1">
+            <a:schemeClr val="accent1"/>
+          </a:lnRef>
+          <a:fillRef idx="3">
+            <a:schemeClr val="accent1"/>
+          </a:fillRef>
+          <a:effectRef idx="2">
+            <a:schemeClr val="accent1"/>
+          </a:effectRef>
+          <a:fontRef idx="minor">
+            <a:schemeClr val="lt1"/>
+          </a:fontRef>
+        </p:style>
+        <p:txBody>
+          <a:bodyPr rtlCol="0" anchor="ctr"/>
+          <a:lstStyle/>
+          <a:p>
+            <a:pPr algn="ctr"/>
+          </a:p>
+        </p:txBody>
+      </p:sp>
+      <p:sp>
+        <p:nvSpPr>
+          <p:cNvPr id="120" name="TextBox 119"/>
+          <p:cNvSpPr txBox="1"/>
+          <p:nvPr/>
+        </p:nvSpPr>
+        <p:spPr>
+          <a:xfrm>
+            <a:off x="4950822" y="3493008"/>
+            <a:ext cx="219456" cy="109728"/>
+          </a:xfrm>
+          <a:prstGeom prst="rect">
+            <a:avLst/>
+          </a:prstGeom>
+          <a:noFill/>
+          <a:effectLst/>
+        </p:spPr>
+        <p:txBody>
+          <a:bodyPr wrap="square" lIns="0" rIns="0" tIns="0" bIns="0" anchor="ctr">
+            <a:spAutoFit/>
+          </a:bodyPr>
+          <a:lstStyle/>
+          <a:p>
+            <a:pPr algn="ctr"/>
+            <a:r>
+              <a:rPr sz="400" b="0" i="0">
+                <a:solidFill>
+                  <a:srgbClr val="0A7D6E"/>
+                </a:solidFill>
+                <a:latin typeface="Arial"/>
+              </a:rPr>
+              <a:t>24</a:t>
+            </a:r>
+          </a:p>
+        </p:txBody>
+      </p:sp>
+      <p:sp>
+        <p:nvSpPr>
+          <p:cNvPr id="121" name="Rectangle 120"/>
+          <p:cNvSpPr/>
+          <p:nvPr/>
+        </p:nvSpPr>
+        <p:spPr>
+          <a:xfrm>
+            <a:off x="3749040" y="603504"/>
+            <a:ext cx="1325880" cy="365760"/>
+          </a:xfrm>
+          <a:prstGeom prst="rect">
+            <a:avLst/>
+          </a:prstGeom>
+          <a:solidFill>
+            <a:srgbClr val="FFFFFF"/>
+          </a:solidFill>
+          <a:ln w="10160">
+            <a:solidFill>
+              <a:srgbClr val="D4A300"/>
+            </a:solidFill>
+          </a:ln>
+          <a:effectLst/>
+        </p:spPr>
+        <p:style>
+          <a:lnRef idx="1">
+            <a:schemeClr val="accent1"/>
+          </a:lnRef>
+          <a:fillRef idx="3">
+            <a:schemeClr val="accent1"/>
+          </a:fillRef>
+          <a:effectRef idx="2">
+            <a:schemeClr val="accent1"/>
+          </a:effectRef>
+          <a:fontRef idx="minor">
+            <a:schemeClr val="lt1"/>
+          </a:fontRef>
+        </p:style>
+        <p:txBody>
+          <a:bodyPr rtlCol="0" anchor="ctr"/>
+          <a:lstStyle/>
+          <a:p>
+            <a:pPr algn="ctr"/>
+          </a:p>
+        </p:txBody>
+      </p:sp>
+      <p:sp>
+        <p:nvSpPr>
+          <p:cNvPr id="122" name="TextBox 121"/>
+          <p:cNvSpPr txBox="1"/>
+          <p:nvPr/>
+        </p:nvSpPr>
+        <p:spPr>
+          <a:xfrm>
+            <a:off x="3749040" y="630936"/>
+            <a:ext cx="1325880" cy="128016"/>
+          </a:xfrm>
+          <a:prstGeom prst="rect">
+            <a:avLst/>
+          </a:prstGeom>
+          <a:noFill/>
+          <a:effectLst/>
+        </p:spPr>
+        <p:txBody>
+          <a:bodyPr wrap="square" lIns="0" rIns="0" tIns="0" bIns="0" anchor="ctr">
+            <a:spAutoFit/>
+          </a:bodyPr>
+          <a:lstStyle/>
+          <a:p>
+            <a:pPr algn="ctr"/>
+            <a:r>
+              <a:rPr sz="700" b="1" i="0">
+                <a:solidFill>
+                  <a:srgbClr val="222222"/>
+                </a:solidFill>
+                <a:latin typeface="Arial"/>
+              </a:rPr>
+              <a:t>21/35 correct @ 0.5</a:t>
+            </a:r>
+          </a:p>
+        </p:txBody>
+      </p:sp>
+      <p:sp>
+        <p:nvSpPr>
+          <p:cNvPr id="123" name="TextBox 122"/>
+          <p:cNvSpPr txBox="1"/>
+          <p:nvPr/>
+        </p:nvSpPr>
+        <p:spPr>
+          <a:xfrm>
+            <a:off x="3749040" y="786384"/>
+            <a:ext cx="1325880" cy="128016"/>
+          </a:xfrm>
+          <a:prstGeom prst="rect">
+            <a:avLst/>
+          </a:prstGeom>
+          <a:noFill/>
+          <a:effectLst/>
+        </p:spPr>
+        <p:txBody>
+          <a:bodyPr wrap="square" lIns="0" rIns="0" tIns="0" bIns="0" anchor="ctr">
+            <a:spAutoFit/>
+          </a:bodyPr>
+          <a:lstStyle/>
+          <a:p>
+            <a:pPr algn="ctr"/>
+            <a:r>
+              <a:rPr sz="600" b="0" i="0">
+                <a:solidFill>
+                  <a:srgbClr val="D4A300"/>
+                </a:solidFill>
+                <a:latin typeface="Arial"/>
+              </a:rPr>
+              <a:t>accuracy = 0.60</a:t>
+            </a:r>
+          </a:p>
+        </p:txBody>
+      </p:sp>
+      <p:sp>
+        <p:nvSpPr>
+          <p:cNvPr id="124" name="Rectangle 123"/>
+          <p:cNvSpPr/>
+          <p:nvPr/>
+        </p:nvSpPr>
+        <p:spPr>
+          <a:xfrm>
+            <a:off x="1024128" y="594360"/>
+            <a:ext cx="146304" cy="128016"/>
+          </a:xfrm>
+          <a:prstGeom prst="rect">
+            <a:avLst/>
+          </a:prstGeom>
+          <a:solidFill>
+            <a:srgbClr val="0A7D6E"/>
+          </a:solidFill>
+          <a:ln>
+            <a:noFill/>
+          </a:ln>
+          <a:effectLst/>
+        </p:spPr>
+        <p:style>
+          <a:lnRef idx="1">
+            <a:schemeClr val="accent1"/>
+          </a:lnRef>
+          <a:fillRef idx="3">
+            <a:schemeClr val="accent1"/>
+          </a:fillRef>
+          <a:effectRef idx="2">
+            <a:schemeClr val="accent1"/>
+          </a:effectRef>
+          <a:fontRef idx="minor">
+            <a:schemeClr val="lt1"/>
+          </a:fontRef>
+        </p:style>
+        <p:txBody>
+          <a:bodyPr rtlCol="0" anchor="ctr"/>
+          <a:lstStyle/>
+          <a:p>
+            <a:pPr algn="ctr"/>
+          </a:p>
+        </p:txBody>
+      </p:sp>
+      <p:sp>
+        <p:nvSpPr>
+          <p:cNvPr id="125" name="TextBox 124"/>
+          <p:cNvSpPr txBox="1"/>
+          <p:nvPr/>
+        </p:nvSpPr>
+        <p:spPr>
+          <a:xfrm>
+            <a:off x="1207008" y="584360"/>
+            <a:ext cx="1280160" cy="182880"/>
+          </a:xfrm>
+          <a:prstGeom prst="rect">
+            <a:avLst/>
+          </a:prstGeom>
+          <a:noFill/>
+          <a:effectLst/>
+        </p:spPr>
+        <p:txBody>
+          <a:bodyPr wrap="square" lIns="0" rIns="0" tIns="0" bIns="0" anchor="ctr">
+            <a:spAutoFit/>
+          </a:bodyPr>
+          <a:lstStyle/>
+          <a:p>
+            <a:pPr algn="l"/>
+            <a:r>
+              <a:rPr sz="700" b="0" i="0">
+                <a:solidFill>
+                  <a:srgbClr val="222222"/>
+                </a:solidFill>
+                <a:latin typeface="Arial"/>
+              </a:rPr>
+              <a:t>true label: good</a:t>
+            </a:r>
+          </a:p>
+        </p:txBody>
+      </p:sp>
+      <p:sp>
+        <p:nvSpPr>
+          <p:cNvPr id="126" name="Rectangle 125"/>
+          <p:cNvSpPr/>
+          <p:nvPr/>
+        </p:nvSpPr>
+        <p:spPr>
+          <a:xfrm>
+            <a:off x="2487168" y="594360"/>
+            <a:ext cx="146304" cy="128016"/>
+          </a:xfrm>
+          <a:prstGeom prst="rect">
+            <a:avLst/>
+          </a:prstGeom>
+          <a:solidFill>
+            <a:srgbClr val="C53E1F"/>
+          </a:solidFill>
+          <a:ln>
+            <a:noFill/>
+          </a:ln>
+          <a:effectLst/>
+        </p:spPr>
+        <p:style>
+          <a:lnRef idx="1">
+            <a:schemeClr val="accent1"/>
+          </a:lnRef>
+          <a:fillRef idx="3">
+            <a:schemeClr val="accent1"/>
+          </a:fillRef>
+          <a:effectRef idx="2">
+            <a:schemeClr val="accent1"/>
+          </a:effectRef>
+          <a:fontRef idx="minor">
+            <a:schemeClr val="lt1"/>
+          </a:fontRef>
+        </p:style>
+        <p:txBody>
+          <a:bodyPr rtlCol="0" anchor="ctr"/>
+          <a:lstStyle/>
+          <a:p>
+            <a:pPr algn="ctr"/>
+          </a:p>
+        </p:txBody>
+      </p:sp>
+      <p:sp>
+        <p:nvSpPr>
+          <p:cNvPr id="127" name="TextBox 126"/>
+          <p:cNvSpPr txBox="1"/>
+          <p:nvPr/>
+        </p:nvSpPr>
+        <p:spPr>
+          <a:xfrm>
+            <a:off x="2651760" y="584360"/>
+            <a:ext cx="1280160" cy="182880"/>
+          </a:xfrm>
+          <a:prstGeom prst="rect">
+            <a:avLst/>
+          </a:prstGeom>
+          <a:noFill/>
+          <a:effectLst/>
+        </p:spPr>
+        <p:txBody>
+          <a:bodyPr wrap="square" lIns="0" rIns="0" tIns="0" bIns="0" anchor="ctr">
+            <a:spAutoFit/>
+          </a:bodyPr>
+          <a:lstStyle/>
+          <a:p>
+            <a:pPr algn="l"/>
+            <a:r>
+              <a:rPr sz="700" b="0" i="0">
+                <a:solidFill>
+                  <a:srgbClr val="222222"/>
+                </a:solidFill>
+                <a:latin typeface="Arial"/>
+              </a:rPr>
+              <a:t>true label: bad</a:t>
+            </a:r>
+          </a:p>
+        </p:txBody>
+      </p:sp>
+      <p:sp>
+        <p:nvSpPr>
+          <p:cNvPr id="128" name="TextBox 127"/>
+          <p:cNvSpPr txBox="1"/>
+          <p:nvPr/>
+        </p:nvSpPr>
+        <p:spPr>
+          <a:xfrm>
+            <a:off x="3950208" y="584360"/>
+            <a:ext cx="1828800" cy="182880"/>
+          </a:xfrm>
+          <a:prstGeom prst="rect">
+            <a:avLst/>
+          </a:prstGeom>
+          <a:noFill/>
+          <a:effectLst/>
+        </p:spPr>
+        <p:txBody>
+          <a:bodyPr wrap="square" lIns="0" rIns="0" tIns="0" bIns="0" anchor="ctr">
+            <a:spAutoFit/>
+          </a:bodyPr>
+          <a:lstStyle/>
+          <a:p>
+            <a:pPr algn="l"/>
+            <a:r>
+              <a:rPr sz="600" b="1" i="0">
+                <a:solidFill>
+                  <a:srgbClr val="D4A300"/>
+                </a:solidFill>
+                <a:latin typeface="Arial"/>
+              </a:rPr>
+              <a:t>✗ / gold border = misclassified at P = 0.5</a:t>
             </a:r>
           </a:p>
         </p:txBody>
